--- a/tidbits/Technical_Interview_Quiz.pptx
+++ b/tidbits/Technical_Interview_Quiz.pptx
@@ -5,58 +5,57 @@
     <p:sldMasterId id="2147483648" r:id="rId1"/>
   </p:sldMasterIdLst>
   <p:notesMasterIdLst>
-    <p:notesMasterId r:id="rId4"/>
+    <p:notesMasterId r:id="rId35"/>
   </p:notesMasterIdLst>
   <p:sldIdLst>
-    <p:sldId id="256" r:id="rId3"/>
-    <p:sldId id="257" r:id="rId5"/>
-    <p:sldId id="258" r:id="rId6"/>
-    <p:sldId id="259" r:id="rId7"/>
-    <p:sldId id="274" r:id="rId8"/>
-    <p:sldId id="275" r:id="rId9"/>
-    <p:sldId id="260" r:id="rId10"/>
-    <p:sldId id="261" r:id="rId11"/>
-    <p:sldId id="262" r:id="rId12"/>
-    <p:sldId id="276" r:id="rId13"/>
-    <p:sldId id="263" r:id="rId14"/>
-    <p:sldId id="278" r:id="rId15"/>
-    <p:sldId id="277" r:id="rId16"/>
-    <p:sldId id="264" r:id="rId17"/>
-    <p:sldId id="279" r:id="rId18"/>
-    <p:sldId id="280" r:id="rId19"/>
-    <p:sldId id="265" r:id="rId20"/>
-    <p:sldId id="266" r:id="rId21"/>
-    <p:sldId id="267" r:id="rId22"/>
-    <p:sldId id="281" r:id="rId23"/>
-    <p:sldId id="268" r:id="rId24"/>
-    <p:sldId id="282" r:id="rId25"/>
-    <p:sldId id="283" r:id="rId26"/>
-    <p:sldId id="284" r:id="rId27"/>
-    <p:sldId id="285" r:id="rId28"/>
-    <p:sldId id="269" r:id="rId29"/>
-    <p:sldId id="270" r:id="rId30"/>
-    <p:sldId id="271" r:id="rId31"/>
-    <p:sldId id="286" r:id="rId32"/>
-    <p:sldId id="287" r:id="rId33"/>
-    <p:sldId id="288" r:id="rId34"/>
-    <p:sldId id="289" r:id="rId35"/>
-    <p:sldId id="272" r:id="rId36"/>
-    <p:sldId id="273" r:id="rId37"/>
+    <p:sldId id="256" r:id="rId2"/>
+    <p:sldId id="257" r:id="rId3"/>
+    <p:sldId id="258" r:id="rId4"/>
+    <p:sldId id="259" r:id="rId5"/>
+    <p:sldId id="274" r:id="rId6"/>
+    <p:sldId id="275" r:id="rId7"/>
+    <p:sldId id="260" r:id="rId8"/>
+    <p:sldId id="261" r:id="rId9"/>
+    <p:sldId id="262" r:id="rId10"/>
+    <p:sldId id="276" r:id="rId11"/>
+    <p:sldId id="263" r:id="rId12"/>
+    <p:sldId id="278" r:id="rId13"/>
+    <p:sldId id="277" r:id="rId14"/>
+    <p:sldId id="264" r:id="rId15"/>
+    <p:sldId id="279" r:id="rId16"/>
+    <p:sldId id="280" r:id="rId17"/>
+    <p:sldId id="265" r:id="rId18"/>
+    <p:sldId id="266" r:id="rId19"/>
+    <p:sldId id="267" r:id="rId20"/>
+    <p:sldId id="281" r:id="rId21"/>
+    <p:sldId id="268" r:id="rId22"/>
+    <p:sldId id="282" r:id="rId23"/>
+    <p:sldId id="283" r:id="rId24"/>
+    <p:sldId id="284" r:id="rId25"/>
+    <p:sldId id="285" r:id="rId26"/>
+    <p:sldId id="269" r:id="rId27"/>
+    <p:sldId id="270" r:id="rId28"/>
+    <p:sldId id="271" r:id="rId29"/>
+    <p:sldId id="286" r:id="rId30"/>
+    <p:sldId id="287" r:id="rId31"/>
+    <p:sldId id="288" r:id="rId32"/>
+    <p:sldId id="289" r:id="rId33"/>
+    <p:sldId id="272" r:id="rId34"/>
   </p:sldIdLst>
   <p:sldSz cx="12192000" cy="6858000"/>
   <p:notesSz cx="6858000" cy="9144000"/>
   <p:embeddedFontLst>
     <p:embeddedFont>
-      <p:font typeface="Inter" panose="02000503000000020004"/>
-      <p:regular r:id="rId41"/>
+      <p:font typeface="Inter" panose="020B0604020202020204" charset="0"/>
+      <p:regular r:id="rId36"/>
     </p:embeddedFont>
     <p:embeddedFont>
-      <p:font typeface="Inter Black"/>
-      <p:regular r:id="rId42"/>
+      <p:font typeface="Inter Black" panose="020B0604020202020204" charset="0"/>
+      <p:regular r:id="rId37"/>
     </p:embeddedFont>
     <p:embeddedFont>
-      <p:font typeface="JetBrains Mono" panose="02000009000000000000"/>
-      <p:regular r:id="rId43"/>
+      <p:font typeface="JetBrains Mono" panose="020B0604020202020204" charset="0"/>
+      <p:regular r:id="rId38"/>
     </p:embeddedFont>
   </p:embeddedFontLst>
   <p:defaultTextStyle>
@@ -508,7 +507,9 @@
               <a:defRPr sz="1100"/>
             </a:lvl9pPr>
           </a:lstStyle>
-          <a:p/>
+          <a:p>
+            <a:endParaRPr/>
+          </a:p>
         </p:txBody>
       </p:sp>
     </p:spTree>
@@ -747,7 +748,7 @@
 </file>
 
 <file path=ppt/notesSlides/notesSlide1.xml><?xml version="1.0" encoding="utf-8"?>
-<p:notes xmlns:a="http://schemas.openxmlformats.org/drawingml/2006/main" xmlns:r="http://schemas.openxmlformats.org/officeDocument/2006/relationships" xmlns:p="http://schemas.openxmlformats.org/presentationml/2006/main" showMasterPhAnim="0" showMasterSp="0">
+<p:notes xmlns:a="http://schemas.openxmlformats.org/drawingml/2006/main" xmlns:r="http://schemas.openxmlformats.org/officeDocument/2006/relationships" xmlns:p="http://schemas.openxmlformats.org/presentationml/2006/main" showMasterSp="0" showMasterPhAnim="0">
   <p:cSld>
     <p:spTree>
       <p:nvGrpSpPr>
@@ -797,6 +798,7 @@
               </a:spcAft>
               <a:buNone/>
             </a:pPr>
+            <a:endParaRPr/>
           </a:p>
         </p:txBody>
       </p:sp>
@@ -812,8 +814,8 @@
         </p:nvSpPr>
         <p:spPr>
           <a:xfrm>
-            <a:off x="1143225" y="685800"/>
-            <a:ext cx="4572225" cy="3429000"/>
+            <a:off x="381000" y="685800"/>
+            <a:ext cx="6096000" cy="3429000"/>
           </a:xfrm>
           <a:custGeom>
             <a:avLst/>
@@ -850,7 +852,7 @@
 </file>
 
 <file path=ppt/notesSlides/notesSlide10.xml><?xml version="1.0" encoding="utf-8"?>
-<p:notes xmlns:a="http://schemas.openxmlformats.org/drawingml/2006/main" xmlns:r="http://schemas.openxmlformats.org/officeDocument/2006/relationships" xmlns:p="http://schemas.openxmlformats.org/presentationml/2006/main" showMasterPhAnim="0" showMasterSp="0">
+<p:notes xmlns:a="http://schemas.openxmlformats.org/drawingml/2006/main" xmlns:r="http://schemas.openxmlformats.org/officeDocument/2006/relationships" xmlns:p="http://schemas.openxmlformats.org/presentationml/2006/main" showMasterSp="0" showMasterPhAnim="0">
   <p:cSld>
     <p:spTree>
       <p:nvGrpSpPr>
@@ -900,6 +902,7 @@
               </a:spcAft>
               <a:buNone/>
             </a:pPr>
+            <a:endParaRPr/>
           </a:p>
         </p:txBody>
       </p:sp>
@@ -953,7 +956,7 @@
 </file>
 
 <file path=ppt/notesSlides/notesSlide11.xml><?xml version="1.0" encoding="utf-8"?>
-<p:notes xmlns:a="http://schemas.openxmlformats.org/drawingml/2006/main" xmlns:r="http://schemas.openxmlformats.org/officeDocument/2006/relationships" xmlns:p="http://schemas.openxmlformats.org/presentationml/2006/main" showMasterPhAnim="0" showMasterSp="0">
+<p:notes xmlns:a="http://schemas.openxmlformats.org/drawingml/2006/main" xmlns:r="http://schemas.openxmlformats.org/officeDocument/2006/relationships" xmlns:p="http://schemas.openxmlformats.org/presentationml/2006/main" showMasterSp="0" showMasterPhAnim="0">
   <p:cSld>
     <p:spTree>
       <p:nvGrpSpPr>
@@ -1003,6 +1006,7 @@
               </a:spcAft>
               <a:buNone/>
             </a:pPr>
+            <a:endParaRPr/>
           </a:p>
         </p:txBody>
       </p:sp>
@@ -1056,7 +1060,7 @@
 </file>
 
 <file path=ppt/notesSlides/notesSlide12.xml><?xml version="1.0" encoding="utf-8"?>
-<p:notes xmlns:a="http://schemas.openxmlformats.org/drawingml/2006/main" xmlns:r="http://schemas.openxmlformats.org/officeDocument/2006/relationships" xmlns:p="http://schemas.openxmlformats.org/presentationml/2006/main" showMasterPhAnim="0" showMasterSp="0">
+<p:notes xmlns:a="http://schemas.openxmlformats.org/drawingml/2006/main" xmlns:r="http://schemas.openxmlformats.org/officeDocument/2006/relationships" xmlns:p="http://schemas.openxmlformats.org/presentationml/2006/main" showMasterSp="0" showMasterPhAnim="0">
   <p:cSld>
     <p:spTree>
       <p:nvGrpSpPr>
@@ -1106,6 +1110,7 @@
               </a:spcAft>
               <a:buNone/>
             </a:pPr>
+            <a:endParaRPr/>
           </a:p>
         </p:txBody>
       </p:sp>
@@ -1159,7 +1164,7 @@
 </file>
 
 <file path=ppt/notesSlides/notesSlide13.xml><?xml version="1.0" encoding="utf-8"?>
-<p:notes xmlns:a="http://schemas.openxmlformats.org/drawingml/2006/main" xmlns:r="http://schemas.openxmlformats.org/officeDocument/2006/relationships" xmlns:p="http://schemas.openxmlformats.org/presentationml/2006/main" showMasterPhAnim="0" showMasterSp="0">
+<p:notes xmlns:a="http://schemas.openxmlformats.org/drawingml/2006/main" xmlns:r="http://schemas.openxmlformats.org/officeDocument/2006/relationships" xmlns:p="http://schemas.openxmlformats.org/presentationml/2006/main" showMasterSp="0" showMasterPhAnim="0">
   <p:cSld>
     <p:spTree>
       <p:nvGrpSpPr>
@@ -1209,6 +1214,7 @@
               </a:spcAft>
               <a:buNone/>
             </a:pPr>
+            <a:endParaRPr/>
           </a:p>
         </p:txBody>
       </p:sp>
@@ -1262,7 +1268,7 @@
 </file>
 
 <file path=ppt/notesSlides/notesSlide14.xml><?xml version="1.0" encoding="utf-8"?>
-<p:notes xmlns:a="http://schemas.openxmlformats.org/drawingml/2006/main" xmlns:r="http://schemas.openxmlformats.org/officeDocument/2006/relationships" xmlns:p="http://schemas.openxmlformats.org/presentationml/2006/main" showMasterPhAnim="0" showMasterSp="0">
+<p:notes xmlns:a="http://schemas.openxmlformats.org/drawingml/2006/main" xmlns:r="http://schemas.openxmlformats.org/officeDocument/2006/relationships" xmlns:p="http://schemas.openxmlformats.org/presentationml/2006/main" showMasterSp="0" showMasterPhAnim="0">
   <p:cSld>
     <p:spTree>
       <p:nvGrpSpPr>
@@ -1312,6 +1318,7 @@
               </a:spcAft>
               <a:buNone/>
             </a:pPr>
+            <a:endParaRPr/>
           </a:p>
         </p:txBody>
       </p:sp>
@@ -1365,7 +1372,7 @@
 </file>
 
 <file path=ppt/notesSlides/notesSlide15.xml><?xml version="1.0" encoding="utf-8"?>
-<p:notes xmlns:a="http://schemas.openxmlformats.org/drawingml/2006/main" xmlns:r="http://schemas.openxmlformats.org/officeDocument/2006/relationships" xmlns:p="http://schemas.openxmlformats.org/presentationml/2006/main" showMasterPhAnim="0" showMasterSp="0">
+<p:notes xmlns:a="http://schemas.openxmlformats.org/drawingml/2006/main" xmlns:r="http://schemas.openxmlformats.org/officeDocument/2006/relationships" xmlns:p="http://schemas.openxmlformats.org/presentationml/2006/main" showMasterSp="0" showMasterPhAnim="0">
   <p:cSld>
     <p:spTree>
       <p:nvGrpSpPr>
@@ -1415,6 +1422,7 @@
               </a:spcAft>
               <a:buNone/>
             </a:pPr>
+            <a:endParaRPr/>
           </a:p>
         </p:txBody>
       </p:sp>
@@ -1468,7 +1476,7 @@
 </file>
 
 <file path=ppt/notesSlides/notesSlide16.xml><?xml version="1.0" encoding="utf-8"?>
-<p:notes xmlns:a="http://schemas.openxmlformats.org/drawingml/2006/main" xmlns:r="http://schemas.openxmlformats.org/officeDocument/2006/relationships" xmlns:p="http://schemas.openxmlformats.org/presentationml/2006/main" showMasterPhAnim="0" showMasterSp="0">
+<p:notes xmlns:a="http://schemas.openxmlformats.org/drawingml/2006/main" xmlns:r="http://schemas.openxmlformats.org/officeDocument/2006/relationships" xmlns:p="http://schemas.openxmlformats.org/presentationml/2006/main" showMasterSp="0" showMasterPhAnim="0">
   <p:cSld>
     <p:spTree>
       <p:nvGrpSpPr>
@@ -1518,6 +1526,7 @@
               </a:spcAft>
               <a:buNone/>
             </a:pPr>
+            <a:endParaRPr/>
           </a:p>
         </p:txBody>
       </p:sp>
@@ -1571,7 +1580,7 @@
 </file>
 
 <file path=ppt/notesSlides/notesSlide17.xml><?xml version="1.0" encoding="utf-8"?>
-<p:notes xmlns:a="http://schemas.openxmlformats.org/drawingml/2006/main" xmlns:r="http://schemas.openxmlformats.org/officeDocument/2006/relationships" xmlns:p="http://schemas.openxmlformats.org/presentationml/2006/main" showMasterPhAnim="0" showMasterSp="0">
+<p:notes xmlns:a="http://schemas.openxmlformats.org/drawingml/2006/main" xmlns:r="http://schemas.openxmlformats.org/officeDocument/2006/relationships" xmlns:p="http://schemas.openxmlformats.org/presentationml/2006/main" showMasterSp="0" showMasterPhAnim="0">
   <p:cSld>
     <p:spTree>
       <p:nvGrpSpPr>
@@ -1621,6 +1630,7 @@
               </a:spcAft>
               <a:buNone/>
             </a:pPr>
+            <a:endParaRPr/>
           </a:p>
         </p:txBody>
       </p:sp>
@@ -1674,7 +1684,7 @@
 </file>
 
 <file path=ppt/notesSlides/notesSlide18.xml><?xml version="1.0" encoding="utf-8"?>
-<p:notes xmlns:a="http://schemas.openxmlformats.org/drawingml/2006/main" xmlns:r="http://schemas.openxmlformats.org/officeDocument/2006/relationships" xmlns:p="http://schemas.openxmlformats.org/presentationml/2006/main" showMasterPhAnim="0" showMasterSp="0">
+<p:notes xmlns:a="http://schemas.openxmlformats.org/drawingml/2006/main" xmlns:r="http://schemas.openxmlformats.org/officeDocument/2006/relationships" xmlns:p="http://schemas.openxmlformats.org/presentationml/2006/main" showMasterSp="0" showMasterPhAnim="0">
   <p:cSld>
     <p:spTree>
       <p:nvGrpSpPr>
@@ -1724,6 +1734,7 @@
               </a:spcAft>
               <a:buNone/>
             </a:pPr>
+            <a:endParaRPr/>
           </a:p>
         </p:txBody>
       </p:sp>
@@ -1777,7 +1788,7 @@
 </file>
 
 <file path=ppt/notesSlides/notesSlide19.xml><?xml version="1.0" encoding="utf-8"?>
-<p:notes xmlns:a="http://schemas.openxmlformats.org/drawingml/2006/main" xmlns:r="http://schemas.openxmlformats.org/officeDocument/2006/relationships" xmlns:p="http://schemas.openxmlformats.org/presentationml/2006/main" showMasterPhAnim="0" showMasterSp="0">
+<p:notes xmlns:a="http://schemas.openxmlformats.org/drawingml/2006/main" xmlns:r="http://schemas.openxmlformats.org/officeDocument/2006/relationships" xmlns:p="http://schemas.openxmlformats.org/presentationml/2006/main" showMasterSp="0" showMasterPhAnim="0">
   <p:cSld>
     <p:spTree>
       <p:nvGrpSpPr>
@@ -1827,6 +1838,7 @@
               </a:spcAft>
               <a:buNone/>
             </a:pPr>
+            <a:endParaRPr/>
           </a:p>
         </p:txBody>
       </p:sp>
@@ -1880,7 +1892,7 @@
 </file>
 
 <file path=ppt/notesSlides/notesSlide2.xml><?xml version="1.0" encoding="utf-8"?>
-<p:notes xmlns:a="http://schemas.openxmlformats.org/drawingml/2006/main" xmlns:r="http://schemas.openxmlformats.org/officeDocument/2006/relationships" xmlns:p="http://schemas.openxmlformats.org/presentationml/2006/main" showMasterPhAnim="0" showMasterSp="0">
+<p:notes xmlns:a="http://schemas.openxmlformats.org/drawingml/2006/main" xmlns:r="http://schemas.openxmlformats.org/officeDocument/2006/relationships" xmlns:p="http://schemas.openxmlformats.org/presentationml/2006/main" showMasterSp="0" showMasterPhAnim="0">
   <p:cSld>
     <p:spTree>
       <p:nvGrpSpPr>
@@ -1930,6 +1942,7 @@
               </a:spcAft>
               <a:buNone/>
             </a:pPr>
+            <a:endParaRPr/>
           </a:p>
         </p:txBody>
       </p:sp>
@@ -1983,7 +1996,7 @@
 </file>
 
 <file path=ppt/notesSlides/notesSlide20.xml><?xml version="1.0" encoding="utf-8"?>
-<p:notes xmlns:a="http://schemas.openxmlformats.org/drawingml/2006/main" xmlns:r="http://schemas.openxmlformats.org/officeDocument/2006/relationships" xmlns:p="http://schemas.openxmlformats.org/presentationml/2006/main" showMasterPhAnim="0" showMasterSp="0">
+<p:notes xmlns:a="http://schemas.openxmlformats.org/drawingml/2006/main" xmlns:r="http://schemas.openxmlformats.org/officeDocument/2006/relationships" xmlns:p="http://schemas.openxmlformats.org/presentationml/2006/main" showMasterSp="0" showMasterPhAnim="0">
   <p:cSld>
     <p:spTree>
       <p:nvGrpSpPr>
@@ -2033,6 +2046,7 @@
               </a:spcAft>
               <a:buNone/>
             </a:pPr>
+            <a:endParaRPr/>
           </a:p>
         </p:txBody>
       </p:sp>
@@ -2086,7 +2100,7 @@
 </file>
 
 <file path=ppt/notesSlides/notesSlide21.xml><?xml version="1.0" encoding="utf-8"?>
-<p:notes xmlns:a="http://schemas.openxmlformats.org/drawingml/2006/main" xmlns:r="http://schemas.openxmlformats.org/officeDocument/2006/relationships" xmlns:p="http://schemas.openxmlformats.org/presentationml/2006/main" showMasterPhAnim="0" showMasterSp="0">
+<p:notes xmlns:a="http://schemas.openxmlformats.org/drawingml/2006/main" xmlns:r="http://schemas.openxmlformats.org/officeDocument/2006/relationships" xmlns:p="http://schemas.openxmlformats.org/presentationml/2006/main" showMasterSp="0" showMasterPhAnim="0">
   <p:cSld>
     <p:spTree>
       <p:nvGrpSpPr>
@@ -2136,6 +2150,7 @@
               </a:spcAft>
               <a:buNone/>
             </a:pPr>
+            <a:endParaRPr/>
           </a:p>
         </p:txBody>
       </p:sp>
@@ -2189,7 +2204,7 @@
 </file>
 
 <file path=ppt/notesSlides/notesSlide22.xml><?xml version="1.0" encoding="utf-8"?>
-<p:notes xmlns:a="http://schemas.openxmlformats.org/drawingml/2006/main" xmlns:r="http://schemas.openxmlformats.org/officeDocument/2006/relationships" xmlns:p="http://schemas.openxmlformats.org/presentationml/2006/main" showMasterPhAnim="0" showMasterSp="0">
+<p:notes xmlns:a="http://schemas.openxmlformats.org/drawingml/2006/main" xmlns:r="http://schemas.openxmlformats.org/officeDocument/2006/relationships" xmlns:p="http://schemas.openxmlformats.org/presentationml/2006/main" showMasterSp="0" showMasterPhAnim="0">
   <p:cSld>
     <p:spTree>
       <p:nvGrpSpPr>
@@ -2239,6 +2254,7 @@
               </a:spcAft>
               <a:buNone/>
             </a:pPr>
+            <a:endParaRPr/>
           </a:p>
         </p:txBody>
       </p:sp>
@@ -2292,7 +2308,7 @@
 </file>
 
 <file path=ppt/notesSlides/notesSlide23.xml><?xml version="1.0" encoding="utf-8"?>
-<p:notes xmlns:a="http://schemas.openxmlformats.org/drawingml/2006/main" xmlns:r="http://schemas.openxmlformats.org/officeDocument/2006/relationships" xmlns:p="http://schemas.openxmlformats.org/presentationml/2006/main" showMasterPhAnim="0" showMasterSp="0">
+<p:notes xmlns:a="http://schemas.openxmlformats.org/drawingml/2006/main" xmlns:r="http://schemas.openxmlformats.org/officeDocument/2006/relationships" xmlns:p="http://schemas.openxmlformats.org/presentationml/2006/main" showMasterSp="0" showMasterPhAnim="0">
   <p:cSld>
     <p:spTree>
       <p:nvGrpSpPr>
@@ -2342,6 +2358,7 @@
               </a:spcAft>
               <a:buNone/>
             </a:pPr>
+            <a:endParaRPr/>
           </a:p>
         </p:txBody>
       </p:sp>
@@ -2395,7 +2412,7 @@
 </file>
 
 <file path=ppt/notesSlides/notesSlide24.xml><?xml version="1.0" encoding="utf-8"?>
-<p:notes xmlns:a="http://schemas.openxmlformats.org/drawingml/2006/main" xmlns:r="http://schemas.openxmlformats.org/officeDocument/2006/relationships" xmlns:p="http://schemas.openxmlformats.org/presentationml/2006/main" showMasterPhAnim="0" showMasterSp="0">
+<p:notes xmlns:a="http://schemas.openxmlformats.org/drawingml/2006/main" xmlns:r="http://schemas.openxmlformats.org/officeDocument/2006/relationships" xmlns:p="http://schemas.openxmlformats.org/presentationml/2006/main" showMasterSp="0" showMasterPhAnim="0">
   <p:cSld>
     <p:spTree>
       <p:nvGrpSpPr>
@@ -2445,6 +2462,7 @@
               </a:spcAft>
               <a:buNone/>
             </a:pPr>
+            <a:endParaRPr/>
           </a:p>
         </p:txBody>
       </p:sp>
@@ -2498,7 +2516,7 @@
 </file>
 
 <file path=ppt/notesSlides/notesSlide25.xml><?xml version="1.0" encoding="utf-8"?>
-<p:notes xmlns:a="http://schemas.openxmlformats.org/drawingml/2006/main" xmlns:r="http://schemas.openxmlformats.org/officeDocument/2006/relationships" xmlns:p="http://schemas.openxmlformats.org/presentationml/2006/main" showMasterPhAnim="0" showMasterSp="0">
+<p:notes xmlns:a="http://schemas.openxmlformats.org/drawingml/2006/main" xmlns:r="http://schemas.openxmlformats.org/officeDocument/2006/relationships" xmlns:p="http://schemas.openxmlformats.org/presentationml/2006/main" showMasterSp="0" showMasterPhAnim="0">
   <p:cSld>
     <p:spTree>
       <p:nvGrpSpPr>
@@ -2548,6 +2566,7 @@
               </a:spcAft>
               <a:buNone/>
             </a:pPr>
+            <a:endParaRPr/>
           </a:p>
         </p:txBody>
       </p:sp>
@@ -2601,7 +2620,7 @@
 </file>
 
 <file path=ppt/notesSlides/notesSlide26.xml><?xml version="1.0" encoding="utf-8"?>
-<p:notes xmlns:a="http://schemas.openxmlformats.org/drawingml/2006/main" xmlns:r="http://schemas.openxmlformats.org/officeDocument/2006/relationships" xmlns:p="http://schemas.openxmlformats.org/presentationml/2006/main" showMasterPhAnim="0" showMasterSp="0">
+<p:notes xmlns:a="http://schemas.openxmlformats.org/drawingml/2006/main" xmlns:r="http://schemas.openxmlformats.org/officeDocument/2006/relationships" xmlns:p="http://schemas.openxmlformats.org/presentationml/2006/main" showMasterSp="0" showMasterPhAnim="0">
   <p:cSld>
     <p:spTree>
       <p:nvGrpSpPr>
@@ -2651,6 +2670,7 @@
               </a:spcAft>
               <a:buNone/>
             </a:pPr>
+            <a:endParaRPr/>
           </a:p>
         </p:txBody>
       </p:sp>
@@ -2704,7 +2724,7 @@
 </file>
 
 <file path=ppt/notesSlides/notesSlide27.xml><?xml version="1.0" encoding="utf-8"?>
-<p:notes xmlns:a="http://schemas.openxmlformats.org/drawingml/2006/main" xmlns:r="http://schemas.openxmlformats.org/officeDocument/2006/relationships" xmlns:p="http://schemas.openxmlformats.org/presentationml/2006/main" showMasterPhAnim="0" showMasterSp="0">
+<p:notes xmlns:a="http://schemas.openxmlformats.org/drawingml/2006/main" xmlns:r="http://schemas.openxmlformats.org/officeDocument/2006/relationships" xmlns:p="http://schemas.openxmlformats.org/presentationml/2006/main" showMasterSp="0" showMasterPhAnim="0">
   <p:cSld>
     <p:spTree>
       <p:nvGrpSpPr>
@@ -2754,6 +2774,7 @@
               </a:spcAft>
               <a:buNone/>
             </a:pPr>
+            <a:endParaRPr/>
           </a:p>
         </p:txBody>
       </p:sp>
@@ -2807,7 +2828,7 @@
 </file>
 
 <file path=ppt/notesSlides/notesSlide28.xml><?xml version="1.0" encoding="utf-8"?>
-<p:notes xmlns:a="http://schemas.openxmlformats.org/drawingml/2006/main" xmlns:r="http://schemas.openxmlformats.org/officeDocument/2006/relationships" xmlns:p="http://schemas.openxmlformats.org/presentationml/2006/main" showMasterPhAnim="0" showMasterSp="0">
+<p:notes xmlns:a="http://schemas.openxmlformats.org/drawingml/2006/main" xmlns:r="http://schemas.openxmlformats.org/officeDocument/2006/relationships" xmlns:p="http://schemas.openxmlformats.org/presentationml/2006/main" showMasterSp="0" showMasterPhAnim="0">
   <p:cSld>
     <p:spTree>
       <p:nvGrpSpPr>
@@ -2857,6 +2878,7 @@
               </a:spcAft>
               <a:buNone/>
             </a:pPr>
+            <a:endParaRPr/>
           </a:p>
         </p:txBody>
       </p:sp>
@@ -2910,7 +2932,7 @@
 </file>
 
 <file path=ppt/notesSlides/notesSlide29.xml><?xml version="1.0" encoding="utf-8"?>
-<p:notes xmlns:a="http://schemas.openxmlformats.org/drawingml/2006/main" xmlns:r="http://schemas.openxmlformats.org/officeDocument/2006/relationships" xmlns:p="http://schemas.openxmlformats.org/presentationml/2006/main" showMasterPhAnim="0" showMasterSp="0">
+<p:notes xmlns:a="http://schemas.openxmlformats.org/drawingml/2006/main" xmlns:r="http://schemas.openxmlformats.org/officeDocument/2006/relationships" xmlns:p="http://schemas.openxmlformats.org/presentationml/2006/main" showMasterSp="0" showMasterPhAnim="0">
   <p:cSld>
     <p:spTree>
       <p:nvGrpSpPr>
@@ -2960,6 +2982,7 @@
               </a:spcAft>
               <a:buNone/>
             </a:pPr>
+            <a:endParaRPr/>
           </a:p>
         </p:txBody>
       </p:sp>
@@ -3013,7 +3036,7 @@
 </file>
 
 <file path=ppt/notesSlides/notesSlide3.xml><?xml version="1.0" encoding="utf-8"?>
-<p:notes xmlns:a="http://schemas.openxmlformats.org/drawingml/2006/main" xmlns:r="http://schemas.openxmlformats.org/officeDocument/2006/relationships" xmlns:p="http://schemas.openxmlformats.org/presentationml/2006/main" showMasterPhAnim="0" showMasterSp="0">
+<p:notes xmlns:a="http://schemas.openxmlformats.org/drawingml/2006/main" xmlns:r="http://schemas.openxmlformats.org/officeDocument/2006/relationships" xmlns:p="http://schemas.openxmlformats.org/presentationml/2006/main" showMasterSp="0" showMasterPhAnim="0">
   <p:cSld>
     <p:spTree>
       <p:nvGrpSpPr>
@@ -3063,6 +3086,7 @@
               </a:spcAft>
               <a:buNone/>
             </a:pPr>
+            <a:endParaRPr/>
           </a:p>
         </p:txBody>
       </p:sp>
@@ -3116,7 +3140,7 @@
 </file>
 
 <file path=ppt/notesSlides/notesSlide30.xml><?xml version="1.0" encoding="utf-8"?>
-<p:notes xmlns:a="http://schemas.openxmlformats.org/drawingml/2006/main" xmlns:r="http://schemas.openxmlformats.org/officeDocument/2006/relationships" xmlns:p="http://schemas.openxmlformats.org/presentationml/2006/main" showMasterPhAnim="0" showMasterSp="0">
+<p:notes xmlns:a="http://schemas.openxmlformats.org/drawingml/2006/main" xmlns:r="http://schemas.openxmlformats.org/officeDocument/2006/relationships" xmlns:p="http://schemas.openxmlformats.org/presentationml/2006/main" showMasterSp="0" showMasterPhAnim="0">
   <p:cSld>
     <p:spTree>
       <p:nvGrpSpPr>
@@ -3166,6 +3190,7 @@
               </a:spcAft>
               <a:buNone/>
             </a:pPr>
+            <a:endParaRPr/>
           </a:p>
         </p:txBody>
       </p:sp>
@@ -3219,7 +3244,7 @@
 </file>
 
 <file path=ppt/notesSlides/notesSlide31.xml><?xml version="1.0" encoding="utf-8"?>
-<p:notes xmlns:a="http://schemas.openxmlformats.org/drawingml/2006/main" xmlns:r="http://schemas.openxmlformats.org/officeDocument/2006/relationships" xmlns:p="http://schemas.openxmlformats.org/presentationml/2006/main" showMasterPhAnim="0" showMasterSp="0">
+<p:notes xmlns:a="http://schemas.openxmlformats.org/drawingml/2006/main" xmlns:r="http://schemas.openxmlformats.org/officeDocument/2006/relationships" xmlns:p="http://schemas.openxmlformats.org/presentationml/2006/main" showMasterSp="0" showMasterPhAnim="0">
   <p:cSld>
     <p:spTree>
       <p:nvGrpSpPr>
@@ -3269,6 +3294,7 @@
               </a:spcAft>
               <a:buNone/>
             </a:pPr>
+            <a:endParaRPr/>
           </a:p>
         </p:txBody>
       </p:sp>
@@ -3322,7 +3348,7 @@
 </file>
 
 <file path=ppt/notesSlides/notesSlide32.xml><?xml version="1.0" encoding="utf-8"?>
-<p:notes xmlns:a="http://schemas.openxmlformats.org/drawingml/2006/main" xmlns:r="http://schemas.openxmlformats.org/officeDocument/2006/relationships" xmlns:p="http://schemas.openxmlformats.org/presentationml/2006/main" showMasterPhAnim="0" showMasterSp="0">
+<p:notes xmlns:a="http://schemas.openxmlformats.org/drawingml/2006/main" xmlns:r="http://schemas.openxmlformats.org/officeDocument/2006/relationships" xmlns:p="http://schemas.openxmlformats.org/presentationml/2006/main" showMasterSp="0" showMasterPhAnim="0">
   <p:cSld>
     <p:spTree>
       <p:nvGrpSpPr>
@@ -3372,6 +3398,7 @@
               </a:spcAft>
               <a:buNone/>
             </a:pPr>
+            <a:endParaRPr/>
           </a:p>
         </p:txBody>
       </p:sp>
@@ -3425,7 +3452,7 @@
 </file>
 
 <file path=ppt/notesSlides/notesSlide33.xml><?xml version="1.0" encoding="utf-8"?>
-<p:notes xmlns:a="http://schemas.openxmlformats.org/drawingml/2006/main" xmlns:r="http://schemas.openxmlformats.org/officeDocument/2006/relationships" xmlns:p="http://schemas.openxmlformats.org/presentationml/2006/main" showMasterPhAnim="0" showMasterSp="0">
+<p:notes xmlns:a="http://schemas.openxmlformats.org/drawingml/2006/main" xmlns:r="http://schemas.openxmlformats.org/officeDocument/2006/relationships" xmlns:p="http://schemas.openxmlformats.org/presentationml/2006/main" showMasterSp="0" showMasterPhAnim="0">
   <p:cSld>
     <p:spTree>
       <p:nvGrpSpPr>
@@ -3475,6 +3502,7 @@
               </a:spcAft>
               <a:buNone/>
             </a:pPr>
+            <a:endParaRPr/>
           </a:p>
         </p:txBody>
       </p:sp>
@@ -3527,12 +3555,12 @@
 </p:notes>
 </file>
 
-<file path=ppt/notesSlides/notesSlide34.xml><?xml version="1.0" encoding="utf-8"?>
-<p:notes xmlns:a="http://schemas.openxmlformats.org/drawingml/2006/main" xmlns:r="http://schemas.openxmlformats.org/officeDocument/2006/relationships" xmlns:p="http://schemas.openxmlformats.org/presentationml/2006/main" showMasterPhAnim="0" showMasterSp="0">
+<file path=ppt/notesSlides/notesSlide4.xml><?xml version="1.0" encoding="utf-8"?>
+<p:notes xmlns:a="http://schemas.openxmlformats.org/drawingml/2006/main" xmlns:r="http://schemas.openxmlformats.org/officeDocument/2006/relationships" xmlns:p="http://schemas.openxmlformats.org/presentationml/2006/main" showMasterSp="0" showMasterPhAnim="0">
   <p:cSld>
     <p:spTree>
       <p:nvGrpSpPr>
-        <p:cNvPr id="1" name="Shape 394"/>
+        <p:cNvPr id="1" name="Shape 124"/>
         <p:cNvGrpSpPr/>
         <p:nvPr/>
       </p:nvGrpSpPr>
@@ -3546,7 +3574,7 @@
       </p:grpSpPr>
       <p:sp>
         <p:nvSpPr>
-          <p:cNvPr id="395" name="Google Shape;395;p18:notes"/>
+          <p:cNvPr id="125" name="Google Shape;125;p4:notes"/>
           <p:cNvSpPr txBox="1">
             <a:spLocks noGrp="1"/>
           </p:cNvSpPr>
@@ -3578,12 +3606,13 @@
               </a:spcAft>
               <a:buNone/>
             </a:pPr>
-          </a:p>
-        </p:txBody>
-      </p:sp>
-      <p:sp>
-        <p:nvSpPr>
-          <p:cNvPr id="396" name="Google Shape;396;p18:notes"/>
+            <a:endParaRPr/>
+          </a:p>
+        </p:txBody>
+      </p:sp>
+      <p:sp>
+        <p:nvSpPr>
+          <p:cNvPr id="126" name="Google Shape;126;p4:notes"/>
           <p:cNvSpPr>
             <a:spLocks noGrp="1" noRot="1" noChangeAspect="1"/>
           </p:cNvSpPr>
@@ -3630,8 +3659,8 @@
 </p:notes>
 </file>
 
-<file path=ppt/notesSlides/notesSlide4.xml><?xml version="1.0" encoding="utf-8"?>
-<p:notes xmlns:a="http://schemas.openxmlformats.org/drawingml/2006/main" xmlns:r="http://schemas.openxmlformats.org/officeDocument/2006/relationships" xmlns:p="http://schemas.openxmlformats.org/presentationml/2006/main" showMasterPhAnim="0" showMasterSp="0">
+<file path=ppt/notesSlides/notesSlide5.xml><?xml version="1.0" encoding="utf-8"?>
+<p:notes xmlns:a="http://schemas.openxmlformats.org/drawingml/2006/main" xmlns:r="http://schemas.openxmlformats.org/officeDocument/2006/relationships" xmlns:p="http://schemas.openxmlformats.org/presentationml/2006/main" showMasterSp="0" showMasterPhAnim="0">
   <p:cSld>
     <p:spTree>
       <p:nvGrpSpPr>
@@ -3681,6 +3710,7 @@
               </a:spcAft>
               <a:buNone/>
             </a:pPr>
+            <a:endParaRPr/>
           </a:p>
         </p:txBody>
       </p:sp>
@@ -3733,8 +3763,8 @@
 </p:notes>
 </file>
 
-<file path=ppt/notesSlides/notesSlide5.xml><?xml version="1.0" encoding="utf-8"?>
-<p:notes xmlns:a="http://schemas.openxmlformats.org/drawingml/2006/main" xmlns:r="http://schemas.openxmlformats.org/officeDocument/2006/relationships" xmlns:p="http://schemas.openxmlformats.org/presentationml/2006/main" showMasterPhAnim="0" showMasterSp="0">
+<file path=ppt/notesSlides/notesSlide6.xml><?xml version="1.0" encoding="utf-8"?>
+<p:notes xmlns:a="http://schemas.openxmlformats.org/drawingml/2006/main" xmlns:r="http://schemas.openxmlformats.org/officeDocument/2006/relationships" xmlns:p="http://schemas.openxmlformats.org/presentationml/2006/main" showMasterSp="0" showMasterPhAnim="0">
   <p:cSld>
     <p:spTree>
       <p:nvGrpSpPr>
@@ -3784,6 +3814,7 @@
               </a:spcAft>
               <a:buNone/>
             </a:pPr>
+            <a:endParaRPr/>
           </a:p>
         </p:txBody>
       </p:sp>
@@ -3836,12 +3867,12 @@
 </p:notes>
 </file>
 
-<file path=ppt/notesSlides/notesSlide6.xml><?xml version="1.0" encoding="utf-8"?>
-<p:notes xmlns:a="http://schemas.openxmlformats.org/drawingml/2006/main" xmlns:r="http://schemas.openxmlformats.org/officeDocument/2006/relationships" xmlns:p="http://schemas.openxmlformats.org/presentationml/2006/main" showMasterPhAnim="0" showMasterSp="0">
+<file path=ppt/notesSlides/notesSlide7.xml><?xml version="1.0" encoding="utf-8"?>
+<p:notes xmlns:a="http://schemas.openxmlformats.org/drawingml/2006/main" xmlns:r="http://schemas.openxmlformats.org/officeDocument/2006/relationships" xmlns:p="http://schemas.openxmlformats.org/presentationml/2006/main" showMasterSp="0" showMasterPhAnim="0">
   <p:cSld>
     <p:spTree>
       <p:nvGrpSpPr>
-        <p:cNvPr id="1" name="Shape 124"/>
+        <p:cNvPr id="1" name="Shape 137"/>
         <p:cNvGrpSpPr/>
         <p:nvPr/>
       </p:nvGrpSpPr>
@@ -3855,7 +3886,7 @@
       </p:grpSpPr>
       <p:sp>
         <p:nvSpPr>
-          <p:cNvPr id="125" name="Google Shape;125;p4:notes"/>
+          <p:cNvPr id="138" name="Google Shape;138;p5:notes"/>
           <p:cNvSpPr txBox="1">
             <a:spLocks noGrp="1"/>
           </p:cNvSpPr>
@@ -3887,12 +3918,13 @@
               </a:spcAft>
               <a:buNone/>
             </a:pPr>
-          </a:p>
-        </p:txBody>
-      </p:sp>
-      <p:sp>
-        <p:nvSpPr>
-          <p:cNvPr id="126" name="Google Shape;126;p4:notes"/>
+            <a:endParaRPr/>
+          </a:p>
+        </p:txBody>
+      </p:sp>
+      <p:sp>
+        <p:nvSpPr>
+          <p:cNvPr id="139" name="Google Shape;139;p5:notes"/>
           <p:cNvSpPr>
             <a:spLocks noGrp="1" noRot="1" noChangeAspect="1"/>
           </p:cNvSpPr>
@@ -3939,12 +3971,12 @@
 </p:notes>
 </file>
 
-<file path=ppt/notesSlides/notesSlide7.xml><?xml version="1.0" encoding="utf-8"?>
-<p:notes xmlns:a="http://schemas.openxmlformats.org/drawingml/2006/main" xmlns:r="http://schemas.openxmlformats.org/officeDocument/2006/relationships" xmlns:p="http://schemas.openxmlformats.org/presentationml/2006/main" showMasterPhAnim="0" showMasterSp="0">
+<file path=ppt/notesSlides/notesSlide8.xml><?xml version="1.0" encoding="utf-8"?>
+<p:notes xmlns:a="http://schemas.openxmlformats.org/drawingml/2006/main" xmlns:r="http://schemas.openxmlformats.org/officeDocument/2006/relationships" xmlns:p="http://schemas.openxmlformats.org/presentationml/2006/main" showMasterSp="0" showMasterPhAnim="0">
   <p:cSld>
     <p:spTree>
       <p:nvGrpSpPr>
-        <p:cNvPr id="1" name="Shape 137"/>
+        <p:cNvPr id="1" name="Shape 146"/>
         <p:cNvGrpSpPr/>
         <p:nvPr/>
       </p:nvGrpSpPr>
@@ -3958,7 +3990,7 @@
       </p:grpSpPr>
       <p:sp>
         <p:nvSpPr>
-          <p:cNvPr id="138" name="Google Shape;138;p5:notes"/>
+          <p:cNvPr id="147" name="Google Shape;147;p6:notes"/>
           <p:cNvSpPr txBox="1">
             <a:spLocks noGrp="1"/>
           </p:cNvSpPr>
@@ -3990,12 +4022,13 @@
               </a:spcAft>
               <a:buNone/>
             </a:pPr>
-          </a:p>
-        </p:txBody>
-      </p:sp>
-      <p:sp>
-        <p:nvSpPr>
-          <p:cNvPr id="139" name="Google Shape;139;p5:notes"/>
+            <a:endParaRPr/>
+          </a:p>
+        </p:txBody>
+      </p:sp>
+      <p:sp>
+        <p:nvSpPr>
+          <p:cNvPr id="148" name="Google Shape;148;p6:notes"/>
           <p:cNvSpPr>
             <a:spLocks noGrp="1" noRot="1" noChangeAspect="1"/>
           </p:cNvSpPr>
@@ -4005,8 +4038,8 @@
         </p:nvSpPr>
         <p:spPr>
           <a:xfrm>
-            <a:off x="381000" y="685800"/>
-            <a:ext cx="6096000" cy="3429000"/>
+            <a:off x="1143225" y="685800"/>
+            <a:ext cx="4572225" cy="3429000"/>
           </a:xfrm>
           <a:custGeom>
             <a:avLst/>
@@ -4042,12 +4075,12 @@
 </p:notes>
 </file>
 
-<file path=ppt/notesSlides/notesSlide8.xml><?xml version="1.0" encoding="utf-8"?>
-<p:notes xmlns:a="http://schemas.openxmlformats.org/drawingml/2006/main" xmlns:r="http://schemas.openxmlformats.org/officeDocument/2006/relationships" xmlns:p="http://schemas.openxmlformats.org/presentationml/2006/main" showMasterPhAnim="0" showMasterSp="0">
+<file path=ppt/notesSlides/notesSlide9.xml><?xml version="1.0" encoding="utf-8"?>
+<p:notes xmlns:a="http://schemas.openxmlformats.org/drawingml/2006/main" xmlns:r="http://schemas.openxmlformats.org/officeDocument/2006/relationships" xmlns:p="http://schemas.openxmlformats.org/presentationml/2006/main" showMasterSp="0" showMasterPhAnim="0">
   <p:cSld>
     <p:spTree>
       <p:nvGrpSpPr>
-        <p:cNvPr id="1" name="Shape 146"/>
+        <p:cNvPr id="1" name="Shape 172"/>
         <p:cNvGrpSpPr/>
         <p:nvPr/>
       </p:nvGrpSpPr>
@@ -4061,7 +4094,7 @@
       </p:grpSpPr>
       <p:sp>
         <p:nvSpPr>
-          <p:cNvPr id="147" name="Google Shape;147;p6:notes"/>
+          <p:cNvPr id="173" name="Google Shape;173;p7:notes"/>
           <p:cNvSpPr txBox="1">
             <a:spLocks noGrp="1"/>
           </p:cNvSpPr>
@@ -4093,12 +4126,13 @@
               </a:spcAft>
               <a:buNone/>
             </a:pPr>
-          </a:p>
-        </p:txBody>
-      </p:sp>
-      <p:sp>
-        <p:nvSpPr>
-          <p:cNvPr id="148" name="Google Shape;148;p6:notes"/>
+            <a:endParaRPr/>
+          </a:p>
+        </p:txBody>
+      </p:sp>
+      <p:sp>
+        <p:nvSpPr>
+          <p:cNvPr id="174" name="Google Shape;174;p7:notes"/>
           <p:cNvSpPr>
             <a:spLocks noGrp="1" noRot="1" noChangeAspect="1"/>
           </p:cNvSpPr>
@@ -4145,111 +4179,8 @@
 </p:notes>
 </file>
 
-<file path=ppt/notesSlides/notesSlide9.xml><?xml version="1.0" encoding="utf-8"?>
-<p:notes xmlns:a="http://schemas.openxmlformats.org/drawingml/2006/main" xmlns:r="http://schemas.openxmlformats.org/officeDocument/2006/relationships" xmlns:p="http://schemas.openxmlformats.org/presentationml/2006/main" showMasterPhAnim="0" showMasterSp="0">
-  <p:cSld>
-    <p:spTree>
-      <p:nvGrpSpPr>
-        <p:cNvPr id="1" name="Shape 172"/>
-        <p:cNvGrpSpPr/>
-        <p:nvPr/>
-      </p:nvGrpSpPr>
-      <p:grpSpPr>
-        <a:xfrm>
-          <a:off x="0" y="0"/>
-          <a:ext cx="0" cy="0"/>
-          <a:chOff x="0" y="0"/>
-          <a:chExt cx="0" cy="0"/>
-        </a:xfrm>
-      </p:grpSpPr>
-      <p:sp>
-        <p:nvSpPr>
-          <p:cNvPr id="173" name="Google Shape;173;p7:notes"/>
-          <p:cNvSpPr txBox="1">
-            <a:spLocks noGrp="1"/>
-          </p:cNvSpPr>
-          <p:nvPr>
-            <p:ph type="body" idx="1"/>
-          </p:nvPr>
-        </p:nvSpPr>
-        <p:spPr>
-          <a:xfrm>
-            <a:off x="685800" y="4343400"/>
-            <a:ext cx="5486400" cy="4114800"/>
-          </a:xfrm>
-          <a:prstGeom prst="rect">
-            <a:avLst/>
-          </a:prstGeom>
-        </p:spPr>
-        <p:txBody>
-          <a:bodyPr spcFirstLastPara="1" wrap="square" lIns="91425" tIns="91425" rIns="91425" bIns="91425" anchor="t" anchorCtr="0">
-            <a:noAutofit/>
-          </a:bodyPr>
-          <a:lstStyle/>
-          <a:p>
-            <a:pPr marL="0" lvl="0" indent="0" algn="l" rtl="0">
-              <a:spcBef>
-                <a:spcPts val="0"/>
-              </a:spcBef>
-              <a:spcAft>
-                <a:spcPts val="0"/>
-              </a:spcAft>
-              <a:buNone/>
-            </a:pPr>
-          </a:p>
-        </p:txBody>
-      </p:sp>
-      <p:sp>
-        <p:nvSpPr>
-          <p:cNvPr id="174" name="Google Shape;174;p7:notes"/>
-          <p:cNvSpPr>
-            <a:spLocks noGrp="1" noRot="1" noChangeAspect="1"/>
-          </p:cNvSpPr>
-          <p:nvPr>
-            <p:ph type="sldImg" idx="2"/>
-          </p:nvPr>
-        </p:nvSpPr>
-        <p:spPr>
-          <a:xfrm>
-            <a:off x="1143225" y="685800"/>
-            <a:ext cx="4572225" cy="3429000"/>
-          </a:xfrm>
-          <a:custGeom>
-            <a:avLst/>
-            <a:gdLst/>
-            <a:ahLst/>
-            <a:cxnLst/>
-            <a:rect l="l" t="t" r="r" b="b"/>
-            <a:pathLst>
-              <a:path w="120000" h="120000" extrusionOk="0">
-                <a:moveTo>
-                  <a:pt x="0" y="0"/>
-                </a:moveTo>
-                <a:lnTo>
-                  <a:pt x="120000" y="0"/>
-                </a:lnTo>
-                <a:lnTo>
-                  <a:pt x="120000" y="120000"/>
-                </a:lnTo>
-                <a:lnTo>
-                  <a:pt x="0" y="120000"/>
-                </a:lnTo>
-                <a:close/>
-              </a:path>
-            </a:pathLst>
-          </a:custGeom>
-        </p:spPr>
-      </p:sp>
-    </p:spTree>
-  </p:cSld>
-  <p:clrMapOvr>
-    <a:masterClrMapping/>
-  </p:clrMapOvr>
-</p:notes>
-</file>
-
 <file path=ppt/slideLayouts/slideLayout1.xml><?xml version="1.0" encoding="utf-8"?>
-<p:sldLayout xmlns:a="http://schemas.openxmlformats.org/drawingml/2006/main" xmlns:r="http://schemas.openxmlformats.org/officeDocument/2006/relationships" xmlns:p="http://schemas.openxmlformats.org/presentationml/2006/main" type="blank" matchingName="Blank">
+<p:sldLayout xmlns:a="http://schemas.openxmlformats.org/drawingml/2006/main" xmlns:r="http://schemas.openxmlformats.org/officeDocument/2006/relationships" xmlns:p="http://schemas.openxmlformats.org/presentationml/2006/main" matchingName="Blank" type="blank">
   <p:cSld name="BLANK">
     <p:spTree>
       <p:nvGrpSpPr>
@@ -4393,7 +4324,9 @@
               <a:defRPr/>
             </a:lvl9pPr>
           </a:lstStyle>
-          <a:p/>
+          <a:p>
+            <a:endParaRPr/>
+          </a:p>
         </p:txBody>
       </p:sp>
       <p:sp>
@@ -4524,7 +4457,9 @@
               <a:defRPr/>
             </a:lvl9pPr>
           </a:lstStyle>
-          <a:p/>
+          <a:p>
+            <a:endParaRPr/>
+          </a:p>
         </p:txBody>
       </p:sp>
       <p:sp>
@@ -4631,6 +4566,7 @@
             </a:pPr>
             <a:fld id="{00000000-1234-1234-1234-123412341234}" type="slidenum">
               <a:rPr lang="en-US"/>
+              <a:t>‹#›</a:t>
             </a:fld>
             <a:endParaRPr lang="en-US"/>
           </a:p>
@@ -4645,7 +4581,7 @@
 </file>
 
 <file path=ppt/slideLayouts/slideLayout10.xml><?xml version="1.0" encoding="utf-8"?>
-<p:sldLayout xmlns:a="http://schemas.openxmlformats.org/drawingml/2006/main" xmlns:r="http://schemas.openxmlformats.org/officeDocument/2006/relationships" xmlns:p="http://schemas.openxmlformats.org/presentationml/2006/main" type="vertTx" matchingName="Title and Vertical Text">
+<p:sldLayout xmlns:a="http://schemas.openxmlformats.org/drawingml/2006/main" xmlns:r="http://schemas.openxmlformats.org/officeDocument/2006/relationships" xmlns:p="http://schemas.openxmlformats.org/presentationml/2006/main" matchingName="Title and Vertical Text" type="vertTx">
   <p:cSld name="VERTICAL_TEXT">
     <p:spTree>
       <p:nvGrpSpPr>
@@ -4792,7 +4728,9 @@
               <a:defRPr/>
             </a:lvl9pPr>
           </a:lstStyle>
-          <a:p/>
+          <a:p>
+            <a:endParaRPr/>
+          </a:p>
         </p:txBody>
       </p:sp>
       <p:sp>
@@ -4950,7 +4888,9 @@
               <a:defRPr/>
             </a:lvl9pPr>
           </a:lstStyle>
-          <a:p/>
+          <a:p>
+            <a:endParaRPr/>
+          </a:p>
         </p:txBody>
       </p:sp>
       <p:sp>
@@ -5081,7 +5021,9 @@
               <a:defRPr/>
             </a:lvl9pPr>
           </a:lstStyle>
-          <a:p/>
+          <a:p>
+            <a:endParaRPr/>
+          </a:p>
         </p:txBody>
       </p:sp>
       <p:sp>
@@ -5212,7 +5154,9 @@
               <a:defRPr/>
             </a:lvl9pPr>
           </a:lstStyle>
-          <a:p/>
+          <a:p>
+            <a:endParaRPr/>
+          </a:p>
         </p:txBody>
       </p:sp>
       <p:sp>
@@ -5319,6 +5263,7 @@
             </a:pPr>
             <a:fld id="{00000000-1234-1234-1234-123412341234}" type="slidenum">
               <a:rPr lang="en-US"/>
+              <a:t>‹#›</a:t>
             </a:fld>
             <a:endParaRPr lang="en-US"/>
           </a:p>
@@ -5333,7 +5278,7 @@
 </file>
 
 <file path=ppt/slideLayouts/slideLayout11.xml><?xml version="1.0" encoding="utf-8"?>
-<p:sldLayout xmlns:a="http://schemas.openxmlformats.org/drawingml/2006/main" xmlns:r="http://schemas.openxmlformats.org/officeDocument/2006/relationships" xmlns:p="http://schemas.openxmlformats.org/presentationml/2006/main" type="vertTitleAndTx" matchingName="Vertical Title and Text">
+<p:sldLayout xmlns:a="http://schemas.openxmlformats.org/drawingml/2006/main" xmlns:r="http://schemas.openxmlformats.org/officeDocument/2006/relationships" xmlns:p="http://schemas.openxmlformats.org/presentationml/2006/main" matchingName="Vertical Title and Text" type="vertTitleAndTx">
   <p:cSld name="VERTICAL_TITLE_AND_VERTICAL_TEXT">
     <p:spTree>
       <p:nvGrpSpPr>
@@ -5480,7 +5425,9 @@
               <a:defRPr/>
             </a:lvl9pPr>
           </a:lstStyle>
-          <a:p/>
+          <a:p>
+            <a:endParaRPr/>
+          </a:p>
         </p:txBody>
       </p:sp>
       <p:sp>
@@ -5638,7 +5585,9 @@
               <a:defRPr/>
             </a:lvl9pPr>
           </a:lstStyle>
-          <a:p/>
+          <a:p>
+            <a:endParaRPr/>
+          </a:p>
         </p:txBody>
       </p:sp>
       <p:sp>
@@ -5769,7 +5718,9 @@
               <a:defRPr/>
             </a:lvl9pPr>
           </a:lstStyle>
-          <a:p/>
+          <a:p>
+            <a:endParaRPr/>
+          </a:p>
         </p:txBody>
       </p:sp>
       <p:sp>
@@ -5900,7 +5851,9 @@
               <a:defRPr/>
             </a:lvl9pPr>
           </a:lstStyle>
-          <a:p/>
+          <a:p>
+            <a:endParaRPr/>
+          </a:p>
         </p:txBody>
       </p:sp>
       <p:sp>
@@ -6007,6 +5960,7 @@
             </a:pPr>
             <a:fld id="{00000000-1234-1234-1234-123412341234}" type="slidenum">
               <a:rPr lang="en-US"/>
+              <a:t>‹#›</a:t>
             </a:fld>
             <a:endParaRPr lang="en-US"/>
           </a:p>
@@ -6021,7 +5975,7 @@
 </file>
 
 <file path=ppt/slideLayouts/slideLayout2.xml><?xml version="1.0" encoding="utf-8"?>
-<p:sldLayout xmlns:a="http://schemas.openxmlformats.org/drawingml/2006/main" xmlns:r="http://schemas.openxmlformats.org/officeDocument/2006/relationships" xmlns:p="http://schemas.openxmlformats.org/presentationml/2006/main" type="title" matchingName="Title Slide">
+<p:sldLayout xmlns:a="http://schemas.openxmlformats.org/drawingml/2006/main" xmlns:r="http://schemas.openxmlformats.org/officeDocument/2006/relationships" xmlns:p="http://schemas.openxmlformats.org/presentationml/2006/main" matchingName="Title Slide" type="title">
   <p:cSld name="TITLE">
     <p:spTree>
       <p:nvGrpSpPr>
@@ -6168,7 +6122,9 @@
               <a:defRPr/>
             </a:lvl9pPr>
           </a:lstStyle>
-          <a:p/>
+          <a:p>
+            <a:endParaRPr/>
+          </a:p>
         </p:txBody>
       </p:sp>
       <p:sp>
@@ -6362,7 +6318,9 @@
               </a:defRPr>
             </a:lvl9pPr>
           </a:lstStyle>
-          <a:p/>
+          <a:p>
+            <a:endParaRPr/>
+          </a:p>
         </p:txBody>
       </p:sp>
       <p:sp>
@@ -6493,7 +6451,9 @@
               <a:defRPr/>
             </a:lvl9pPr>
           </a:lstStyle>
-          <a:p/>
+          <a:p>
+            <a:endParaRPr/>
+          </a:p>
         </p:txBody>
       </p:sp>
       <p:sp>
@@ -6624,7 +6584,9 @@
               <a:defRPr/>
             </a:lvl9pPr>
           </a:lstStyle>
-          <a:p/>
+          <a:p>
+            <a:endParaRPr/>
+          </a:p>
         </p:txBody>
       </p:sp>
       <p:sp>
@@ -6731,6 +6693,7 @@
             </a:pPr>
             <a:fld id="{00000000-1234-1234-1234-123412341234}" type="slidenum">
               <a:rPr lang="en-US"/>
+              <a:t>‹#›</a:t>
             </a:fld>
             <a:endParaRPr lang="en-US"/>
           </a:p>
@@ -6745,7 +6708,7 @@
 </file>
 
 <file path=ppt/slideLayouts/slideLayout3.xml><?xml version="1.0" encoding="utf-8"?>
-<p:sldLayout xmlns:a="http://schemas.openxmlformats.org/drawingml/2006/main" xmlns:r="http://schemas.openxmlformats.org/officeDocument/2006/relationships" xmlns:p="http://schemas.openxmlformats.org/presentationml/2006/main" type="obj" matchingName="Title and Content">
+<p:sldLayout xmlns:a="http://schemas.openxmlformats.org/drawingml/2006/main" xmlns:r="http://schemas.openxmlformats.org/officeDocument/2006/relationships" xmlns:p="http://schemas.openxmlformats.org/presentationml/2006/main" matchingName="Title and Content" type="obj">
   <p:cSld name="OBJECT">
     <p:spTree>
       <p:nvGrpSpPr>
@@ -6892,7 +6855,9 @@
               <a:defRPr/>
             </a:lvl9pPr>
           </a:lstStyle>
-          <a:p/>
+          <a:p>
+            <a:endParaRPr/>
+          </a:p>
         </p:txBody>
       </p:sp>
       <p:sp>
@@ -7050,7 +7015,9 @@
               <a:defRPr/>
             </a:lvl9pPr>
           </a:lstStyle>
-          <a:p/>
+          <a:p>
+            <a:endParaRPr/>
+          </a:p>
         </p:txBody>
       </p:sp>
       <p:sp>
@@ -7181,7 +7148,9 @@
               <a:defRPr/>
             </a:lvl9pPr>
           </a:lstStyle>
-          <a:p/>
+          <a:p>
+            <a:endParaRPr/>
+          </a:p>
         </p:txBody>
       </p:sp>
       <p:sp>
@@ -7312,7 +7281,9 @@
               <a:defRPr/>
             </a:lvl9pPr>
           </a:lstStyle>
-          <a:p/>
+          <a:p>
+            <a:endParaRPr/>
+          </a:p>
         </p:txBody>
       </p:sp>
       <p:sp>
@@ -7419,6 +7390,7 @@
             </a:pPr>
             <a:fld id="{00000000-1234-1234-1234-123412341234}" type="slidenum">
               <a:rPr lang="en-US"/>
+              <a:t>‹#›</a:t>
             </a:fld>
             <a:endParaRPr lang="en-US"/>
           </a:p>
@@ -7433,7 +7405,7 @@
 </file>
 
 <file path=ppt/slideLayouts/slideLayout4.xml><?xml version="1.0" encoding="utf-8"?>
-<p:sldLayout xmlns:a="http://schemas.openxmlformats.org/drawingml/2006/main" xmlns:r="http://schemas.openxmlformats.org/officeDocument/2006/relationships" xmlns:p="http://schemas.openxmlformats.org/presentationml/2006/main" type="secHead" matchingName="Section Header">
+<p:sldLayout xmlns:a="http://schemas.openxmlformats.org/drawingml/2006/main" xmlns:r="http://schemas.openxmlformats.org/officeDocument/2006/relationships" xmlns:p="http://schemas.openxmlformats.org/presentationml/2006/main" matchingName="Section Header" type="secHead">
   <p:cSld name="SECTION_HEADER">
     <p:spTree>
       <p:nvGrpSpPr>
@@ -7581,7 +7553,9 @@
               <a:defRPr/>
             </a:lvl9pPr>
           </a:lstStyle>
-          <a:p/>
+          <a:p>
+            <a:endParaRPr/>
+          </a:p>
         </p:txBody>
       </p:sp>
       <p:sp>
@@ -7775,7 +7749,9 @@
               </a:defRPr>
             </a:lvl9pPr>
           </a:lstStyle>
-          <a:p/>
+          <a:p>
+            <a:endParaRPr/>
+          </a:p>
         </p:txBody>
       </p:sp>
       <p:sp>
@@ -7906,7 +7882,9 @@
               <a:defRPr/>
             </a:lvl9pPr>
           </a:lstStyle>
-          <a:p/>
+          <a:p>
+            <a:endParaRPr/>
+          </a:p>
         </p:txBody>
       </p:sp>
       <p:sp>
@@ -8037,7 +8015,9 @@
               <a:defRPr/>
             </a:lvl9pPr>
           </a:lstStyle>
-          <a:p/>
+          <a:p>
+            <a:endParaRPr/>
+          </a:p>
         </p:txBody>
       </p:sp>
       <p:sp>
@@ -8144,6 +8124,7 @@
             </a:pPr>
             <a:fld id="{00000000-1234-1234-1234-123412341234}" type="slidenum">
               <a:rPr lang="en-US"/>
+              <a:t>‹#›</a:t>
             </a:fld>
             <a:endParaRPr lang="en-US"/>
           </a:p>
@@ -8158,7 +8139,7 @@
 </file>
 
 <file path=ppt/slideLayouts/slideLayout5.xml><?xml version="1.0" encoding="utf-8"?>
-<p:sldLayout xmlns:a="http://schemas.openxmlformats.org/drawingml/2006/main" xmlns:r="http://schemas.openxmlformats.org/officeDocument/2006/relationships" xmlns:p="http://schemas.openxmlformats.org/presentationml/2006/main" type="twoObj" matchingName="Two Content">
+<p:sldLayout xmlns:a="http://schemas.openxmlformats.org/drawingml/2006/main" xmlns:r="http://schemas.openxmlformats.org/officeDocument/2006/relationships" xmlns:p="http://schemas.openxmlformats.org/presentationml/2006/main" matchingName="Two Content" type="twoObj">
   <p:cSld name="TWO_OBJECTS">
     <p:spTree>
       <p:nvGrpSpPr>
@@ -8305,7 +8286,9 @@
               <a:defRPr/>
             </a:lvl9pPr>
           </a:lstStyle>
-          <a:p/>
+          <a:p>
+            <a:endParaRPr/>
+          </a:p>
         </p:txBody>
       </p:sp>
       <p:sp>
@@ -8463,7 +8446,9 @@
               <a:defRPr sz="1800"/>
             </a:lvl9pPr>
           </a:lstStyle>
-          <a:p/>
+          <a:p>
+            <a:endParaRPr/>
+          </a:p>
         </p:txBody>
       </p:sp>
       <p:sp>
@@ -8621,7 +8606,9 @@
               <a:defRPr sz="1800"/>
             </a:lvl9pPr>
           </a:lstStyle>
-          <a:p/>
+          <a:p>
+            <a:endParaRPr/>
+          </a:p>
         </p:txBody>
       </p:sp>
       <p:sp>
@@ -8752,7 +8739,9 @@
               <a:defRPr/>
             </a:lvl9pPr>
           </a:lstStyle>
-          <a:p/>
+          <a:p>
+            <a:endParaRPr/>
+          </a:p>
         </p:txBody>
       </p:sp>
       <p:sp>
@@ -8883,7 +8872,9 @@
               <a:defRPr/>
             </a:lvl9pPr>
           </a:lstStyle>
-          <a:p/>
+          <a:p>
+            <a:endParaRPr/>
+          </a:p>
         </p:txBody>
       </p:sp>
       <p:sp>
@@ -8990,6 +8981,7 @@
             </a:pPr>
             <a:fld id="{00000000-1234-1234-1234-123412341234}" type="slidenum">
               <a:rPr lang="en-US"/>
+              <a:t>‹#›</a:t>
             </a:fld>
             <a:endParaRPr lang="en-US"/>
           </a:p>
@@ -9004,7 +8996,7 @@
 </file>
 
 <file path=ppt/slideLayouts/slideLayout6.xml><?xml version="1.0" encoding="utf-8"?>
-<p:sldLayout xmlns:a="http://schemas.openxmlformats.org/drawingml/2006/main" xmlns:r="http://schemas.openxmlformats.org/officeDocument/2006/relationships" xmlns:p="http://schemas.openxmlformats.org/presentationml/2006/main" type="twoTxTwoObj" matchingName="Comparison">
+<p:sldLayout xmlns:a="http://schemas.openxmlformats.org/drawingml/2006/main" xmlns:r="http://schemas.openxmlformats.org/officeDocument/2006/relationships" xmlns:p="http://schemas.openxmlformats.org/presentationml/2006/main" matchingName="Comparison" type="twoTxTwoObj">
   <p:cSld name="TWO_OBJECTS_WITH_TEXT">
     <p:spTree>
       <p:nvGrpSpPr>
@@ -9152,7 +9144,9 @@
               <a:defRPr/>
             </a:lvl9pPr>
           </a:lstStyle>
-          <a:p/>
+          <a:p>
+            <a:endParaRPr/>
+          </a:p>
         </p:txBody>
       </p:sp>
       <p:sp>
@@ -9310,7 +9304,9 @@
               <a:defRPr sz="1600" b="1"/>
             </a:lvl9pPr>
           </a:lstStyle>
-          <a:p/>
+          <a:p>
+            <a:endParaRPr/>
+          </a:p>
         </p:txBody>
       </p:sp>
       <p:sp>
@@ -9468,7 +9464,9 @@
               <a:defRPr sz="1600"/>
             </a:lvl9pPr>
           </a:lstStyle>
-          <a:p/>
+          <a:p>
+            <a:endParaRPr/>
+          </a:p>
         </p:txBody>
       </p:sp>
       <p:sp>
@@ -9626,7 +9624,9 @@
               <a:defRPr sz="1600" b="1"/>
             </a:lvl9pPr>
           </a:lstStyle>
-          <a:p/>
+          <a:p>
+            <a:endParaRPr/>
+          </a:p>
         </p:txBody>
       </p:sp>
       <p:sp>
@@ -9784,7 +9784,9 @@
               <a:defRPr sz="1600"/>
             </a:lvl9pPr>
           </a:lstStyle>
-          <a:p/>
+          <a:p>
+            <a:endParaRPr/>
+          </a:p>
         </p:txBody>
       </p:sp>
       <p:sp>
@@ -9915,7 +9917,9 @@
               <a:defRPr/>
             </a:lvl9pPr>
           </a:lstStyle>
-          <a:p/>
+          <a:p>
+            <a:endParaRPr/>
+          </a:p>
         </p:txBody>
       </p:sp>
       <p:sp>
@@ -10046,7 +10050,9 @@
               <a:defRPr/>
             </a:lvl9pPr>
           </a:lstStyle>
-          <a:p/>
+          <a:p>
+            <a:endParaRPr/>
+          </a:p>
         </p:txBody>
       </p:sp>
       <p:sp>
@@ -10153,6 +10159,7 @@
             </a:pPr>
             <a:fld id="{00000000-1234-1234-1234-123412341234}" type="slidenum">
               <a:rPr lang="en-US"/>
+              <a:t>‹#›</a:t>
             </a:fld>
             <a:endParaRPr lang="en-US"/>
           </a:p>
@@ -10167,7 +10174,7 @@
 </file>
 
 <file path=ppt/slideLayouts/slideLayout7.xml><?xml version="1.0" encoding="utf-8"?>
-<p:sldLayout xmlns:a="http://schemas.openxmlformats.org/drawingml/2006/main" xmlns:r="http://schemas.openxmlformats.org/officeDocument/2006/relationships" xmlns:p="http://schemas.openxmlformats.org/presentationml/2006/main" type="titleOnly" matchingName="Title Only">
+<p:sldLayout xmlns:a="http://schemas.openxmlformats.org/drawingml/2006/main" xmlns:r="http://schemas.openxmlformats.org/officeDocument/2006/relationships" xmlns:p="http://schemas.openxmlformats.org/presentationml/2006/main" matchingName="Title Only" type="titleOnly">
   <p:cSld name="TITLE_ONLY">
     <p:spTree>
       <p:nvGrpSpPr>
@@ -10314,7 +10321,9 @@
               <a:defRPr/>
             </a:lvl9pPr>
           </a:lstStyle>
-          <a:p/>
+          <a:p>
+            <a:endParaRPr/>
+          </a:p>
         </p:txBody>
       </p:sp>
       <p:sp>
@@ -10445,7 +10454,9 @@
               <a:defRPr/>
             </a:lvl9pPr>
           </a:lstStyle>
-          <a:p/>
+          <a:p>
+            <a:endParaRPr/>
+          </a:p>
         </p:txBody>
       </p:sp>
       <p:sp>
@@ -10576,7 +10587,9 @@
               <a:defRPr/>
             </a:lvl9pPr>
           </a:lstStyle>
-          <a:p/>
+          <a:p>
+            <a:endParaRPr/>
+          </a:p>
         </p:txBody>
       </p:sp>
       <p:sp>
@@ -10683,6 +10696,7 @@
             </a:pPr>
             <a:fld id="{00000000-1234-1234-1234-123412341234}" type="slidenum">
               <a:rPr lang="en-US"/>
+              <a:t>‹#›</a:t>
             </a:fld>
             <a:endParaRPr lang="en-US"/>
           </a:p>
@@ -10697,7 +10711,7 @@
 </file>
 
 <file path=ppt/slideLayouts/slideLayout8.xml><?xml version="1.0" encoding="utf-8"?>
-<p:sldLayout xmlns:a="http://schemas.openxmlformats.org/drawingml/2006/main" xmlns:r="http://schemas.openxmlformats.org/officeDocument/2006/relationships" xmlns:p="http://schemas.openxmlformats.org/presentationml/2006/main" type="objTx" matchingName="Content with Caption">
+<p:sldLayout xmlns:a="http://schemas.openxmlformats.org/drawingml/2006/main" xmlns:r="http://schemas.openxmlformats.org/officeDocument/2006/relationships" xmlns:p="http://schemas.openxmlformats.org/presentationml/2006/main" matchingName="Content with Caption" type="objTx">
   <p:cSld name="OBJECT_WITH_CAPTION_TEXT">
     <p:spTree>
       <p:nvGrpSpPr>
@@ -10845,7 +10859,9 @@
               <a:defRPr/>
             </a:lvl9pPr>
           </a:lstStyle>
-          <a:p/>
+          <a:p>
+            <a:endParaRPr/>
+          </a:p>
         </p:txBody>
       </p:sp>
       <p:sp>
@@ -11003,7 +11019,9 @@
               <a:defRPr sz="2000"/>
             </a:lvl9pPr>
           </a:lstStyle>
-          <a:p/>
+          <a:p>
+            <a:endParaRPr/>
+          </a:p>
         </p:txBody>
       </p:sp>
       <p:sp>
@@ -11161,7 +11179,9 @@
               <a:defRPr sz="900"/>
             </a:lvl9pPr>
           </a:lstStyle>
-          <a:p/>
+          <a:p>
+            <a:endParaRPr/>
+          </a:p>
         </p:txBody>
       </p:sp>
       <p:sp>
@@ -11292,7 +11312,9 @@
               <a:defRPr/>
             </a:lvl9pPr>
           </a:lstStyle>
-          <a:p/>
+          <a:p>
+            <a:endParaRPr/>
+          </a:p>
         </p:txBody>
       </p:sp>
       <p:sp>
@@ -11423,7 +11445,9 @@
               <a:defRPr/>
             </a:lvl9pPr>
           </a:lstStyle>
-          <a:p/>
+          <a:p>
+            <a:endParaRPr/>
+          </a:p>
         </p:txBody>
       </p:sp>
       <p:sp>
@@ -11530,6 +11554,7 @@
             </a:pPr>
             <a:fld id="{00000000-1234-1234-1234-123412341234}" type="slidenum">
               <a:rPr lang="en-US"/>
+              <a:t>‹#›</a:t>
             </a:fld>
             <a:endParaRPr lang="en-US"/>
           </a:p>
@@ -11544,7 +11569,7 @@
 </file>
 
 <file path=ppt/slideLayouts/slideLayout9.xml><?xml version="1.0" encoding="utf-8"?>
-<p:sldLayout xmlns:a="http://schemas.openxmlformats.org/drawingml/2006/main" xmlns:r="http://schemas.openxmlformats.org/officeDocument/2006/relationships" xmlns:p="http://schemas.openxmlformats.org/presentationml/2006/main" type="picTx" matchingName="Picture with Caption">
+<p:sldLayout xmlns:a="http://schemas.openxmlformats.org/drawingml/2006/main" xmlns:r="http://schemas.openxmlformats.org/officeDocument/2006/relationships" xmlns:p="http://schemas.openxmlformats.org/presentationml/2006/main" matchingName="Picture with Caption" type="picTx">
   <p:cSld name="PICTURE_WITH_CAPTION_TEXT">
     <p:spTree>
       <p:nvGrpSpPr>
@@ -11692,7 +11717,9 @@
               <a:defRPr/>
             </a:lvl9pPr>
           </a:lstStyle>
-          <a:p/>
+          <a:p>
+            <a:endParaRPr/>
+          </a:p>
         </p:txBody>
       </p:sp>
       <p:sp>
@@ -11874,7 +11901,9 @@
               <a:defRPr sz="900"/>
             </a:lvl9pPr>
           </a:lstStyle>
-          <a:p/>
+          <a:p>
+            <a:endParaRPr/>
+          </a:p>
         </p:txBody>
       </p:sp>
       <p:sp>
@@ -12005,7 +12034,9 @@
               <a:defRPr/>
             </a:lvl9pPr>
           </a:lstStyle>
-          <a:p/>
+          <a:p>
+            <a:endParaRPr/>
+          </a:p>
         </p:txBody>
       </p:sp>
       <p:sp>
@@ -12136,7 +12167,9 @@
               <a:defRPr/>
             </a:lvl9pPr>
           </a:lstStyle>
-          <a:p/>
+          <a:p>
+            <a:endParaRPr/>
+          </a:p>
         </p:txBody>
       </p:sp>
       <p:sp>
@@ -12243,6 +12276,7 @@
             </a:pPr>
             <a:fld id="{00000000-1234-1234-1234-123412341234}" type="slidenum">
               <a:rPr lang="en-US"/>
+              <a:t>‹#›</a:t>
             </a:fld>
             <a:endParaRPr lang="en-US"/>
           </a:p>
@@ -12421,7 +12455,9 @@
               <a:defRPr sz="1800"/>
             </a:lvl9pPr>
           </a:lstStyle>
-          <a:p/>
+          <a:p>
+            <a:endParaRPr/>
+          </a:p>
         </p:txBody>
       </p:sp>
       <p:sp>
@@ -12660,7 +12696,9 @@
               </a:defRPr>
             </a:lvl9pPr>
           </a:lstStyle>
-          <a:p/>
+          <a:p>
+            <a:endParaRPr/>
+          </a:p>
         </p:txBody>
       </p:sp>
       <p:sp>
@@ -12863,7 +12901,9 @@
               </a:defRPr>
             </a:lvl9pPr>
           </a:lstStyle>
-          <a:p/>
+          <a:p>
+            <a:endParaRPr/>
+          </a:p>
         </p:txBody>
       </p:sp>
       <p:sp>
@@ -13066,7 +13106,9 @@
               </a:defRPr>
             </a:lvl9pPr>
           </a:lstStyle>
-          <a:p/>
+          <a:p>
+            <a:endParaRPr/>
+          </a:p>
         </p:txBody>
       </p:sp>
       <p:sp>
@@ -13245,6 +13287,7 @@
             </a:pPr>
             <a:fld id="{00000000-1234-1234-1234-123412341234}" type="slidenum">
               <a:rPr lang="en-US"/>
+              <a:t>‹#›</a:t>
             </a:fld>
             <a:endParaRPr lang="en-US"/>
           </a:p>
@@ -13991,7 +14034,7 @@
           <p:nvPr/>
         </p:nvPicPr>
         <p:blipFill rotWithShape="1">
-          <a:blip r:embed="rId1"/>
+          <a:blip r:embed="rId3"/>
           <a:srcRect/>
           <a:stretch>
             <a:fillRect/>
@@ -14057,15 +14100,6 @@
               </a:rPr>
               <a:t>Technical Interview</a:t>
             </a:r>
-            <a:endParaRPr lang="en-US" sz="7500" b="1" i="0" u="none" strike="noStrike" cap="none">
-              <a:solidFill>
-                <a:srgbClr val="38BDF8"/>
-              </a:solidFill>
-              <a:latin typeface="Inter" panose="02000503000000020004"/>
-              <a:ea typeface="Inter" panose="02000503000000020004"/>
-              <a:cs typeface="Inter" panose="02000503000000020004"/>
-              <a:sym typeface="Inter" panose="02000503000000020004"/>
-            </a:endParaRPr>
           </a:p>
         </p:txBody>
       </p:sp>
@@ -14104,7 +14138,7 @@
               <a:buNone/>
             </a:pPr>
             <a:r>
-              <a:rPr lang="en-US" sz="3750" b="1" i="0" u="none" strike="noStrike" cap="none">
+              <a:rPr lang="en-US" sz="3750" b="1" i="0" u="none" strike="noStrike" cap="none" dirty="0">
                 <a:solidFill>
                   <a:srgbClr val="F8FAFC"/>
                 </a:solidFill>
@@ -14115,15 +14149,6 @@
               </a:rPr>
               <a:t>Undergraduate Level Quiz</a:t>
             </a:r>
-            <a:endParaRPr lang="en-US" sz="3750" b="1" i="0" u="none" strike="noStrike" cap="none">
-              <a:solidFill>
-                <a:srgbClr val="F8FAFC"/>
-              </a:solidFill>
-              <a:latin typeface="Inter" panose="02000503000000020004"/>
-              <a:ea typeface="Inter" panose="02000503000000020004"/>
-              <a:cs typeface="Inter" panose="02000503000000020004"/>
-              <a:sym typeface="Inter" panose="02000503000000020004"/>
-            </a:endParaRPr>
           </a:p>
         </p:txBody>
       </p:sp>
@@ -14183,8 +14208,8 @@
         </p:nvSpPr>
         <p:spPr>
           <a:xfrm>
-            <a:off x="3400425" y="4431952"/>
-            <a:ext cx="5391150" cy="365670"/>
+            <a:off x="2899680" y="4540809"/>
+            <a:ext cx="6360795" cy="443198"/>
           </a:xfrm>
           <a:prstGeom prst="rect">
             <a:avLst/>
@@ -14200,20 +14225,13 @@
           </a:bodyPr>
           <a:lstStyle/>
           <a:p>
-            <a:pPr marL="0" marR="0" lvl="0" indent="0" algn="ctr" rtl="0">
+            <a:pPr lvl="0" algn="ctr">
               <a:lnSpc>
                 <a:spcPct val="160000"/>
               </a:lnSpc>
-              <a:spcBef>
-                <a:spcPts val="0"/>
-              </a:spcBef>
-              <a:spcAft>
-                <a:spcPts val="0"/>
-              </a:spcAft>
-              <a:buNone/>
             </a:pPr>
             <a:r>
-              <a:rPr lang="en-US" sz="1800" b="0" i="0" u="none" strike="noStrike" cap="none">
+              <a:rPr lang="en-US" sz="1800" b="0" i="0" u="none" strike="noStrike" cap="none" dirty="0">
                 <a:solidFill>
                   <a:srgbClr val="94A3B8"/>
                 </a:solidFill>
@@ -14222,9 +14240,21 @@
                 <a:cs typeface="Inter" panose="02000503000000020004"/>
                 <a:sym typeface="Inter" panose="02000503000000020004"/>
               </a:rPr>
-              <a:t>Data Structures | OOP | DBMS | Machine Learning</a:t>
+              <a:t>Data Structures | OOP | DBMS | Machine</a:t>
             </a:r>
-            <a:endParaRPr lang="en-US" sz="1800" b="0" i="0" u="none" strike="noStrike" cap="none">
+            <a:r>
+              <a:rPr lang="en-US" sz="1800" dirty="0">
+                <a:solidFill>
+                  <a:srgbClr val="94A3B8"/>
+                </a:solidFill>
+                <a:latin typeface="Inter" panose="02000503000000020004"/>
+                <a:ea typeface="Inter" panose="02000503000000020004"/>
+                <a:cs typeface="Inter" panose="02000503000000020004"/>
+                <a:sym typeface="Inter" panose="02000503000000020004"/>
+              </a:rPr>
+              <a:t> Learning</a:t>
+            </a:r>
+            <a:endParaRPr lang="en-US" sz="1800" b="0" i="0" u="none" strike="noStrike" cap="none" dirty="0">
               <a:solidFill>
                 <a:srgbClr val="94A3B8"/>
               </a:solidFill>
@@ -14268,7 +14298,7 @@
           <p:nvPr/>
         </p:nvPicPr>
         <p:blipFill rotWithShape="1">
-          <a:blip r:embed="rId1"/>
+          <a:blip r:embed="rId3"/>
           <a:srcRect/>
           <a:stretch>
             <a:fillRect/>
@@ -14295,7 +14325,7 @@
           <p:nvPr/>
         </p:nvPicPr>
         <p:blipFill rotWithShape="1">
-          <a:blip r:embed="rId2"/>
+          <a:blip r:embed="rId4"/>
           <a:srcRect/>
           <a:stretch>
             <a:fillRect/>
@@ -14414,15 +14444,6 @@
               </a:rPr>
               <a:t>B) Method Overriding</a:t>
             </a:r>
-            <a:endParaRPr lang="en-US" sz="2100" b="0" i="0" u="none" strike="noStrike" cap="none">
-              <a:solidFill>
-                <a:srgbClr val="FEF08A"/>
-              </a:solidFill>
-              <a:latin typeface="Inter Black"/>
-              <a:ea typeface="Inter Black"/>
-              <a:cs typeface="Inter Black"/>
-              <a:sym typeface="Inter Black"/>
-            </a:endParaRPr>
           </a:p>
         </p:txBody>
       </p:sp>
@@ -15061,7 +15082,7 @@
           <p:nvPr/>
         </p:nvPicPr>
         <p:blipFill rotWithShape="1">
-          <a:blip r:embed="rId3"/>
+          <a:blip r:embed="rId5"/>
           <a:srcRect/>
           <a:stretch>
             <a:fillRect/>
@@ -15088,7 +15109,7 @@
           <p:nvPr/>
         </p:nvPicPr>
         <p:blipFill rotWithShape="1">
-          <a:blip r:embed="rId3"/>
+          <a:blip r:embed="rId5"/>
           <a:srcRect/>
           <a:stretch>
             <a:fillRect/>
@@ -15115,7 +15136,7 @@
           <p:nvPr/>
         </p:nvPicPr>
         <p:blipFill rotWithShape="1">
-          <a:blip r:embed="rId3"/>
+          <a:blip r:embed="rId5"/>
           <a:srcRect/>
           <a:stretch>
             <a:fillRect/>
@@ -15142,7 +15163,7 @@
           <p:nvPr/>
         </p:nvPicPr>
         <p:blipFill rotWithShape="1">
-          <a:blip r:embed="rId3"/>
+          <a:blip r:embed="rId5"/>
           <a:srcRect/>
           <a:stretch>
             <a:fillRect/>
@@ -15208,15 +15229,6 @@
               </a:rPr>
               <a:t>METHOD REDEFINITION</a:t>
             </a:r>
-            <a:endParaRPr lang="en-US" sz="3300" b="1" i="0" u="none" strike="noStrike" cap="none">
-              <a:solidFill>
-                <a:srgbClr val="38BDF8"/>
-              </a:solidFill>
-              <a:latin typeface="Inter" panose="02000503000000020004"/>
-              <a:ea typeface="Inter" panose="02000503000000020004"/>
-              <a:cs typeface="Inter" panose="02000503000000020004"/>
-              <a:sym typeface="Inter" panose="02000503000000020004"/>
-            </a:endParaRPr>
           </a:p>
         </p:txBody>
       </p:sp>
@@ -15407,7 +15419,7 @@
           <p:nvPr/>
         </p:nvPicPr>
         <p:blipFill rotWithShape="1">
-          <a:blip r:embed="rId1"/>
+          <a:blip r:embed="rId3"/>
           <a:srcRect/>
           <a:stretch>
             <a:fillRect/>
@@ -15434,7 +15446,7 @@
           <p:nvPr/>
         </p:nvPicPr>
         <p:blipFill rotWithShape="1">
-          <a:blip r:embed="rId2"/>
+          <a:blip r:embed="rId4"/>
           <a:srcRect/>
           <a:stretch>
             <a:fillRect/>
@@ -15546,15 +15558,6 @@
               </a:rPr>
               <a:t>C) final</a:t>
             </a:r>
-            <a:endParaRPr lang="en-US" sz="2100" b="0" i="0" u="none" strike="noStrike" cap="none">
-              <a:solidFill>
-                <a:srgbClr val="FEF08A"/>
-              </a:solidFill>
-              <a:latin typeface="Inter Black"/>
-              <a:ea typeface="Inter Black"/>
-              <a:cs typeface="Inter Black"/>
-              <a:sym typeface="Inter Black"/>
-            </a:endParaRPr>
           </a:p>
         </p:txBody>
       </p:sp>
@@ -16193,7 +16196,7 @@
           <p:nvPr/>
         </p:nvPicPr>
         <p:blipFill rotWithShape="1">
-          <a:blip r:embed="rId3"/>
+          <a:blip r:embed="rId5"/>
           <a:srcRect/>
           <a:stretch>
             <a:fillRect/>
@@ -16220,7 +16223,7 @@
           <p:nvPr/>
         </p:nvPicPr>
         <p:blipFill rotWithShape="1">
-          <a:blip r:embed="rId3"/>
+          <a:blip r:embed="rId5"/>
           <a:srcRect/>
           <a:stretch>
             <a:fillRect/>
@@ -16247,7 +16250,7 @@
           <p:nvPr/>
         </p:nvPicPr>
         <p:blipFill rotWithShape="1">
-          <a:blip r:embed="rId3"/>
+          <a:blip r:embed="rId5"/>
           <a:srcRect/>
           <a:stretch>
             <a:fillRect/>
@@ -16274,7 +16277,7 @@
           <p:nvPr/>
         </p:nvPicPr>
         <p:blipFill rotWithShape="1">
-          <a:blip r:embed="rId3"/>
+          <a:blip r:embed="rId5"/>
           <a:srcRect/>
           <a:stretch>
             <a:fillRect/>
@@ -16523,7 +16526,7 @@
           <p:nvPr/>
         </p:nvPicPr>
         <p:blipFill rotWithShape="1">
-          <a:blip r:embed="rId1"/>
+          <a:blip r:embed="rId3"/>
           <a:srcRect/>
           <a:stretch>
             <a:fillRect/>
@@ -16550,7 +16553,7 @@
           <p:nvPr/>
         </p:nvPicPr>
         <p:blipFill rotWithShape="1">
-          <a:blip r:embed="rId2"/>
+          <a:blip r:embed="rId4"/>
           <a:srcRect/>
           <a:stretch>
             <a:fillRect/>
@@ -16661,15 +16664,6 @@
               </a:rPr>
               <a:t>C) final</a:t>
             </a:r>
-            <a:endParaRPr lang="en-US" sz="2100" b="0" i="0" u="none" strike="noStrike" cap="none">
-              <a:solidFill>
-                <a:srgbClr val="FEF08A"/>
-              </a:solidFill>
-              <a:latin typeface="Inter Black"/>
-              <a:ea typeface="Inter Black"/>
-              <a:cs typeface="Inter Black"/>
-              <a:sym typeface="Inter Black"/>
-            </a:endParaRPr>
           </a:p>
         </p:txBody>
       </p:sp>
@@ -17328,7 +17322,7 @@
           <p:nvPr/>
         </p:nvPicPr>
         <p:blipFill rotWithShape="1">
-          <a:blip r:embed="rId3"/>
+          <a:blip r:embed="rId5"/>
           <a:srcRect/>
           <a:stretch>
             <a:fillRect/>
@@ -17355,7 +17349,7 @@
           <p:nvPr/>
         </p:nvPicPr>
         <p:blipFill rotWithShape="1">
-          <a:blip r:embed="rId3"/>
+          <a:blip r:embed="rId5"/>
           <a:srcRect/>
           <a:stretch>
             <a:fillRect/>
@@ -17382,7 +17376,7 @@
           <p:nvPr/>
         </p:nvPicPr>
         <p:blipFill rotWithShape="1">
-          <a:blip r:embed="rId3"/>
+          <a:blip r:embed="rId5"/>
           <a:srcRect/>
           <a:stretch>
             <a:fillRect/>
@@ -17409,7 +17403,7 @@
           <p:nvPr/>
         </p:nvPicPr>
         <p:blipFill rotWithShape="1">
-          <a:blip r:embed="rId3"/>
+          <a:blip r:embed="rId5"/>
           <a:srcRect/>
           <a:stretch>
             <a:fillRect/>
@@ -17658,7 +17652,7 @@
           <p:nvPr/>
         </p:nvPicPr>
         <p:blipFill rotWithShape="1">
-          <a:blip r:embed="rId1"/>
+          <a:blip r:embed="rId3"/>
           <a:srcRect/>
           <a:stretch>
             <a:fillRect/>
@@ -17685,7 +17679,7 @@
           <p:nvPr/>
         </p:nvPicPr>
         <p:blipFill rotWithShape="1">
-          <a:blip r:embed="rId2"/>
+          <a:blip r:embed="rId4"/>
           <a:srcRect/>
           <a:stretch>
             <a:fillRect/>
@@ -17754,15 +17748,6 @@
               </a:rPr>
               <a:t>Which keyword prevents a method from being overridden in Java?</a:t>
             </a:r>
-            <a:endParaRPr lang="en-US" sz="1800" b="0" i="0" u="none" strike="noStrike" cap="none">
-              <a:solidFill>
-                <a:srgbClr val="CBD5E1"/>
-              </a:solidFill>
-              <a:latin typeface="Inter" panose="02000503000000020004"/>
-              <a:ea typeface="Inter" panose="02000503000000020004"/>
-              <a:cs typeface="Inter" panose="02000503000000020004"/>
-              <a:sym typeface="Inter" panose="02000503000000020004"/>
-            </a:endParaRPr>
           </a:p>
         </p:txBody>
       </p:sp>
@@ -17812,15 +17797,6 @@
               </a:rPr>
               <a:t>C) final</a:t>
             </a:r>
-            <a:endParaRPr lang="en-US" sz="2100" b="0" i="0" u="none" strike="noStrike" cap="none">
-              <a:solidFill>
-                <a:srgbClr val="FEF08A"/>
-              </a:solidFill>
-              <a:latin typeface="Inter Black"/>
-              <a:ea typeface="Inter Black"/>
-              <a:cs typeface="Inter Black"/>
-              <a:sym typeface="Inter Black"/>
-            </a:endParaRPr>
           </a:p>
         </p:txBody>
       </p:sp>
@@ -17929,15 +17905,6 @@
               </a:rPr>
               <a:t>A) static</a:t>
             </a:r>
-            <a:endParaRPr lang="en-US" sz="1800" b="0" i="0" u="none" strike="noStrike" cap="none">
-              <a:solidFill>
-                <a:srgbClr val="CBD5E1"/>
-              </a:solidFill>
-              <a:latin typeface="Inter" panose="02000503000000020004"/>
-              <a:ea typeface="Inter" panose="02000503000000020004"/>
-              <a:cs typeface="Inter" panose="02000503000000020004"/>
-              <a:sym typeface="Inter" panose="02000503000000020004"/>
-            </a:endParaRPr>
           </a:p>
         </p:txBody>
       </p:sp>
@@ -18046,15 +18013,6 @@
               </a:rPr>
               <a:t>B) private</a:t>
             </a:r>
-            <a:endParaRPr lang="en-US" sz="1800" b="0" i="0" u="none" strike="noStrike" cap="none">
-              <a:solidFill>
-                <a:srgbClr val="CBD5E1"/>
-              </a:solidFill>
-              <a:latin typeface="Inter" panose="02000503000000020004"/>
-              <a:ea typeface="Inter" panose="02000503000000020004"/>
-              <a:cs typeface="Inter" panose="02000503000000020004"/>
-              <a:sym typeface="Inter" panose="02000503000000020004"/>
-            </a:endParaRPr>
           </a:p>
         </p:txBody>
       </p:sp>
@@ -18163,15 +18121,6 @@
               </a:rPr>
               <a:t>C) final</a:t>
             </a:r>
-            <a:endParaRPr lang="en-US" sz="1800" b="0" i="0" u="none" strike="noStrike" cap="none">
-              <a:solidFill>
-                <a:srgbClr val="CBD5E1"/>
-              </a:solidFill>
-              <a:latin typeface="Inter" panose="02000503000000020004"/>
-              <a:ea typeface="Inter" panose="02000503000000020004"/>
-              <a:cs typeface="Inter" panose="02000503000000020004"/>
-              <a:sym typeface="Inter" panose="02000503000000020004"/>
-            </a:endParaRPr>
           </a:p>
         </p:txBody>
       </p:sp>
@@ -18280,15 +18229,6 @@
               </a:rPr>
               <a:t>D) public</a:t>
             </a:r>
-            <a:endParaRPr lang="en-US" sz="1800" b="0" i="0" u="none" strike="noStrike" cap="none">
-              <a:solidFill>
-                <a:srgbClr val="CBD5E1"/>
-              </a:solidFill>
-              <a:latin typeface="Inter" panose="02000503000000020004"/>
-              <a:ea typeface="Inter" panose="02000503000000020004"/>
-              <a:cs typeface="Inter" panose="02000503000000020004"/>
-              <a:sym typeface="Inter" panose="02000503000000020004"/>
-            </a:endParaRPr>
           </a:p>
         </p:txBody>
       </p:sp>
@@ -18491,7 +18431,7 @@
           <p:nvPr/>
         </p:nvPicPr>
         <p:blipFill rotWithShape="1">
-          <a:blip r:embed="rId3"/>
+          <a:blip r:embed="rId5"/>
           <a:srcRect/>
           <a:stretch>
             <a:fillRect/>
@@ -18518,7 +18458,7 @@
           <p:nvPr/>
         </p:nvPicPr>
         <p:blipFill rotWithShape="1">
-          <a:blip r:embed="rId3"/>
+          <a:blip r:embed="rId5"/>
           <a:srcRect/>
           <a:stretch>
             <a:fillRect/>
@@ -18545,7 +18485,7 @@
           <p:nvPr/>
         </p:nvPicPr>
         <p:blipFill rotWithShape="1">
-          <a:blip r:embed="rId3"/>
+          <a:blip r:embed="rId5"/>
           <a:srcRect/>
           <a:stretch>
             <a:fillRect/>
@@ -18572,7 +18512,7 @@
           <p:nvPr/>
         </p:nvPicPr>
         <p:blipFill rotWithShape="1">
-          <a:blip r:embed="rId3"/>
+          <a:blip r:embed="rId5"/>
           <a:srcRect/>
           <a:stretch>
             <a:fillRect/>
@@ -18638,15 +18578,6 @@
               </a:rPr>
               <a:t>JAVA KEYWORDS</a:t>
             </a:r>
-            <a:endParaRPr lang="en-US" sz="3300" b="1" i="0" u="none" strike="noStrike" cap="none">
-              <a:solidFill>
-                <a:srgbClr val="38BDF8"/>
-              </a:solidFill>
-              <a:latin typeface="Inter" panose="02000503000000020004"/>
-              <a:ea typeface="Inter" panose="02000503000000020004"/>
-              <a:cs typeface="Inter" panose="02000503000000020004"/>
-              <a:sym typeface="Inter" panose="02000503000000020004"/>
-            </a:endParaRPr>
           </a:p>
         </p:txBody>
       </p:sp>
@@ -18837,60 +18768,6 @@
           <p:nvPr/>
         </p:nvPicPr>
         <p:blipFill rotWithShape="1">
-          <a:blip r:embed="rId1"/>
-          <a:srcRect/>
-          <a:stretch>
-            <a:fillRect/>
-          </a:stretch>
-        </p:blipFill>
-        <p:spPr>
-          <a:xfrm>
-            <a:off x="0" y="0"/>
-            <a:ext cx="12192000" cy="6858000"/>
-          </a:xfrm>
-          <a:prstGeom prst="rect">
-            <a:avLst/>
-          </a:prstGeom>
-          <a:noFill/>
-          <a:ln>
-            <a:noFill/>
-          </a:ln>
-        </p:spPr>
-      </p:pic>
-      <p:pic>
-        <p:nvPicPr>
-          <p:cNvPr id="229" name="Google Shape;229;p21" descr="image.png"/>
-          <p:cNvPicPr preferRelativeResize="0"/>
-          <p:nvPr/>
-        </p:nvPicPr>
-        <p:blipFill rotWithShape="1">
-          <a:blip r:embed="rId2"/>
-          <a:srcRect/>
-          <a:stretch>
-            <a:fillRect/>
-          </a:stretch>
-        </p:blipFill>
-        <p:spPr>
-          <a:xfrm>
-            <a:off x="571500" y="2326630"/>
-            <a:ext cx="5334000" cy="3447901"/>
-          </a:xfrm>
-          <a:prstGeom prst="rect">
-            <a:avLst/>
-          </a:prstGeom>
-          <a:noFill/>
-          <a:ln>
-            <a:noFill/>
-          </a:ln>
-        </p:spPr>
-      </p:pic>
-      <p:pic>
-        <p:nvPicPr>
-          <p:cNvPr id="230" name="Google Shape;230;p21" descr="image.png"/>
-          <p:cNvPicPr preferRelativeResize="0"/>
-          <p:nvPr/>
-        </p:nvPicPr>
-        <p:blipFill rotWithShape="1">
           <a:blip r:embed="rId3"/>
           <a:srcRect/>
           <a:stretch>
@@ -18899,6 +18776,60 @@
         </p:blipFill>
         <p:spPr>
           <a:xfrm>
+            <a:off x="0" y="0"/>
+            <a:ext cx="12192000" cy="6858000"/>
+          </a:xfrm>
+          <a:prstGeom prst="rect">
+            <a:avLst/>
+          </a:prstGeom>
+          <a:noFill/>
+          <a:ln>
+            <a:noFill/>
+          </a:ln>
+        </p:spPr>
+      </p:pic>
+      <p:pic>
+        <p:nvPicPr>
+          <p:cNvPr id="229" name="Google Shape;229;p21" descr="image.png"/>
+          <p:cNvPicPr preferRelativeResize="0"/>
+          <p:nvPr/>
+        </p:nvPicPr>
+        <p:blipFill rotWithShape="1">
+          <a:blip r:embed="rId4"/>
+          <a:srcRect/>
+          <a:stretch>
+            <a:fillRect/>
+          </a:stretch>
+        </p:blipFill>
+        <p:spPr>
+          <a:xfrm>
+            <a:off x="571500" y="2326630"/>
+            <a:ext cx="5334000" cy="3447901"/>
+          </a:xfrm>
+          <a:prstGeom prst="rect">
+            <a:avLst/>
+          </a:prstGeom>
+          <a:noFill/>
+          <a:ln>
+            <a:noFill/>
+          </a:ln>
+        </p:spPr>
+      </p:pic>
+      <p:pic>
+        <p:nvPicPr>
+          <p:cNvPr id="230" name="Google Shape;230;p21" descr="image.png"/>
+          <p:cNvPicPr preferRelativeResize="0"/>
+          <p:nvPr/>
+        </p:nvPicPr>
+        <p:blipFill rotWithShape="1">
+          <a:blip r:embed="rId5"/>
+          <a:srcRect/>
+          <a:stretch>
+            <a:fillRect/>
+          </a:stretch>
+        </p:blipFill>
+        <p:spPr>
+          <a:xfrm>
             <a:off x="6286500" y="2326630"/>
             <a:ext cx="5334000" cy="3447901"/>
           </a:xfrm>
@@ -18918,7 +18849,7 @@
           <p:nvPr/>
         </p:nvPicPr>
         <p:blipFill rotWithShape="1">
-          <a:blip r:embed="rId4"/>
+          <a:blip r:embed="rId6"/>
           <a:srcRect/>
           <a:stretch>
             <a:fillRect/>
@@ -18987,15 +18918,6 @@
               </a:rPr>
               <a:t>"I define what an object should do, not how. Classes implement me. I enable pure abstraction and have no physical existence."</a:t>
             </a:r>
-            <a:endParaRPr lang="en-US" sz="2100" b="0" i="1" u="none" strike="noStrike" cap="none">
-              <a:solidFill>
-                <a:srgbClr val="E2E8F0"/>
-              </a:solidFill>
-              <a:latin typeface="JetBrains Mono" panose="02000009000000000000"/>
-              <a:ea typeface="JetBrains Mono" panose="02000009000000000000"/>
-              <a:cs typeface="JetBrains Mono" panose="02000009000000000000"/>
-              <a:sym typeface="JetBrains Mono" panose="02000009000000000000"/>
-            </a:endParaRPr>
           </a:p>
         </p:txBody>
       </p:sp>
@@ -19048,15 +18970,6 @@
               </a:rPr>
               <a:t>Who am I?</a:t>
             </a:r>
-            <a:endParaRPr lang="en-US" sz="1800" b="0" i="0" u="none" strike="noStrike" cap="none">
-              <a:solidFill>
-                <a:srgbClr val="94A3B8"/>
-              </a:solidFill>
-              <a:latin typeface="Inter" panose="02000503000000020004"/>
-              <a:ea typeface="Inter" panose="02000503000000020004"/>
-              <a:cs typeface="Inter" panose="02000503000000020004"/>
-              <a:sym typeface="Inter" panose="02000503000000020004"/>
-            </a:endParaRPr>
           </a:p>
         </p:txBody>
       </p:sp>
@@ -19156,15 +19069,6 @@
               </a:rPr>
               <a:t>IDENTIFY THE COMPONENT</a:t>
             </a:r>
-            <a:endParaRPr lang="en-US" sz="3300" b="1" i="0" u="none" strike="noStrike" cap="none">
-              <a:solidFill>
-                <a:srgbClr val="38BDF8"/>
-              </a:solidFill>
-              <a:latin typeface="Inter" panose="02000503000000020004"/>
-              <a:ea typeface="Inter" panose="02000503000000020004"/>
-              <a:cs typeface="Inter" panose="02000503000000020004"/>
-              <a:sym typeface="Inter" panose="02000503000000020004"/>
-            </a:endParaRPr>
           </a:p>
         </p:txBody>
       </p:sp>
@@ -19326,7 +19230,7 @@
           <p:nvPr/>
         </p:nvPicPr>
         <p:blipFill rotWithShape="1">
-          <a:blip r:embed="rId1"/>
+          <a:blip r:embed="rId3"/>
           <a:srcRect/>
           <a:stretch>
             <a:fillRect/>
@@ -19353,7 +19257,7 @@
           <p:nvPr/>
         </p:nvPicPr>
         <p:blipFill rotWithShape="1">
-          <a:blip r:embed="rId2"/>
+          <a:blip r:embed="rId4"/>
           <a:srcRect/>
           <a:stretch>
             <a:fillRect/>
@@ -19380,7 +19284,7 @@
           <p:nvPr/>
         </p:nvPicPr>
         <p:blipFill rotWithShape="1">
-          <a:blip r:embed="rId3"/>
+          <a:blip r:embed="rId5"/>
           <a:srcRect/>
           <a:stretch>
             <a:fillRect/>
@@ -19502,15 +19406,6 @@
               </a:rPr>
               <a:t>Who am I?</a:t>
             </a:r>
-            <a:endParaRPr lang="en-US" sz="1800" b="0" i="0" u="none" strike="noStrike" cap="none">
-              <a:solidFill>
-                <a:srgbClr val="94A3B8"/>
-              </a:solidFill>
-              <a:latin typeface="Inter" panose="02000503000000020004"/>
-              <a:ea typeface="Inter" panose="02000503000000020004"/>
-              <a:cs typeface="Inter" panose="02000503000000020004"/>
-              <a:sym typeface="Inter" panose="02000503000000020004"/>
-            </a:endParaRPr>
           </a:p>
         </p:txBody>
       </p:sp>
@@ -19681,7 +19576,7 @@
           <p:nvPr/>
         </p:nvPicPr>
         <p:blipFill rotWithShape="1">
-          <a:blip r:embed="rId4"/>
+          <a:blip r:embed="rId6"/>
           <a:srcRect/>
           <a:stretch>
             <a:fillRect/>
@@ -19811,7 +19706,7 @@
           <p:nvPr/>
         </p:nvPicPr>
         <p:blipFill rotWithShape="1">
-          <a:blip r:embed="rId1"/>
+          <a:blip r:embed="rId3"/>
           <a:srcRect/>
           <a:stretch>
             <a:fillRect/>
@@ -19838,7 +19733,7 @@
           <p:nvPr/>
         </p:nvPicPr>
         <p:blipFill rotWithShape="1">
-          <a:blip r:embed="rId2"/>
+          <a:blip r:embed="rId4"/>
           <a:srcRect/>
           <a:stretch>
             <a:fillRect/>
@@ -19865,7 +19760,7 @@
           <p:nvPr/>
         </p:nvPicPr>
         <p:blipFill rotWithShape="1">
-          <a:blip r:embed="rId3"/>
+          <a:blip r:embed="rId5"/>
           <a:srcRect/>
           <a:stretch>
             <a:fillRect/>
@@ -19987,15 +19882,6 @@
               </a:rPr>
               <a:t>Who am I?</a:t>
             </a:r>
-            <a:endParaRPr lang="en-US" sz="1800" b="0" i="0" u="none" strike="noStrike" cap="none">
-              <a:solidFill>
-                <a:srgbClr val="94A3B8"/>
-              </a:solidFill>
-              <a:latin typeface="Inter" panose="02000503000000020004"/>
-              <a:ea typeface="Inter" panose="02000503000000020004"/>
-              <a:cs typeface="Inter" panose="02000503000000020004"/>
-              <a:sym typeface="Inter" panose="02000503000000020004"/>
-            </a:endParaRPr>
           </a:p>
         </p:txBody>
       </p:sp>
@@ -20166,7 +20052,7 @@
           <p:nvPr/>
         </p:nvPicPr>
         <p:blipFill rotWithShape="1">
-          <a:blip r:embed="rId4"/>
+          <a:blip r:embed="rId6"/>
           <a:srcRect/>
           <a:stretch>
             <a:fillRect/>
@@ -20304,7 +20190,7 @@
           <p:nvPr/>
         </p:nvPicPr>
         <p:blipFill rotWithShape="1">
-          <a:blip r:embed="rId1"/>
+          <a:blip r:embed="rId3"/>
           <a:srcRect/>
           <a:stretch>
             <a:fillRect/>
@@ -20471,15 +20357,6 @@
               </a:rPr>
               <a:t>Database Management Systems</a:t>
             </a:r>
-            <a:endParaRPr lang="en-US" sz="6000" b="1" i="0" u="none" strike="noStrike" cap="none">
-              <a:solidFill>
-                <a:srgbClr val="F8FAFC"/>
-              </a:solidFill>
-              <a:latin typeface="Inter" panose="02000503000000020004"/>
-              <a:ea typeface="Inter" panose="02000503000000020004"/>
-              <a:cs typeface="Inter" panose="02000503000000020004"/>
-              <a:sym typeface="Inter" panose="02000503000000020004"/>
-            </a:endParaRPr>
           </a:p>
         </p:txBody>
       </p:sp>
@@ -20571,7 +20448,7 @@
           <p:nvPr/>
         </p:nvPicPr>
         <p:blipFill rotWithShape="1">
-          <a:blip r:embed="rId1"/>
+          <a:blip r:embed="rId3"/>
           <a:srcRect/>
           <a:stretch>
             <a:fillRect/>
@@ -20598,7 +20475,7 @@
           <p:nvPr/>
         </p:nvPicPr>
         <p:blipFill rotWithShape="1">
-          <a:blip r:embed="rId2"/>
+          <a:blip r:embed="rId4"/>
           <a:srcRect/>
           <a:stretch>
             <a:fillRect/>
@@ -20667,15 +20544,6 @@
               </a:rPr>
               <a:t>Which ACID property guarantees that once a transaction is committed, its updates will survive system crashes?</a:t>
             </a:r>
-            <a:endParaRPr lang="en-US" sz="1800" b="0" i="0" u="none" strike="noStrike" cap="none">
-              <a:solidFill>
-                <a:srgbClr val="CBD5E1"/>
-              </a:solidFill>
-              <a:latin typeface="Inter" panose="02000503000000020004"/>
-              <a:ea typeface="Inter" panose="02000503000000020004"/>
-              <a:cs typeface="Inter" panose="02000503000000020004"/>
-              <a:sym typeface="Inter" panose="02000503000000020004"/>
-            </a:endParaRPr>
           </a:p>
         </p:txBody>
       </p:sp>
@@ -20725,15 +20593,6 @@
               </a:rPr>
               <a:t>D) Durability</a:t>
             </a:r>
-            <a:endParaRPr lang="en-US" sz="2100" b="0" i="0" u="none" strike="noStrike" cap="none">
-              <a:solidFill>
-                <a:srgbClr val="FEF08A"/>
-              </a:solidFill>
-              <a:latin typeface="Inter Black"/>
-              <a:ea typeface="Inter Black"/>
-              <a:cs typeface="Inter Black"/>
-              <a:sym typeface="Inter Black"/>
-            </a:endParaRPr>
           </a:p>
         </p:txBody>
       </p:sp>
@@ -20842,15 +20701,6 @@
               </a:rPr>
               <a:t>A) Atomicity</a:t>
             </a:r>
-            <a:endParaRPr lang="en-US" sz="1800" b="0" i="0" u="none" strike="noStrike" cap="none">
-              <a:solidFill>
-                <a:srgbClr val="CBD5E1"/>
-              </a:solidFill>
-              <a:latin typeface="Inter" panose="02000503000000020004"/>
-              <a:ea typeface="Inter" panose="02000503000000020004"/>
-              <a:cs typeface="Inter" panose="02000503000000020004"/>
-              <a:sym typeface="Inter" panose="02000503000000020004"/>
-            </a:endParaRPr>
           </a:p>
         </p:txBody>
       </p:sp>
@@ -20959,15 +20809,6 @@
               </a:rPr>
               <a:t>B) Consistency</a:t>
             </a:r>
-            <a:endParaRPr lang="en-US" sz="1800" b="0" i="0" u="none" strike="noStrike" cap="none">
-              <a:solidFill>
-                <a:srgbClr val="CBD5E1"/>
-              </a:solidFill>
-              <a:latin typeface="Inter" panose="02000503000000020004"/>
-              <a:ea typeface="Inter" panose="02000503000000020004"/>
-              <a:cs typeface="Inter" panose="02000503000000020004"/>
-              <a:sym typeface="Inter" panose="02000503000000020004"/>
-            </a:endParaRPr>
           </a:p>
         </p:txBody>
       </p:sp>
@@ -21076,15 +20917,6 @@
               </a:rPr>
               <a:t>C) Isolation</a:t>
             </a:r>
-            <a:endParaRPr lang="en-US" sz="1800" b="0" i="0" u="none" strike="noStrike" cap="none">
-              <a:solidFill>
-                <a:srgbClr val="CBD5E1"/>
-              </a:solidFill>
-              <a:latin typeface="Inter" panose="02000503000000020004"/>
-              <a:ea typeface="Inter" panose="02000503000000020004"/>
-              <a:cs typeface="Inter" panose="02000503000000020004"/>
-              <a:sym typeface="Inter" panose="02000503000000020004"/>
-            </a:endParaRPr>
           </a:p>
         </p:txBody>
       </p:sp>
@@ -21193,15 +21025,6 @@
               </a:rPr>
               <a:t>D) Durability</a:t>
             </a:r>
-            <a:endParaRPr lang="en-US" sz="1800" b="0" i="0" u="none" strike="noStrike" cap="none">
-              <a:solidFill>
-                <a:srgbClr val="CBD5E1"/>
-              </a:solidFill>
-              <a:latin typeface="Inter" panose="02000503000000020004"/>
-              <a:ea typeface="Inter" panose="02000503000000020004"/>
-              <a:cs typeface="Inter" panose="02000503000000020004"/>
-              <a:sym typeface="Inter" panose="02000503000000020004"/>
-            </a:endParaRPr>
           </a:p>
         </p:txBody>
       </p:sp>
@@ -21404,7 +21227,7 @@
           <p:nvPr/>
         </p:nvPicPr>
         <p:blipFill rotWithShape="1">
-          <a:blip r:embed="rId3"/>
+          <a:blip r:embed="rId5"/>
           <a:srcRect/>
           <a:stretch>
             <a:fillRect/>
@@ -21431,7 +21254,7 @@
           <p:nvPr/>
         </p:nvPicPr>
         <p:blipFill rotWithShape="1">
-          <a:blip r:embed="rId3"/>
+          <a:blip r:embed="rId5"/>
           <a:srcRect/>
           <a:stretch>
             <a:fillRect/>
@@ -21458,7 +21281,7 @@
           <p:nvPr/>
         </p:nvPicPr>
         <p:blipFill rotWithShape="1">
-          <a:blip r:embed="rId3"/>
+          <a:blip r:embed="rId5"/>
           <a:srcRect/>
           <a:stretch>
             <a:fillRect/>
@@ -21485,7 +21308,7 @@
           <p:nvPr/>
         </p:nvPicPr>
         <p:blipFill rotWithShape="1">
-          <a:blip r:embed="rId3"/>
+          <a:blip r:embed="rId5"/>
           <a:srcRect/>
           <a:stretch>
             <a:fillRect/>
@@ -21551,15 +21374,6 @@
               </a:rPr>
               <a:t>ACID PROPERTIES</a:t>
             </a:r>
-            <a:endParaRPr lang="en-US" sz="3300" b="1" i="0" u="none" strike="noStrike" cap="none">
-              <a:solidFill>
-                <a:srgbClr val="38BDF8"/>
-              </a:solidFill>
-              <a:latin typeface="Inter" panose="02000503000000020004"/>
-              <a:ea typeface="Inter" panose="02000503000000020004"/>
-              <a:cs typeface="Inter" panose="02000503000000020004"/>
-              <a:sym typeface="Inter" panose="02000503000000020004"/>
-            </a:endParaRPr>
           </a:p>
         </p:txBody>
       </p:sp>
@@ -21750,7 +21564,7 @@
           <p:nvPr/>
         </p:nvPicPr>
         <p:blipFill rotWithShape="1">
-          <a:blip r:embed="rId1"/>
+          <a:blip r:embed="rId3"/>
           <a:srcRect/>
           <a:stretch>
             <a:fillRect/>
@@ -21777,7 +21591,7 @@
           <p:nvPr/>
         </p:nvPicPr>
         <p:blipFill rotWithShape="1">
-          <a:blip r:embed="rId2"/>
+          <a:blip r:embed="rId4"/>
           <a:srcRect/>
           <a:stretch>
             <a:fillRect/>
@@ -21846,15 +21660,6 @@
               </a:rPr>
               <a:t>Which of the following SQL commands belongs to the Data Definition Language (DDL) subset?</a:t>
             </a:r>
-            <a:endParaRPr lang="en-US" sz="1800" b="0" i="0" u="none" strike="noStrike" cap="none">
-              <a:solidFill>
-                <a:srgbClr val="CBD5E1"/>
-              </a:solidFill>
-              <a:latin typeface="Inter" panose="02000503000000020004"/>
-              <a:ea typeface="Inter" panose="02000503000000020004"/>
-              <a:cs typeface="Inter" panose="02000503000000020004"/>
-              <a:sym typeface="Inter" panose="02000503000000020004"/>
-            </a:endParaRPr>
           </a:p>
         </p:txBody>
       </p:sp>
@@ -21904,15 +21709,6 @@
               </a:rPr>
               <a:t>C) CREATE</a:t>
             </a:r>
-            <a:endParaRPr lang="en-US" sz="2100" b="0" i="0" u="none" strike="noStrike" cap="none">
-              <a:solidFill>
-                <a:srgbClr val="FEF08A"/>
-              </a:solidFill>
-              <a:latin typeface="Inter Black"/>
-              <a:ea typeface="Inter Black"/>
-              <a:cs typeface="Inter Black"/>
-              <a:sym typeface="Inter Black"/>
-            </a:endParaRPr>
           </a:p>
         </p:txBody>
       </p:sp>
@@ -22021,15 +21817,6 @@
               </a:rPr>
               <a:t>A) SELECT</a:t>
             </a:r>
-            <a:endParaRPr lang="en-US" sz="1800" b="0" i="0" u="none" strike="noStrike" cap="none">
-              <a:solidFill>
-                <a:srgbClr val="CBD5E1"/>
-              </a:solidFill>
-              <a:latin typeface="Inter" panose="02000503000000020004"/>
-              <a:ea typeface="Inter" panose="02000503000000020004"/>
-              <a:cs typeface="Inter" panose="02000503000000020004"/>
-              <a:sym typeface="Inter" panose="02000503000000020004"/>
-            </a:endParaRPr>
           </a:p>
         </p:txBody>
       </p:sp>
@@ -22138,15 +21925,6 @@
               </a:rPr>
               <a:t>B) UPDATE</a:t>
             </a:r>
-            <a:endParaRPr lang="en-US" sz="1800" b="0" i="0" u="none" strike="noStrike" cap="none">
-              <a:solidFill>
-                <a:srgbClr val="CBD5E1"/>
-              </a:solidFill>
-              <a:latin typeface="Inter" panose="02000503000000020004"/>
-              <a:ea typeface="Inter" panose="02000503000000020004"/>
-              <a:cs typeface="Inter" panose="02000503000000020004"/>
-              <a:sym typeface="Inter" panose="02000503000000020004"/>
-            </a:endParaRPr>
           </a:p>
         </p:txBody>
       </p:sp>
@@ -22255,15 +22033,6 @@
               </a:rPr>
               <a:t>C) CREATE</a:t>
             </a:r>
-            <a:endParaRPr lang="en-US" sz="1800" b="0" i="0" u="none" strike="noStrike" cap="none">
-              <a:solidFill>
-                <a:srgbClr val="CBD5E1"/>
-              </a:solidFill>
-              <a:latin typeface="Inter" panose="02000503000000020004"/>
-              <a:ea typeface="Inter" panose="02000503000000020004"/>
-              <a:cs typeface="Inter" panose="02000503000000020004"/>
-              <a:sym typeface="Inter" panose="02000503000000020004"/>
-            </a:endParaRPr>
           </a:p>
         </p:txBody>
       </p:sp>
@@ -22372,15 +22141,6 @@
               </a:rPr>
               <a:t>D) INSERT</a:t>
             </a:r>
-            <a:endParaRPr lang="en-US" sz="1800" b="0" i="0" u="none" strike="noStrike" cap="none">
-              <a:solidFill>
-                <a:srgbClr val="CBD5E1"/>
-              </a:solidFill>
-              <a:latin typeface="Inter" panose="02000503000000020004"/>
-              <a:ea typeface="Inter" panose="02000503000000020004"/>
-              <a:cs typeface="Inter" panose="02000503000000020004"/>
-              <a:sym typeface="Inter" panose="02000503000000020004"/>
-            </a:endParaRPr>
           </a:p>
         </p:txBody>
       </p:sp>
@@ -22583,7 +22343,7 @@
           <p:nvPr/>
         </p:nvPicPr>
         <p:blipFill rotWithShape="1">
-          <a:blip r:embed="rId3"/>
+          <a:blip r:embed="rId5"/>
           <a:srcRect/>
           <a:stretch>
             <a:fillRect/>
@@ -22610,7 +22370,7 @@
           <p:nvPr/>
         </p:nvPicPr>
         <p:blipFill rotWithShape="1">
-          <a:blip r:embed="rId3"/>
+          <a:blip r:embed="rId5"/>
           <a:srcRect/>
           <a:stretch>
             <a:fillRect/>
@@ -22637,7 +22397,7 @@
           <p:nvPr/>
         </p:nvPicPr>
         <p:blipFill rotWithShape="1">
-          <a:blip r:embed="rId3"/>
+          <a:blip r:embed="rId5"/>
           <a:srcRect/>
           <a:stretch>
             <a:fillRect/>
@@ -22664,7 +22424,7 @@
           <p:nvPr/>
         </p:nvPicPr>
         <p:blipFill rotWithShape="1">
-          <a:blip r:embed="rId3"/>
+          <a:blip r:embed="rId5"/>
           <a:srcRect/>
           <a:stretch>
             <a:fillRect/>
@@ -22730,15 +22490,6 @@
               </a:rPr>
               <a:t>SQL SUBSETS</a:t>
             </a:r>
-            <a:endParaRPr lang="en-US" sz="3300" b="1" i="0" u="none" strike="noStrike" cap="none">
-              <a:solidFill>
-                <a:srgbClr val="38BDF8"/>
-              </a:solidFill>
-              <a:latin typeface="Inter" panose="02000503000000020004"/>
-              <a:ea typeface="Inter" panose="02000503000000020004"/>
-              <a:cs typeface="Inter" panose="02000503000000020004"/>
-              <a:sym typeface="Inter" panose="02000503000000020004"/>
-            </a:endParaRPr>
           </a:p>
         </p:txBody>
       </p:sp>
@@ -22929,7 +22680,7 @@
           <p:nvPr/>
         </p:nvPicPr>
         <p:blipFill rotWithShape="1">
-          <a:blip r:embed="rId1"/>
+          <a:blip r:embed="rId3"/>
           <a:srcRect/>
           <a:stretch>
             <a:fillRect/>
@@ -23180,7 +22931,7 @@
           <p:nvPr/>
         </p:nvPicPr>
         <p:blipFill rotWithShape="1">
-          <a:blip r:embed="rId1"/>
+          <a:blip r:embed="rId3"/>
           <a:srcRect/>
           <a:stretch>
             <a:fillRect/>
@@ -23207,7 +22958,7 @@
           <p:nvPr/>
         </p:nvPicPr>
         <p:blipFill rotWithShape="1">
-          <a:blip r:embed="rId2"/>
+          <a:blip r:embed="rId4"/>
           <a:srcRect/>
           <a:stretch>
             <a:fillRect/>
@@ -23326,15 +23077,6 @@
               </a:rPr>
               <a:t>C) CREATE</a:t>
             </a:r>
-            <a:endParaRPr lang="en-US" sz="2100" b="0" i="0" u="none" strike="noStrike" cap="none">
-              <a:solidFill>
-                <a:srgbClr val="FEF08A"/>
-              </a:solidFill>
-              <a:latin typeface="Inter Black"/>
-              <a:ea typeface="Inter Black"/>
-              <a:cs typeface="Inter Black"/>
-              <a:sym typeface="Inter Black"/>
-            </a:endParaRPr>
           </a:p>
         </p:txBody>
       </p:sp>
@@ -23973,7 +23715,7 @@
           <p:nvPr/>
         </p:nvPicPr>
         <p:blipFill rotWithShape="1">
-          <a:blip r:embed="rId3"/>
+          <a:blip r:embed="rId5"/>
           <a:srcRect/>
           <a:stretch>
             <a:fillRect/>
@@ -24000,7 +23742,7 @@
           <p:nvPr/>
         </p:nvPicPr>
         <p:blipFill rotWithShape="1">
-          <a:blip r:embed="rId3"/>
+          <a:blip r:embed="rId5"/>
           <a:srcRect/>
           <a:stretch>
             <a:fillRect/>
@@ -24027,7 +23769,7 @@
           <p:nvPr/>
         </p:nvPicPr>
         <p:blipFill rotWithShape="1">
-          <a:blip r:embed="rId3"/>
+          <a:blip r:embed="rId5"/>
           <a:srcRect/>
           <a:stretch>
             <a:fillRect/>
@@ -24054,7 +23796,7 @@
           <p:nvPr/>
         </p:nvPicPr>
         <p:blipFill rotWithShape="1">
-          <a:blip r:embed="rId3"/>
+          <a:blip r:embed="rId5"/>
           <a:srcRect/>
           <a:stretch>
             <a:fillRect/>
@@ -24311,7 +24053,7 @@
           <p:nvPr/>
         </p:nvPicPr>
         <p:blipFill rotWithShape="1">
-          <a:blip r:embed="rId1"/>
+          <a:blip r:embed="rId3"/>
           <a:srcRect/>
           <a:stretch>
             <a:fillRect/>
@@ -24338,7 +24080,7 @@
           <p:nvPr/>
         </p:nvPicPr>
         <p:blipFill rotWithShape="1">
-          <a:blip r:embed="rId2"/>
+          <a:blip r:embed="rId4"/>
           <a:srcRect/>
           <a:stretch>
             <a:fillRect/>
@@ -24407,15 +24149,6 @@
               </a:rPr>
               <a:t>Identify the ODD database term regarding concurrency control:</a:t>
             </a:r>
-            <a:endParaRPr lang="en-US" sz="1800" b="0" i="0" u="none" strike="noStrike" cap="none">
-              <a:solidFill>
-                <a:srgbClr val="CBD5E1"/>
-              </a:solidFill>
-              <a:latin typeface="Inter" panose="02000503000000020004"/>
-              <a:ea typeface="Inter" panose="02000503000000020004"/>
-              <a:cs typeface="Inter" panose="02000503000000020004"/>
-              <a:sym typeface="Inter" panose="02000503000000020004"/>
-            </a:endParaRPr>
           </a:p>
         </p:txBody>
       </p:sp>
@@ -24465,15 +24198,6 @@
               </a:rPr>
               <a:t>D) Outer Join</a:t>
             </a:r>
-            <a:endParaRPr lang="en-US" sz="2100" b="0" i="0" u="none" strike="noStrike" cap="none">
-              <a:solidFill>
-                <a:srgbClr val="FEF08A"/>
-              </a:solidFill>
-              <a:latin typeface="Inter Black"/>
-              <a:ea typeface="Inter Black"/>
-              <a:cs typeface="Inter Black"/>
-              <a:sym typeface="Inter Black"/>
-            </a:endParaRPr>
           </a:p>
         </p:txBody>
       </p:sp>
@@ -24582,15 +24306,6 @@
               </a:rPr>
               <a:t>A) Deadlock</a:t>
             </a:r>
-            <a:endParaRPr lang="en-US" sz="1800" b="0" i="0" u="none" strike="noStrike" cap="none">
-              <a:solidFill>
-                <a:srgbClr val="CBD5E1"/>
-              </a:solidFill>
-              <a:latin typeface="Inter" panose="02000503000000020004"/>
-              <a:ea typeface="Inter" panose="02000503000000020004"/>
-              <a:cs typeface="Inter" panose="02000503000000020004"/>
-              <a:sym typeface="Inter" panose="02000503000000020004"/>
-            </a:endParaRPr>
           </a:p>
         </p:txBody>
       </p:sp>
@@ -24699,15 +24414,6 @@
               </a:rPr>
               <a:t>B) Shared Lock</a:t>
             </a:r>
-            <a:endParaRPr lang="en-US" sz="1800" b="0" i="0" u="none" strike="noStrike" cap="none">
-              <a:solidFill>
-                <a:srgbClr val="CBD5E1"/>
-              </a:solidFill>
-              <a:latin typeface="Inter" panose="02000503000000020004"/>
-              <a:ea typeface="Inter" panose="02000503000000020004"/>
-              <a:cs typeface="Inter" panose="02000503000000020004"/>
-              <a:sym typeface="Inter" panose="02000503000000020004"/>
-            </a:endParaRPr>
           </a:p>
         </p:txBody>
       </p:sp>
@@ -24816,15 +24522,6 @@
               </a:rPr>
               <a:t>C) Exclusive Lock</a:t>
             </a:r>
-            <a:endParaRPr lang="en-US" sz="1800" b="0" i="0" u="none" strike="noStrike" cap="none">
-              <a:solidFill>
-                <a:srgbClr val="CBD5E1"/>
-              </a:solidFill>
-              <a:latin typeface="Inter" panose="02000503000000020004"/>
-              <a:ea typeface="Inter" panose="02000503000000020004"/>
-              <a:cs typeface="Inter" panose="02000503000000020004"/>
-              <a:sym typeface="Inter" panose="02000503000000020004"/>
-            </a:endParaRPr>
           </a:p>
         </p:txBody>
       </p:sp>
@@ -24933,15 +24630,6 @@
               </a:rPr>
               <a:t>D) Outer Join</a:t>
             </a:r>
-            <a:endParaRPr lang="en-US" sz="1800" b="0" i="0" u="none" strike="noStrike" cap="none">
-              <a:solidFill>
-                <a:srgbClr val="CBD5E1"/>
-              </a:solidFill>
-              <a:latin typeface="Inter" panose="02000503000000020004"/>
-              <a:ea typeface="Inter" panose="02000503000000020004"/>
-              <a:cs typeface="Inter" panose="02000503000000020004"/>
-              <a:sym typeface="Inter" panose="02000503000000020004"/>
-            </a:endParaRPr>
           </a:p>
         </p:txBody>
       </p:sp>
@@ -25144,7 +24832,7 @@
           <p:nvPr/>
         </p:nvPicPr>
         <p:blipFill rotWithShape="1">
-          <a:blip r:embed="rId3"/>
+          <a:blip r:embed="rId5"/>
           <a:srcRect/>
           <a:stretch>
             <a:fillRect/>
@@ -25171,7 +24859,7 @@
           <p:nvPr/>
         </p:nvPicPr>
         <p:blipFill rotWithShape="1">
-          <a:blip r:embed="rId3"/>
+          <a:blip r:embed="rId5"/>
           <a:srcRect/>
           <a:stretch>
             <a:fillRect/>
@@ -25198,7 +24886,7 @@
           <p:nvPr/>
         </p:nvPicPr>
         <p:blipFill rotWithShape="1">
-          <a:blip r:embed="rId3"/>
+          <a:blip r:embed="rId5"/>
           <a:srcRect/>
           <a:stretch>
             <a:fillRect/>
@@ -25225,7 +24913,7 @@
           <p:nvPr/>
         </p:nvPicPr>
         <p:blipFill rotWithShape="1">
-          <a:blip r:embed="rId3"/>
+          <a:blip r:embed="rId5"/>
           <a:srcRect/>
           <a:stretch>
             <a:fillRect/>
@@ -25291,15 +24979,6 @@
               </a:rPr>
               <a:t>ODD ONE OUT</a:t>
             </a:r>
-            <a:endParaRPr lang="en-US" sz="3300" b="1" i="0" u="none" strike="noStrike" cap="none">
-              <a:solidFill>
-                <a:srgbClr val="38BDF8"/>
-              </a:solidFill>
-              <a:latin typeface="Inter" panose="02000503000000020004"/>
-              <a:ea typeface="Inter" panose="02000503000000020004"/>
-              <a:cs typeface="Inter" panose="02000503000000020004"/>
-              <a:sym typeface="Inter" panose="02000503000000020004"/>
-            </a:endParaRPr>
           </a:p>
         </p:txBody>
       </p:sp>
@@ -25482,7 +25161,7 @@
           <p:nvPr/>
         </p:nvPicPr>
         <p:blipFill rotWithShape="1">
-          <a:blip r:embed="rId1"/>
+          <a:blip r:embed="rId3"/>
           <a:srcRect/>
           <a:stretch>
             <a:fillRect/>
@@ -25509,7 +25188,7 @@
           <p:nvPr/>
         </p:nvPicPr>
         <p:blipFill rotWithShape="1">
-          <a:blip r:embed="rId2"/>
+          <a:blip r:embed="rId4"/>
           <a:srcRect/>
           <a:stretch>
             <a:fillRect/>
@@ -25628,15 +25307,6 @@
               </a:rPr>
               <a:t>D) Outer Join</a:t>
             </a:r>
-            <a:endParaRPr lang="en-US" sz="2100" b="0" i="0" u="none" strike="noStrike" cap="none">
-              <a:solidFill>
-                <a:srgbClr val="FEF08A"/>
-              </a:solidFill>
-              <a:latin typeface="Inter Black"/>
-              <a:ea typeface="Inter Black"/>
-              <a:cs typeface="Inter Black"/>
-              <a:sym typeface="Inter Black"/>
-            </a:endParaRPr>
           </a:p>
         </p:txBody>
       </p:sp>
@@ -26275,7 +25945,7 @@
           <p:nvPr/>
         </p:nvPicPr>
         <p:blipFill rotWithShape="1">
-          <a:blip r:embed="rId3"/>
+          <a:blip r:embed="rId5"/>
           <a:srcRect/>
           <a:stretch>
             <a:fillRect/>
@@ -26302,7 +25972,7 @@
           <p:nvPr/>
         </p:nvPicPr>
         <p:blipFill rotWithShape="1">
-          <a:blip r:embed="rId3"/>
+          <a:blip r:embed="rId5"/>
           <a:srcRect/>
           <a:stretch>
             <a:fillRect/>
@@ -26329,7 +25999,7 @@
           <p:nvPr/>
         </p:nvPicPr>
         <p:blipFill rotWithShape="1">
-          <a:blip r:embed="rId3"/>
+          <a:blip r:embed="rId5"/>
           <a:srcRect/>
           <a:stretch>
             <a:fillRect/>
@@ -26356,7 +26026,7 @@
           <p:nvPr/>
         </p:nvPicPr>
         <p:blipFill rotWithShape="1">
-          <a:blip r:embed="rId3"/>
+          <a:blip r:embed="rId5"/>
           <a:srcRect/>
           <a:stretch>
             <a:fillRect/>
@@ -26605,7 +26275,7 @@
           <p:nvPr/>
         </p:nvPicPr>
         <p:blipFill rotWithShape="1">
-          <a:blip r:embed="rId1"/>
+          <a:blip r:embed="rId3"/>
           <a:srcRect/>
           <a:stretch>
             <a:fillRect/>
@@ -26632,7 +26302,7 @@
           <p:nvPr/>
         </p:nvPicPr>
         <p:blipFill rotWithShape="1">
-          <a:blip r:embed="rId2"/>
+          <a:blip r:embed="rId4"/>
           <a:srcRect/>
           <a:stretch>
             <a:fillRect/>
@@ -26751,15 +26421,6 @@
               </a:rPr>
               <a:t>D) Outer Join</a:t>
             </a:r>
-            <a:endParaRPr lang="en-US" sz="2100" b="0" i="0" u="none" strike="noStrike" cap="none">
-              <a:solidFill>
-                <a:srgbClr val="FEF08A"/>
-              </a:solidFill>
-              <a:latin typeface="Inter Black"/>
-              <a:ea typeface="Inter Black"/>
-              <a:cs typeface="Inter Black"/>
-              <a:sym typeface="Inter Black"/>
-            </a:endParaRPr>
           </a:p>
         </p:txBody>
       </p:sp>
@@ -27398,7 +27059,7 @@
           <p:nvPr/>
         </p:nvPicPr>
         <p:blipFill rotWithShape="1">
-          <a:blip r:embed="rId3"/>
+          <a:blip r:embed="rId5"/>
           <a:srcRect/>
           <a:stretch>
             <a:fillRect/>
@@ -27425,7 +27086,7 @@
           <p:nvPr/>
         </p:nvPicPr>
         <p:blipFill rotWithShape="1">
-          <a:blip r:embed="rId3"/>
+          <a:blip r:embed="rId5"/>
           <a:srcRect/>
           <a:stretch>
             <a:fillRect/>
@@ -27452,7 +27113,7 @@
           <p:nvPr/>
         </p:nvPicPr>
         <p:blipFill rotWithShape="1">
-          <a:blip r:embed="rId3"/>
+          <a:blip r:embed="rId5"/>
           <a:srcRect/>
           <a:stretch>
             <a:fillRect/>
@@ -27479,7 +27140,7 @@
           <p:nvPr/>
         </p:nvPicPr>
         <p:blipFill rotWithShape="1">
-          <a:blip r:embed="rId3"/>
+          <a:blip r:embed="rId5"/>
           <a:srcRect/>
           <a:stretch>
             <a:fillRect/>
@@ -27728,7 +27389,7 @@
           <p:nvPr/>
         </p:nvPicPr>
         <p:blipFill rotWithShape="1">
-          <a:blip r:embed="rId1"/>
+          <a:blip r:embed="rId3"/>
           <a:srcRect/>
           <a:stretch>
             <a:fillRect/>
@@ -27755,7 +27416,7 @@
           <p:nvPr/>
         </p:nvPicPr>
         <p:blipFill rotWithShape="1">
-          <a:blip r:embed="rId2"/>
+          <a:blip r:embed="rId4"/>
           <a:srcRect/>
           <a:stretch>
             <a:fillRect/>
@@ -27782,7 +27443,7 @@
           <p:nvPr/>
         </p:nvPicPr>
         <p:blipFill rotWithShape="1">
-          <a:blip r:embed="rId3"/>
+          <a:blip r:embed="rId5"/>
           <a:srcRect/>
           <a:stretch>
             <a:fillRect/>
@@ -27904,15 +27565,6 @@
               </a:rPr>
               <a:t>Who am I?</a:t>
             </a:r>
-            <a:endParaRPr lang="en-US" sz="1800" b="0" i="0" u="none" strike="noStrike" cap="none">
-              <a:solidFill>
-                <a:srgbClr val="94A3B8"/>
-              </a:solidFill>
-              <a:latin typeface="Inter" panose="02000503000000020004"/>
-              <a:ea typeface="Inter" panose="02000503000000020004"/>
-              <a:cs typeface="Inter" panose="02000503000000020004"/>
-              <a:sym typeface="Inter" panose="02000503000000020004"/>
-            </a:endParaRPr>
           </a:p>
         </p:txBody>
       </p:sp>
@@ -28083,7 +27735,7 @@
           <p:nvPr/>
         </p:nvPicPr>
         <p:blipFill rotWithShape="1">
-          <a:blip r:embed="rId4"/>
+          <a:blip r:embed="rId6"/>
           <a:srcRect/>
           <a:stretch>
             <a:fillRect/>
@@ -28213,7 +27865,7 @@
           <p:nvPr/>
         </p:nvPicPr>
         <p:blipFill rotWithShape="1">
-          <a:blip r:embed="rId1"/>
+          <a:blip r:embed="rId3"/>
           <a:srcRect/>
           <a:stretch>
             <a:fillRect/>
@@ -28240,7 +27892,7 @@
           <p:nvPr/>
         </p:nvPicPr>
         <p:blipFill rotWithShape="1">
-          <a:blip r:embed="rId2"/>
+          <a:blip r:embed="rId4"/>
           <a:srcRect/>
           <a:stretch>
             <a:fillRect/>
@@ -28267,7 +27919,7 @@
           <p:nvPr/>
         </p:nvPicPr>
         <p:blipFill rotWithShape="1">
-          <a:blip r:embed="rId3"/>
+          <a:blip r:embed="rId5"/>
           <a:srcRect/>
           <a:stretch>
             <a:fillRect/>
@@ -28389,15 +28041,6 @@
               </a:rPr>
               <a:t>Who am I?</a:t>
             </a:r>
-            <a:endParaRPr lang="en-US" sz="1800" b="0" i="0" u="none" strike="noStrike" cap="none">
-              <a:solidFill>
-                <a:srgbClr val="94A3B8"/>
-              </a:solidFill>
-              <a:latin typeface="Inter" panose="02000503000000020004"/>
-              <a:ea typeface="Inter" panose="02000503000000020004"/>
-              <a:cs typeface="Inter" panose="02000503000000020004"/>
-              <a:sym typeface="Inter" panose="02000503000000020004"/>
-            </a:endParaRPr>
           </a:p>
         </p:txBody>
       </p:sp>
@@ -28568,7 +28211,7 @@
           <p:nvPr/>
         </p:nvPicPr>
         <p:blipFill rotWithShape="1">
-          <a:blip r:embed="rId4"/>
+          <a:blip r:embed="rId6"/>
           <a:srcRect/>
           <a:stretch>
             <a:fillRect/>
@@ -28706,7 +28349,7 @@
           <p:nvPr/>
         </p:nvPicPr>
         <p:blipFill rotWithShape="1">
-          <a:blip r:embed="rId1"/>
+          <a:blip r:embed="rId3"/>
           <a:srcRect/>
           <a:stretch>
             <a:fillRect/>
@@ -28873,15 +28516,6 @@
               </a:rPr>
               <a:t>Machine Learning &amp; AI</a:t>
             </a:r>
-            <a:endParaRPr lang="en-US" sz="6000" b="1" i="0" u="none" strike="noStrike" cap="none">
-              <a:solidFill>
-                <a:srgbClr val="F8FAFC"/>
-              </a:solidFill>
-              <a:latin typeface="Inter" panose="02000503000000020004"/>
-              <a:ea typeface="Inter" panose="02000503000000020004"/>
-              <a:cs typeface="Inter" panose="02000503000000020004"/>
-              <a:sym typeface="Inter" panose="02000503000000020004"/>
-            </a:endParaRPr>
           </a:p>
         </p:txBody>
       </p:sp>
@@ -28973,7 +28607,7 @@
           <p:nvPr/>
         </p:nvPicPr>
         <p:blipFill rotWithShape="1">
-          <a:blip r:embed="rId1"/>
+          <a:blip r:embed="rId3"/>
           <a:srcRect/>
           <a:stretch>
             <a:fillRect/>
@@ -29000,7 +28634,7 @@
           <p:nvPr/>
         </p:nvPicPr>
         <p:blipFill rotWithShape="1">
-          <a:blip r:embed="rId2"/>
+          <a:blip r:embed="rId4"/>
           <a:srcRect/>
           <a:stretch>
             <a:fillRect/>
@@ -29069,15 +28703,6 @@
               </a:rPr>
               <a:t>What is the main goal of unsupervised machine learning algorithms?</a:t>
             </a:r>
-            <a:endParaRPr lang="en-US" sz="1800" b="0" i="0" u="none" strike="noStrike" cap="none">
-              <a:solidFill>
-                <a:srgbClr val="CBD5E1"/>
-              </a:solidFill>
-              <a:latin typeface="Inter" panose="02000503000000020004"/>
-              <a:ea typeface="Inter" panose="02000503000000020004"/>
-              <a:cs typeface="Inter" panose="02000503000000020004"/>
-              <a:sym typeface="Inter" panose="02000503000000020004"/>
-            </a:endParaRPr>
           </a:p>
         </p:txBody>
       </p:sp>
@@ -29127,15 +28752,6 @@
               </a:rPr>
               <a:t>B) Find hidden patterns in data</a:t>
             </a:r>
-            <a:endParaRPr lang="en-US" sz="2100" b="0" i="0" u="none" strike="noStrike" cap="none">
-              <a:solidFill>
-                <a:srgbClr val="FEF08A"/>
-              </a:solidFill>
-              <a:latin typeface="Inter Black"/>
-              <a:ea typeface="Inter Black"/>
-              <a:cs typeface="Inter Black"/>
-              <a:sym typeface="Inter Black"/>
-            </a:endParaRPr>
           </a:p>
         </p:txBody>
       </p:sp>
@@ -29244,15 +28860,6 @@
               </a:rPr>
               <a:t>A) To predict a specific labeled target value</a:t>
             </a:r>
-            <a:endParaRPr lang="en-US" sz="1800" b="0" i="0" u="none" strike="noStrike" cap="none">
-              <a:solidFill>
-                <a:srgbClr val="CBD5E1"/>
-              </a:solidFill>
-              <a:latin typeface="Inter" panose="02000503000000020004"/>
-              <a:ea typeface="Inter" panose="02000503000000020004"/>
-              <a:cs typeface="Inter" panose="02000503000000020004"/>
-              <a:sym typeface="Inter" panose="02000503000000020004"/>
-            </a:endParaRPr>
           </a:p>
         </p:txBody>
       </p:sp>
@@ -29361,15 +28968,6 @@
               </a:rPr>
               <a:t>B) To find hidden patterns or structures in unlabeled data</a:t>
             </a:r>
-            <a:endParaRPr lang="en-US" sz="1800" b="0" i="0" u="none" strike="noStrike" cap="none">
-              <a:solidFill>
-                <a:srgbClr val="CBD5E1"/>
-              </a:solidFill>
-              <a:latin typeface="Inter" panose="02000503000000020004"/>
-              <a:ea typeface="Inter" panose="02000503000000020004"/>
-              <a:cs typeface="Inter" panose="02000503000000020004"/>
-              <a:sym typeface="Inter" panose="02000503000000020004"/>
-            </a:endParaRPr>
           </a:p>
         </p:txBody>
       </p:sp>
@@ -29478,15 +29076,6 @@
               </a:rPr>
               <a:t>C) To optimize a continuous reward function</a:t>
             </a:r>
-            <a:endParaRPr lang="en-US" sz="1800" b="0" i="0" u="none" strike="noStrike" cap="none">
-              <a:solidFill>
-                <a:srgbClr val="CBD5E1"/>
-              </a:solidFill>
-              <a:latin typeface="Inter" panose="02000503000000020004"/>
-              <a:ea typeface="Inter" panose="02000503000000020004"/>
-              <a:cs typeface="Inter" panose="02000503000000020004"/>
-              <a:sym typeface="Inter" panose="02000503000000020004"/>
-            </a:endParaRPr>
           </a:p>
         </p:txBody>
       </p:sp>
@@ -29595,15 +29184,6 @@
               </a:rPr>
               <a:t>D) To minimize validation classification error</a:t>
             </a:r>
-            <a:endParaRPr lang="en-US" sz="1800" b="0" i="0" u="none" strike="noStrike" cap="none">
-              <a:solidFill>
-                <a:srgbClr val="CBD5E1"/>
-              </a:solidFill>
-              <a:latin typeface="Inter" panose="02000503000000020004"/>
-              <a:ea typeface="Inter" panose="02000503000000020004"/>
-              <a:cs typeface="Inter" panose="02000503000000020004"/>
-              <a:sym typeface="Inter" panose="02000503000000020004"/>
-            </a:endParaRPr>
           </a:p>
         </p:txBody>
       </p:sp>
@@ -29806,7 +29386,7 @@
           <p:nvPr/>
         </p:nvPicPr>
         <p:blipFill rotWithShape="1">
-          <a:blip r:embed="rId3"/>
+          <a:blip r:embed="rId5"/>
           <a:srcRect/>
           <a:stretch>
             <a:fillRect/>
@@ -29833,7 +29413,7 @@
           <p:nvPr/>
         </p:nvPicPr>
         <p:blipFill rotWithShape="1">
-          <a:blip r:embed="rId3"/>
+          <a:blip r:embed="rId5"/>
           <a:srcRect/>
           <a:stretch>
             <a:fillRect/>
@@ -29860,7 +29440,7 @@
           <p:nvPr/>
         </p:nvPicPr>
         <p:blipFill rotWithShape="1">
-          <a:blip r:embed="rId3"/>
+          <a:blip r:embed="rId5"/>
           <a:srcRect/>
           <a:stretch>
             <a:fillRect/>
@@ -29887,7 +29467,7 @@
           <p:nvPr/>
         </p:nvPicPr>
         <p:blipFill rotWithShape="1">
-          <a:blip r:embed="rId3"/>
+          <a:blip r:embed="rId5"/>
           <a:srcRect/>
           <a:stretch>
             <a:fillRect/>
@@ -29953,15 +29533,6 @@
               </a:rPr>
               <a:t>LEARNING MODELS</a:t>
             </a:r>
-            <a:endParaRPr lang="en-US" sz="3300" b="1" i="0" u="none" strike="noStrike" cap="none">
-              <a:solidFill>
-                <a:srgbClr val="38BDF8"/>
-              </a:solidFill>
-              <a:latin typeface="Inter" panose="02000503000000020004"/>
-              <a:ea typeface="Inter" panose="02000503000000020004"/>
-              <a:cs typeface="Inter" panose="02000503000000020004"/>
-              <a:sym typeface="Inter" panose="02000503000000020004"/>
-            </a:endParaRPr>
           </a:p>
         </p:txBody>
       </p:sp>
@@ -30152,7 +29723,7 @@
           <p:nvPr/>
         </p:nvPicPr>
         <p:blipFill rotWithShape="1">
-          <a:blip r:embed="rId1"/>
+          <a:blip r:embed="rId3"/>
           <a:srcRect/>
           <a:stretch>
             <a:fillRect/>
@@ -30179,7 +29750,7 @@
           <p:nvPr/>
         </p:nvPicPr>
         <p:blipFill rotWithShape="1">
-          <a:blip r:embed="rId2"/>
+          <a:blip r:embed="rId4"/>
           <a:srcRect/>
           <a:stretch>
             <a:fillRect/>
@@ -30248,15 +29819,6 @@
               </a:rPr>
               <a:t>A model achieves 99% accuracy on training but drops to 52% on unseen data. This condition is:</a:t>
             </a:r>
-            <a:endParaRPr lang="en-US" sz="1800" b="0" i="0" u="none" strike="noStrike" cap="none">
-              <a:solidFill>
-                <a:srgbClr val="CBD5E1"/>
-              </a:solidFill>
-              <a:latin typeface="Inter" panose="02000503000000020004"/>
-              <a:ea typeface="Inter" panose="02000503000000020004"/>
-              <a:cs typeface="Inter" panose="02000503000000020004"/>
-              <a:sym typeface="Inter" panose="02000503000000020004"/>
-            </a:endParaRPr>
           </a:p>
         </p:txBody>
       </p:sp>
@@ -30306,15 +29868,6 @@
               </a:rPr>
               <a:t>B) High Variance (Overfitting)</a:t>
             </a:r>
-            <a:endParaRPr lang="en-US" sz="2100" b="0" i="0" u="none" strike="noStrike" cap="none">
-              <a:solidFill>
-                <a:srgbClr val="FEF08A"/>
-              </a:solidFill>
-              <a:latin typeface="Inter Black"/>
-              <a:ea typeface="Inter Black"/>
-              <a:cs typeface="Inter Black"/>
-              <a:sym typeface="Inter Black"/>
-            </a:endParaRPr>
           </a:p>
         </p:txBody>
       </p:sp>
@@ -30423,15 +29976,6 @@
               </a:rPr>
               <a:t>A) High Bias (Underfitting)</a:t>
             </a:r>
-            <a:endParaRPr lang="en-US" sz="1800" b="0" i="0" u="none" strike="noStrike" cap="none">
-              <a:solidFill>
-                <a:srgbClr val="CBD5E1"/>
-              </a:solidFill>
-              <a:latin typeface="Inter" panose="02000503000000020004"/>
-              <a:ea typeface="Inter" panose="02000503000000020004"/>
-              <a:cs typeface="Inter" panose="02000503000000020004"/>
-              <a:sym typeface="Inter" panose="02000503000000020004"/>
-            </a:endParaRPr>
           </a:p>
         </p:txBody>
       </p:sp>
@@ -30540,15 +30084,6 @@
               </a:rPr>
               <a:t>B) High Variance (Overfitting)</a:t>
             </a:r>
-            <a:endParaRPr lang="en-US" sz="1800" b="0" i="0" u="none" strike="noStrike" cap="none">
-              <a:solidFill>
-                <a:srgbClr val="CBD5E1"/>
-              </a:solidFill>
-              <a:latin typeface="Inter" panose="02000503000000020004"/>
-              <a:ea typeface="Inter" panose="02000503000000020004"/>
-              <a:cs typeface="Inter" panose="02000503000000020004"/>
-              <a:sym typeface="Inter" panose="02000503000000020004"/>
-            </a:endParaRPr>
           </a:p>
         </p:txBody>
       </p:sp>
@@ -30657,15 +30192,6 @@
               </a:rPr>
               <a:t>C) Data Leakage</a:t>
             </a:r>
-            <a:endParaRPr lang="en-US" sz="1800" b="0" i="0" u="none" strike="noStrike" cap="none">
-              <a:solidFill>
-                <a:srgbClr val="CBD5E1"/>
-              </a:solidFill>
-              <a:latin typeface="Inter" panose="02000503000000020004"/>
-              <a:ea typeface="Inter" panose="02000503000000020004"/>
-              <a:cs typeface="Inter" panose="02000503000000020004"/>
-              <a:sym typeface="Inter" panose="02000503000000020004"/>
-            </a:endParaRPr>
           </a:p>
         </p:txBody>
       </p:sp>
@@ -30774,15 +30300,6 @@
               </a:rPr>
               <a:t>D) Class Imbalance</a:t>
             </a:r>
-            <a:endParaRPr lang="en-US" sz="1800" b="0" i="0" u="none" strike="noStrike" cap="none">
-              <a:solidFill>
-                <a:srgbClr val="CBD5E1"/>
-              </a:solidFill>
-              <a:latin typeface="Inter" panose="02000503000000020004"/>
-              <a:ea typeface="Inter" panose="02000503000000020004"/>
-              <a:cs typeface="Inter" panose="02000503000000020004"/>
-              <a:sym typeface="Inter" panose="02000503000000020004"/>
-            </a:endParaRPr>
           </a:p>
         </p:txBody>
       </p:sp>
@@ -30985,7 +30502,7 @@
           <p:nvPr/>
         </p:nvPicPr>
         <p:blipFill rotWithShape="1">
-          <a:blip r:embed="rId3"/>
+          <a:blip r:embed="rId5"/>
           <a:srcRect/>
           <a:stretch>
             <a:fillRect/>
@@ -31012,7 +30529,7 @@
           <p:nvPr/>
         </p:nvPicPr>
         <p:blipFill rotWithShape="1">
-          <a:blip r:embed="rId3"/>
+          <a:blip r:embed="rId5"/>
           <a:srcRect/>
           <a:stretch>
             <a:fillRect/>
@@ -31039,7 +30556,7 @@
           <p:nvPr/>
         </p:nvPicPr>
         <p:blipFill rotWithShape="1">
-          <a:blip r:embed="rId3"/>
+          <a:blip r:embed="rId5"/>
           <a:srcRect/>
           <a:stretch>
             <a:fillRect/>
@@ -31066,7 +30583,7 @@
           <p:nvPr/>
         </p:nvPicPr>
         <p:blipFill rotWithShape="1">
-          <a:blip r:embed="rId3"/>
+          <a:blip r:embed="rId5"/>
           <a:srcRect/>
           <a:stretch>
             <a:fillRect/>
@@ -31132,15 +30649,6 @@
               </a:rPr>
               <a:t>MODEL DIAGNOSTICS</a:t>
             </a:r>
-            <a:endParaRPr lang="en-US" sz="3300" b="1" i="0" u="none" strike="noStrike" cap="none">
-              <a:solidFill>
-                <a:srgbClr val="38BDF8"/>
-              </a:solidFill>
-              <a:latin typeface="Inter" panose="02000503000000020004"/>
-              <a:ea typeface="Inter" panose="02000503000000020004"/>
-              <a:cs typeface="Inter" panose="02000503000000020004"/>
-              <a:sym typeface="Inter" panose="02000503000000020004"/>
-            </a:endParaRPr>
           </a:p>
         </p:txBody>
       </p:sp>
@@ -31323,7 +30831,7 @@
           <p:nvPr/>
         </p:nvPicPr>
         <p:blipFill rotWithShape="1">
-          <a:blip r:embed="rId1"/>
+          <a:blip r:embed="rId3"/>
           <a:srcRect/>
           <a:stretch>
             <a:fillRect/>
@@ -31350,7 +30858,7 @@
           <p:nvPr/>
         </p:nvPicPr>
         <p:blipFill rotWithShape="1">
-          <a:blip r:embed="rId2"/>
+          <a:blip r:embed="rId4"/>
           <a:srcRect/>
           <a:stretch>
             <a:fillRect/>
@@ -31469,15 +30977,6 @@
               </a:rPr>
               <a:t>B) High Variance (Overfitting)</a:t>
             </a:r>
-            <a:endParaRPr lang="en-US" sz="2100" b="0" i="0" u="none" strike="noStrike" cap="none">
-              <a:solidFill>
-                <a:srgbClr val="FEF08A"/>
-              </a:solidFill>
-              <a:latin typeface="Inter Black"/>
-              <a:ea typeface="Inter Black"/>
-              <a:cs typeface="Inter Black"/>
-              <a:sym typeface="Inter Black"/>
-            </a:endParaRPr>
           </a:p>
         </p:txBody>
       </p:sp>
@@ -32128,7 +31627,7 @@
           <p:nvPr/>
         </p:nvPicPr>
         <p:blipFill rotWithShape="1">
-          <a:blip r:embed="rId3"/>
+          <a:blip r:embed="rId5"/>
           <a:srcRect/>
           <a:stretch>
             <a:fillRect/>
@@ -32155,7 +31654,7 @@
           <p:nvPr/>
         </p:nvPicPr>
         <p:blipFill rotWithShape="1">
-          <a:blip r:embed="rId3"/>
+          <a:blip r:embed="rId5"/>
           <a:srcRect/>
           <a:stretch>
             <a:fillRect/>
@@ -32182,7 +31681,7 @@
           <p:nvPr/>
         </p:nvPicPr>
         <p:blipFill rotWithShape="1">
-          <a:blip r:embed="rId3"/>
+          <a:blip r:embed="rId5"/>
           <a:srcRect/>
           <a:stretch>
             <a:fillRect/>
@@ -32209,7 +31708,7 @@
           <p:nvPr/>
         </p:nvPicPr>
         <p:blipFill rotWithShape="1">
-          <a:blip r:embed="rId3"/>
+          <a:blip r:embed="rId5"/>
           <a:srcRect/>
           <a:stretch>
             <a:fillRect/>
@@ -32466,7 +31965,7 @@
           <p:nvPr/>
         </p:nvPicPr>
         <p:blipFill rotWithShape="1">
-          <a:blip r:embed="rId1"/>
+          <a:blip r:embed="rId3"/>
           <a:srcRect/>
           <a:stretch>
             <a:fillRect/>
@@ -32493,7 +31992,7 @@
           <p:nvPr/>
         </p:nvPicPr>
         <p:blipFill rotWithShape="1">
-          <a:blip r:embed="rId2"/>
+          <a:blip r:embed="rId4"/>
           <a:srcRect/>
           <a:stretch>
             <a:fillRect/>
@@ -32562,15 +32061,6 @@
               </a:rPr>
               <a:t>Which data structure is used by the compiler to manage function calls and local variables?</a:t>
             </a:r>
-            <a:endParaRPr lang="en-US" sz="1800" b="0" i="0" u="none" strike="noStrike" cap="none">
-              <a:solidFill>
-                <a:srgbClr val="CBD5E1"/>
-              </a:solidFill>
-              <a:latin typeface="Inter" panose="02000503000000020004"/>
-              <a:ea typeface="Inter" panose="02000503000000020004"/>
-              <a:cs typeface="Inter" panose="02000503000000020004"/>
-              <a:sym typeface="Inter" panose="02000503000000020004"/>
-            </a:endParaRPr>
           </a:p>
         </p:txBody>
       </p:sp>
@@ -32620,15 +32110,6 @@
               </a:rPr>
               <a:t>B) Stack</a:t>
             </a:r>
-            <a:endParaRPr lang="en-US" sz="2100" b="0" i="0" u="none" strike="noStrike" cap="none">
-              <a:solidFill>
-                <a:srgbClr val="FEF08A"/>
-              </a:solidFill>
-              <a:latin typeface="Inter Black"/>
-              <a:ea typeface="Inter Black"/>
-              <a:cs typeface="Inter Black"/>
-              <a:sym typeface="Inter Black"/>
-            </a:endParaRPr>
           </a:p>
         </p:txBody>
       </p:sp>
@@ -32737,15 +32218,6 @@
               </a:rPr>
               <a:t>A) Queue</a:t>
             </a:r>
-            <a:endParaRPr lang="en-US" sz="1800" b="0" i="0" u="none" strike="noStrike" cap="none">
-              <a:solidFill>
-                <a:srgbClr val="CBD5E1"/>
-              </a:solidFill>
-              <a:latin typeface="Inter" panose="02000503000000020004"/>
-              <a:ea typeface="Inter" panose="02000503000000020004"/>
-              <a:cs typeface="Inter" panose="02000503000000020004"/>
-              <a:sym typeface="Inter" panose="02000503000000020004"/>
-            </a:endParaRPr>
           </a:p>
         </p:txBody>
       </p:sp>
@@ -32854,15 +32326,6 @@
               </a:rPr>
               <a:t>B) Stack</a:t>
             </a:r>
-            <a:endParaRPr lang="en-US" sz="1800" b="0" i="0" u="none" strike="noStrike" cap="none">
-              <a:solidFill>
-                <a:srgbClr val="CBD5E1"/>
-              </a:solidFill>
-              <a:latin typeface="Inter" panose="02000503000000020004"/>
-              <a:ea typeface="Inter" panose="02000503000000020004"/>
-              <a:cs typeface="Inter" panose="02000503000000020004"/>
-              <a:sym typeface="Inter" panose="02000503000000020004"/>
-            </a:endParaRPr>
           </a:p>
         </p:txBody>
       </p:sp>
@@ -32971,15 +32434,6 @@
               </a:rPr>
               <a:t>C) Tree</a:t>
             </a:r>
-            <a:endParaRPr lang="en-US" sz="1800" b="0" i="0" u="none" strike="noStrike" cap="none">
-              <a:solidFill>
-                <a:srgbClr val="CBD5E1"/>
-              </a:solidFill>
-              <a:latin typeface="Inter" panose="02000503000000020004"/>
-              <a:ea typeface="Inter" panose="02000503000000020004"/>
-              <a:cs typeface="Inter" panose="02000503000000020004"/>
-              <a:sym typeface="Inter" panose="02000503000000020004"/>
-            </a:endParaRPr>
           </a:p>
         </p:txBody>
       </p:sp>
@@ -33088,15 +32542,6 @@
               </a:rPr>
               <a:t>D) Linked List</a:t>
             </a:r>
-            <a:endParaRPr lang="en-US" sz="1800" b="0" i="0" u="none" strike="noStrike" cap="none">
-              <a:solidFill>
-                <a:srgbClr val="CBD5E1"/>
-              </a:solidFill>
-              <a:latin typeface="Inter" panose="02000503000000020004"/>
-              <a:ea typeface="Inter" panose="02000503000000020004"/>
-              <a:cs typeface="Inter" panose="02000503000000020004"/>
-              <a:sym typeface="Inter" panose="02000503000000020004"/>
-            </a:endParaRPr>
           </a:p>
         </p:txBody>
       </p:sp>
@@ -33299,7 +32744,7 @@
           <p:nvPr/>
         </p:nvPicPr>
         <p:blipFill rotWithShape="1">
-          <a:blip r:embed="rId3"/>
+          <a:blip r:embed="rId5"/>
           <a:srcRect/>
           <a:stretch>
             <a:fillRect/>
@@ -33326,7 +32771,7 @@
           <p:nvPr/>
         </p:nvPicPr>
         <p:blipFill rotWithShape="1">
-          <a:blip r:embed="rId3"/>
+          <a:blip r:embed="rId5"/>
           <a:srcRect/>
           <a:stretch>
             <a:fillRect/>
@@ -33353,7 +32798,7 @@
           <p:nvPr/>
         </p:nvPicPr>
         <p:blipFill rotWithShape="1">
-          <a:blip r:embed="rId3"/>
+          <a:blip r:embed="rId5"/>
           <a:srcRect/>
           <a:stretch>
             <a:fillRect/>
@@ -33380,7 +32825,7 @@
           <p:nvPr/>
         </p:nvPicPr>
         <p:blipFill rotWithShape="1">
-          <a:blip r:embed="rId3"/>
+          <a:blip r:embed="rId5"/>
           <a:srcRect/>
           <a:stretch>
             <a:fillRect/>
@@ -33446,15 +32891,6 @@
               </a:rPr>
               <a:t>FUNCTION CALL MANAGEMENT</a:t>
             </a:r>
-            <a:endParaRPr lang="en-US" sz="3300" b="1" i="0" u="none" strike="noStrike" cap="none">
-              <a:solidFill>
-                <a:srgbClr val="38BDF8"/>
-              </a:solidFill>
-              <a:latin typeface="Inter" panose="02000503000000020004"/>
-              <a:ea typeface="Inter" panose="02000503000000020004"/>
-              <a:cs typeface="Inter" panose="02000503000000020004"/>
-              <a:sym typeface="Inter" panose="02000503000000020004"/>
-            </a:endParaRPr>
           </a:p>
         </p:txBody>
       </p:sp>
@@ -33637,7 +33073,7 @@
           <p:nvPr/>
         </p:nvPicPr>
         <p:blipFill rotWithShape="1">
-          <a:blip r:embed="rId1"/>
+          <a:blip r:embed="rId3"/>
           <a:srcRect/>
           <a:stretch>
             <a:fillRect/>
@@ -33664,7 +33100,7 @@
           <p:nvPr/>
         </p:nvPicPr>
         <p:blipFill rotWithShape="1">
-          <a:blip r:embed="rId2"/>
+          <a:blip r:embed="rId4"/>
           <a:srcRect/>
           <a:stretch>
             <a:fillRect/>
@@ -33776,15 +33212,6 @@
               </a:rPr>
               <a:t>B) High Variance (Overfitting)</a:t>
             </a:r>
-            <a:endParaRPr lang="en-US" sz="2100" b="0" i="0" u="none" strike="noStrike" cap="none">
-              <a:solidFill>
-                <a:srgbClr val="FEF08A"/>
-              </a:solidFill>
-              <a:latin typeface="Inter Black"/>
-              <a:ea typeface="Inter Black"/>
-              <a:cs typeface="Inter Black"/>
-              <a:sym typeface="Inter Black"/>
-            </a:endParaRPr>
           </a:p>
         </p:txBody>
       </p:sp>
@@ -34435,7 +33862,7 @@
           <p:nvPr/>
         </p:nvPicPr>
         <p:blipFill rotWithShape="1">
-          <a:blip r:embed="rId3"/>
+          <a:blip r:embed="rId5"/>
           <a:srcRect/>
           <a:stretch>
             <a:fillRect/>
@@ -34462,7 +33889,7 @@
           <p:nvPr/>
         </p:nvPicPr>
         <p:blipFill rotWithShape="1">
-          <a:blip r:embed="rId3"/>
+          <a:blip r:embed="rId5"/>
           <a:srcRect/>
           <a:stretch>
             <a:fillRect/>
@@ -34489,7 +33916,7 @@
           <p:nvPr/>
         </p:nvPicPr>
         <p:blipFill rotWithShape="1">
-          <a:blip r:embed="rId3"/>
+          <a:blip r:embed="rId5"/>
           <a:srcRect/>
           <a:stretch>
             <a:fillRect/>
@@ -34516,7 +33943,7 @@
           <p:nvPr/>
         </p:nvPicPr>
         <p:blipFill rotWithShape="1">
-          <a:blip r:embed="rId3"/>
+          <a:blip r:embed="rId5"/>
           <a:srcRect/>
           <a:stretch>
             <a:fillRect/>
@@ -34765,7 +34192,7 @@
           <p:nvPr/>
         </p:nvPicPr>
         <p:blipFill rotWithShape="1">
-          <a:blip r:embed="rId1"/>
+          <a:blip r:embed="rId3"/>
           <a:srcRect/>
           <a:stretch>
             <a:fillRect/>
@@ -34792,7 +34219,7 @@
           <p:nvPr/>
         </p:nvPicPr>
         <p:blipFill rotWithShape="1">
-          <a:blip r:embed="rId2"/>
+          <a:blip r:embed="rId4"/>
           <a:srcRect/>
           <a:stretch>
             <a:fillRect/>
@@ -34904,15 +34331,6 @@
               </a:rPr>
               <a:t>B) High Variance (Overfitting)</a:t>
             </a:r>
-            <a:endParaRPr lang="en-US" sz="2100" b="0" i="0" u="none" strike="noStrike" cap="none">
-              <a:solidFill>
-                <a:srgbClr val="FEF08A"/>
-              </a:solidFill>
-              <a:latin typeface="Inter Black"/>
-              <a:ea typeface="Inter Black"/>
-              <a:cs typeface="Inter Black"/>
-              <a:sym typeface="Inter Black"/>
-            </a:endParaRPr>
           </a:p>
         </p:txBody>
       </p:sp>
@@ -35563,7 +34981,7 @@
           <p:nvPr/>
         </p:nvPicPr>
         <p:blipFill rotWithShape="1">
-          <a:blip r:embed="rId3"/>
+          <a:blip r:embed="rId5"/>
           <a:srcRect/>
           <a:stretch>
             <a:fillRect/>
@@ -35590,7 +35008,7 @@
           <p:nvPr/>
         </p:nvPicPr>
         <p:blipFill rotWithShape="1">
-          <a:blip r:embed="rId3"/>
+          <a:blip r:embed="rId5"/>
           <a:srcRect/>
           <a:stretch>
             <a:fillRect/>
@@ -35617,7 +35035,7 @@
           <p:nvPr/>
         </p:nvPicPr>
         <p:blipFill rotWithShape="1">
-          <a:blip r:embed="rId3"/>
+          <a:blip r:embed="rId5"/>
           <a:srcRect/>
           <a:stretch>
             <a:fillRect/>
@@ -35644,7 +35062,7 @@
           <p:nvPr/>
         </p:nvPicPr>
         <p:blipFill rotWithShape="1">
-          <a:blip r:embed="rId3"/>
+          <a:blip r:embed="rId5"/>
           <a:srcRect/>
           <a:stretch>
             <a:fillRect/>
@@ -35893,7 +35311,7 @@
           <p:nvPr/>
         </p:nvPicPr>
         <p:blipFill rotWithShape="1">
-          <a:blip r:embed="rId1"/>
+          <a:blip r:embed="rId3"/>
           <a:srcRect/>
           <a:stretch>
             <a:fillRect/>
@@ -35920,7 +35338,7 @@
           <p:nvPr/>
         </p:nvPicPr>
         <p:blipFill rotWithShape="1">
-          <a:blip r:embed="rId2"/>
+          <a:blip r:embed="rId4"/>
           <a:srcRect/>
           <a:stretch>
             <a:fillRect/>
@@ -36032,15 +35450,6 @@
               </a:rPr>
               <a:t>B) High Variance (Overfitting)</a:t>
             </a:r>
-            <a:endParaRPr lang="en-US" sz="2100" b="0" i="0" u="none" strike="noStrike" cap="none">
-              <a:solidFill>
-                <a:srgbClr val="FEF08A"/>
-              </a:solidFill>
-              <a:latin typeface="Inter Black"/>
-              <a:ea typeface="Inter Black"/>
-              <a:cs typeface="Inter Black"/>
-              <a:sym typeface="Inter Black"/>
-            </a:endParaRPr>
           </a:p>
         </p:txBody>
       </p:sp>
@@ -36691,7 +36100,7 @@
           <p:nvPr/>
         </p:nvPicPr>
         <p:blipFill rotWithShape="1">
-          <a:blip r:embed="rId3"/>
+          <a:blip r:embed="rId5"/>
           <a:srcRect/>
           <a:stretch>
             <a:fillRect/>
@@ -36718,7 +36127,7 @@
           <p:nvPr/>
         </p:nvPicPr>
         <p:blipFill rotWithShape="1">
-          <a:blip r:embed="rId3"/>
+          <a:blip r:embed="rId5"/>
           <a:srcRect/>
           <a:stretch>
             <a:fillRect/>
@@ -36745,7 +36154,7 @@
           <p:nvPr/>
         </p:nvPicPr>
         <p:blipFill rotWithShape="1">
-          <a:blip r:embed="rId3"/>
+          <a:blip r:embed="rId5"/>
           <a:srcRect/>
           <a:stretch>
             <a:fillRect/>
@@ -36772,7 +36181,7 @@
           <p:nvPr/>
         </p:nvPicPr>
         <p:blipFill rotWithShape="1">
-          <a:blip r:embed="rId3"/>
+          <a:blip r:embed="rId5"/>
           <a:srcRect/>
           <a:stretch>
             <a:fillRect/>
@@ -37028,7 +36437,7 @@
           <p:nvPr/>
         </p:nvPicPr>
         <p:blipFill rotWithShape="1">
-          <a:blip r:embed="rId1"/>
+          <a:blip r:embed="rId3"/>
           <a:srcRect/>
           <a:stretch>
             <a:fillRect/>
@@ -37056,8 +36465,8 @@
         </p:nvSpPr>
         <p:spPr>
           <a:xfrm>
-            <a:off x="5195887" y="2151757"/>
-            <a:ext cx="1800225" cy="371475"/>
+            <a:off x="3766457" y="2685158"/>
+            <a:ext cx="4844143" cy="1015663"/>
           </a:xfrm>
           <a:prstGeom prst="rect">
             <a:avLst/>
@@ -37083,7 +36492,7 @@
               <a:buNone/>
             </a:pPr>
             <a:r>
-              <a:rPr lang="en-US" sz="2400" b="1" i="0" u="none" strike="noStrike" cap="none">
+              <a:rPr lang="en-US" sz="6600" b="1" i="0" u="none" strike="noStrike" cap="none" dirty="0">
                 <a:solidFill>
                   <a:srgbClr val="38BDF8"/>
                 </a:solidFill>
@@ -37094,76 +36503,6 @@
               </a:rPr>
               <a:t>End of Quiz</a:t>
             </a:r>
-            <a:endParaRPr lang="en-US" sz="2400" b="1" i="0" u="none" strike="noStrike" cap="none">
-              <a:solidFill>
-                <a:srgbClr val="38BDF8"/>
-              </a:solidFill>
-              <a:latin typeface="Inter" panose="02000503000000020004"/>
-              <a:ea typeface="Inter" panose="02000503000000020004"/>
-              <a:cs typeface="Inter" panose="02000503000000020004"/>
-              <a:sym typeface="Inter" panose="02000503000000020004"/>
-            </a:endParaRPr>
-          </a:p>
-        </p:txBody>
-      </p:sp>
-      <p:sp>
-        <p:nvSpPr>
-          <p:cNvPr id="391" name="Google Shape;391;p29"/>
-          <p:cNvSpPr txBox="1"/>
-          <p:nvPr/>
-        </p:nvSpPr>
-        <p:spPr>
-          <a:xfrm>
-            <a:off x="4105275" y="3032224"/>
-            <a:ext cx="3981450" cy="487560"/>
-          </a:xfrm>
-          <a:prstGeom prst="rect">
-            <a:avLst/>
-          </a:prstGeom>
-          <a:noFill/>
-          <a:ln>
-            <a:noFill/>
-          </a:ln>
-        </p:spPr>
-        <p:txBody>
-          <a:bodyPr spcFirstLastPara="1" wrap="square" lIns="0" tIns="0" rIns="0" bIns="0" anchor="t" anchorCtr="0">
-            <a:spAutoFit/>
-          </a:bodyPr>
-          <a:lstStyle/>
-          <a:p>
-            <a:pPr marL="0" marR="0" lvl="0" indent="0" algn="ctr" rtl="0">
-              <a:lnSpc>
-                <a:spcPct val="160000"/>
-              </a:lnSpc>
-              <a:spcBef>
-                <a:spcPts val="0"/>
-              </a:spcBef>
-              <a:spcAft>
-                <a:spcPts val="0"/>
-              </a:spcAft>
-              <a:buNone/>
-            </a:pPr>
-            <a:r>
-              <a:rPr lang="en-US" sz="2400" b="0" i="0" u="none" strike="noStrike" cap="none">
-                <a:solidFill>
-                  <a:srgbClr val="F8FAFC"/>
-                </a:solidFill>
-                <a:latin typeface="Inter" panose="02000503000000020004"/>
-                <a:ea typeface="Inter" panose="02000503000000020004"/>
-                <a:cs typeface="Inter" panose="02000503000000020004"/>
-                <a:sym typeface="Inter" panose="02000503000000020004"/>
-              </a:rPr>
-              <a:t>Good luck with your exams!</a:t>
-            </a:r>
-            <a:endParaRPr lang="en-US" sz="2400" b="0" i="0" u="none" strike="noStrike" cap="none">
-              <a:solidFill>
-                <a:srgbClr val="F8FAFC"/>
-              </a:solidFill>
-              <a:latin typeface="Inter" panose="02000503000000020004"/>
-              <a:ea typeface="Inter" panose="02000503000000020004"/>
-              <a:cs typeface="Inter" panose="02000503000000020004"/>
-              <a:sym typeface="Inter" panose="02000503000000020004"/>
-            </a:endParaRPr>
           </a:p>
         </p:txBody>
       </p:sp>
@@ -37175,1190 +36514,8 @@
         </p:nvSpPr>
         <p:spPr>
           <a:xfrm>
-            <a:off x="5381625" y="4110335"/>
-            <a:ext cx="1428750" cy="76200"/>
-          </a:xfrm>
-          <a:prstGeom prst="rect">
-            <a:avLst/>
-          </a:prstGeom>
-          <a:solidFill>
-            <a:srgbClr val="38BDF8"/>
-          </a:solidFill>
-          <a:ln>
-            <a:noFill/>
-          </a:ln>
-        </p:spPr>
-        <p:txBody>
-          <a:bodyPr spcFirstLastPara="1" wrap="square" lIns="91425" tIns="45700" rIns="91425" bIns="45700" anchor="ctr" anchorCtr="0">
-            <a:noAutofit/>
-          </a:bodyPr>
-          <a:lstStyle/>
-          <a:p>
-            <a:pPr marL="0" marR="0" lvl="0" indent="0" algn="ctr" rtl="0">
-              <a:spcBef>
-                <a:spcPts val="0"/>
-              </a:spcBef>
-              <a:spcAft>
-                <a:spcPts val="0"/>
-              </a:spcAft>
-              <a:buNone/>
-            </a:pPr>
-            <a:endParaRPr sz="1800" b="0" i="0" u="none" strike="noStrike" cap="none">
-              <a:solidFill>
-                <a:schemeClr val="dk1"/>
-              </a:solidFill>
-              <a:latin typeface="Calibri"/>
-              <a:ea typeface="Calibri"/>
-              <a:cs typeface="Calibri"/>
-              <a:sym typeface="Calibri"/>
-            </a:endParaRPr>
-          </a:p>
-        </p:txBody>
-      </p:sp>
-    </p:spTree>
-  </p:cSld>
-  <p:clrMapOvr>
-    <a:masterClrMapping/>
-  </p:clrMapOvr>
-</p:sld>
-</file>
-
-<file path=ppt/slides/slide34.xml><?xml version="1.0" encoding="utf-8"?>
-<p:sld xmlns:a="http://schemas.openxmlformats.org/drawingml/2006/main" xmlns:r="http://schemas.openxmlformats.org/officeDocument/2006/relationships" xmlns:p="http://schemas.openxmlformats.org/presentationml/2006/main">
-  <p:cSld>
-    <p:bg>
-      <p:bgPr>
-        <a:solidFill>
-          <a:srgbClr val="1E293B"/>
-        </a:solidFill>
-        <a:effectLst/>
-      </p:bgPr>
-    </p:bg>
-    <p:spTree>
-      <p:nvGrpSpPr>
-        <p:cNvPr id="1" name="Shape 397"/>
-        <p:cNvGrpSpPr/>
-        <p:nvPr/>
-      </p:nvGrpSpPr>
-      <p:grpSpPr>
-        <a:xfrm>
-          <a:off x="0" y="0"/>
-          <a:ext cx="0" cy="0"/>
-          <a:chOff x="0" y="0"/>
-          <a:chExt cx="0" cy="0"/>
-        </a:xfrm>
-      </p:grpSpPr>
-      <p:pic>
-        <p:nvPicPr>
-          <p:cNvPr id="398" name="Google Shape;398;p30" descr="image.png"/>
-          <p:cNvPicPr preferRelativeResize="0"/>
-          <p:nvPr/>
-        </p:nvPicPr>
-        <p:blipFill rotWithShape="1">
-          <a:blip r:embed="rId1"/>
-          <a:srcRect/>
-          <a:stretch>
-            <a:fillRect/>
-          </a:stretch>
-        </p:blipFill>
-        <p:spPr>
-          <a:xfrm>
-            <a:off x="0" y="0"/>
-            <a:ext cx="12192000" cy="6858000"/>
-          </a:xfrm>
-          <a:prstGeom prst="rect">
-            <a:avLst/>
-          </a:prstGeom>
-          <a:noFill/>
-          <a:ln>
-            <a:noFill/>
-          </a:ln>
-        </p:spPr>
-      </p:pic>
-      <p:sp>
-        <p:nvSpPr>
-          <p:cNvPr id="399" name="Google Shape;399;p30"/>
-          <p:cNvSpPr/>
-          <p:nvPr/>
-        </p:nvSpPr>
-        <p:spPr>
-          <a:xfrm>
-            <a:off x="571500" y="2287637"/>
-            <a:ext cx="11049000" cy="982860"/>
-          </a:xfrm>
-          <a:prstGeom prst="rect">
-            <a:avLst/>
-          </a:prstGeom>
-          <a:noFill/>
-          <a:ln>
-            <a:noFill/>
-          </a:ln>
-        </p:spPr>
-        <p:txBody>
-          <a:bodyPr spcFirstLastPara="1" wrap="square" lIns="91425" tIns="45700" rIns="91425" bIns="45700" anchor="ctr" anchorCtr="0">
-            <a:noAutofit/>
-          </a:bodyPr>
-          <a:lstStyle/>
-          <a:p>
-            <a:pPr marL="0" marR="0" lvl="0" indent="0" algn="ctr" rtl="0">
-              <a:spcBef>
-                <a:spcPts val="0"/>
-              </a:spcBef>
-              <a:spcAft>
-                <a:spcPts val="0"/>
-              </a:spcAft>
-              <a:buNone/>
-            </a:pPr>
-            <a:endParaRPr sz="1800" b="0" i="0" u="none" strike="noStrike" cap="none">
-              <a:solidFill>
-                <a:schemeClr val="dk1"/>
-              </a:solidFill>
-              <a:latin typeface="Calibri"/>
-              <a:ea typeface="Calibri"/>
-              <a:cs typeface="Calibri"/>
-              <a:sym typeface="Calibri"/>
-            </a:endParaRPr>
-          </a:p>
-        </p:txBody>
-      </p:sp>
-      <p:sp>
-        <p:nvSpPr>
-          <p:cNvPr id="400" name="Google Shape;400;p30"/>
-          <p:cNvSpPr/>
-          <p:nvPr/>
-        </p:nvSpPr>
-        <p:spPr>
-          <a:xfrm>
-            <a:off x="571500" y="3270498"/>
-            <a:ext cx="11049000" cy="982860"/>
-          </a:xfrm>
-          <a:prstGeom prst="rect">
-            <a:avLst/>
-          </a:prstGeom>
-          <a:noFill/>
-          <a:ln>
-            <a:noFill/>
-          </a:ln>
-        </p:spPr>
-        <p:txBody>
-          <a:bodyPr spcFirstLastPara="1" wrap="square" lIns="91425" tIns="45700" rIns="91425" bIns="45700" anchor="ctr" anchorCtr="0">
-            <a:noAutofit/>
-          </a:bodyPr>
-          <a:lstStyle/>
-          <a:p>
-            <a:pPr marL="0" marR="0" lvl="0" indent="0" algn="ctr" rtl="0">
-              <a:spcBef>
-                <a:spcPts val="0"/>
-              </a:spcBef>
-              <a:spcAft>
-                <a:spcPts val="0"/>
-              </a:spcAft>
-              <a:buNone/>
-            </a:pPr>
-            <a:endParaRPr sz="1800" b="0" i="0" u="none" strike="noStrike" cap="none">
-              <a:solidFill>
-                <a:schemeClr val="dk1"/>
-              </a:solidFill>
-              <a:latin typeface="Calibri"/>
-              <a:ea typeface="Calibri"/>
-              <a:cs typeface="Calibri"/>
-              <a:sym typeface="Calibri"/>
-            </a:endParaRPr>
-          </a:p>
-        </p:txBody>
-      </p:sp>
-      <p:sp>
-        <p:nvSpPr>
-          <p:cNvPr id="401" name="Google Shape;401;p30"/>
-          <p:cNvSpPr/>
-          <p:nvPr/>
-        </p:nvSpPr>
-        <p:spPr>
-          <a:xfrm>
-            <a:off x="571500" y="4253358"/>
-            <a:ext cx="11049000" cy="784770"/>
-          </a:xfrm>
-          <a:prstGeom prst="rect">
-            <a:avLst/>
-          </a:prstGeom>
-          <a:noFill/>
-          <a:ln>
-            <a:noFill/>
-          </a:ln>
-        </p:spPr>
-        <p:txBody>
-          <a:bodyPr spcFirstLastPara="1" wrap="square" lIns="91425" tIns="45700" rIns="91425" bIns="45700" anchor="ctr" anchorCtr="0">
-            <a:noAutofit/>
-          </a:bodyPr>
-          <a:lstStyle/>
-          <a:p>
-            <a:pPr marL="0" marR="0" lvl="0" indent="0" algn="ctr" rtl="0">
-              <a:spcBef>
-                <a:spcPts val="0"/>
-              </a:spcBef>
-              <a:spcAft>
-                <a:spcPts val="0"/>
-              </a:spcAft>
-              <a:buNone/>
-            </a:pPr>
-            <a:endParaRPr sz="1800" b="0" i="0" u="none" strike="noStrike" cap="none">
-              <a:solidFill>
-                <a:schemeClr val="dk1"/>
-              </a:solidFill>
-              <a:latin typeface="Calibri"/>
-              <a:ea typeface="Calibri"/>
-              <a:cs typeface="Calibri"/>
-              <a:sym typeface="Calibri"/>
-            </a:endParaRPr>
-          </a:p>
-        </p:txBody>
-      </p:sp>
-      <p:sp>
-        <p:nvSpPr>
-          <p:cNvPr id="402" name="Google Shape;402;p30"/>
-          <p:cNvSpPr/>
-          <p:nvPr/>
-        </p:nvSpPr>
-        <p:spPr>
-          <a:xfrm>
-            <a:off x="571500" y="3260973"/>
-            <a:ext cx="11049000" cy="9525"/>
-          </a:xfrm>
-          <a:prstGeom prst="rect">
-            <a:avLst/>
-          </a:prstGeom>
-          <a:solidFill>
-            <a:srgbClr val="757575"/>
-          </a:solidFill>
-          <a:ln>
-            <a:noFill/>
-          </a:ln>
-        </p:spPr>
-        <p:txBody>
-          <a:bodyPr spcFirstLastPara="1" wrap="square" lIns="91425" tIns="45700" rIns="91425" bIns="45700" anchor="ctr" anchorCtr="0">
-            <a:noAutofit/>
-          </a:bodyPr>
-          <a:lstStyle/>
-          <a:p>
-            <a:pPr marL="0" marR="0" lvl="0" indent="0" algn="ctr" rtl="0">
-              <a:spcBef>
-                <a:spcPts val="0"/>
-              </a:spcBef>
-              <a:spcAft>
-                <a:spcPts val="0"/>
-              </a:spcAft>
-              <a:buNone/>
-            </a:pPr>
-            <a:endParaRPr sz="1800" b="0" i="0" u="none" strike="noStrike" cap="none">
-              <a:solidFill>
-                <a:schemeClr val="dk1"/>
-              </a:solidFill>
-              <a:latin typeface="Calibri"/>
-              <a:ea typeface="Calibri"/>
-              <a:cs typeface="Calibri"/>
-              <a:sym typeface="Calibri"/>
-            </a:endParaRPr>
-          </a:p>
-        </p:txBody>
-      </p:sp>
-      <p:sp>
-        <p:nvSpPr>
-          <p:cNvPr id="403" name="Google Shape;403;p30"/>
-          <p:cNvSpPr/>
-          <p:nvPr/>
-        </p:nvSpPr>
-        <p:spPr>
-          <a:xfrm>
-            <a:off x="571500" y="3260973"/>
-            <a:ext cx="11049000" cy="9525"/>
-          </a:xfrm>
-          <a:prstGeom prst="rect">
-            <a:avLst/>
-          </a:prstGeom>
-          <a:solidFill>
-            <a:srgbClr val="757575"/>
-          </a:solidFill>
-          <a:ln>
-            <a:noFill/>
-          </a:ln>
-        </p:spPr>
-        <p:txBody>
-          <a:bodyPr spcFirstLastPara="1" wrap="square" lIns="91425" tIns="45700" rIns="91425" bIns="45700" anchor="ctr" anchorCtr="0">
-            <a:noAutofit/>
-          </a:bodyPr>
-          <a:lstStyle/>
-          <a:p>
-            <a:pPr marL="0" marR="0" lvl="0" indent="0" algn="ctr" rtl="0">
-              <a:spcBef>
-                <a:spcPts val="0"/>
-              </a:spcBef>
-              <a:spcAft>
-                <a:spcPts val="0"/>
-              </a:spcAft>
-              <a:buNone/>
-            </a:pPr>
-            <a:endParaRPr sz="1800" b="0" i="0" u="none" strike="noStrike" cap="none">
-              <a:solidFill>
-                <a:schemeClr val="dk1"/>
-              </a:solidFill>
-              <a:latin typeface="Calibri"/>
-              <a:ea typeface="Calibri"/>
-              <a:cs typeface="Calibri"/>
-              <a:sym typeface="Calibri"/>
-            </a:endParaRPr>
-          </a:p>
-        </p:txBody>
-      </p:sp>
-      <p:sp>
-        <p:nvSpPr>
-          <p:cNvPr id="404" name="Google Shape;404;p30"/>
-          <p:cNvSpPr/>
-          <p:nvPr/>
-        </p:nvSpPr>
-        <p:spPr>
-          <a:xfrm>
-            <a:off x="571500" y="4243833"/>
-            <a:ext cx="11049000" cy="9525"/>
-          </a:xfrm>
-          <a:prstGeom prst="rect">
-            <a:avLst/>
-          </a:prstGeom>
-          <a:solidFill>
-            <a:srgbClr val="757575"/>
-          </a:solidFill>
-          <a:ln>
-            <a:noFill/>
-          </a:ln>
-        </p:spPr>
-        <p:txBody>
-          <a:bodyPr spcFirstLastPara="1" wrap="square" lIns="91425" tIns="45700" rIns="91425" bIns="45700" anchor="ctr" anchorCtr="0">
-            <a:noAutofit/>
-          </a:bodyPr>
-          <a:lstStyle/>
-          <a:p>
-            <a:pPr marL="0" marR="0" lvl="0" indent="0" algn="ctr" rtl="0">
-              <a:spcBef>
-                <a:spcPts val="0"/>
-              </a:spcBef>
-              <a:spcAft>
-                <a:spcPts val="0"/>
-              </a:spcAft>
-              <a:buNone/>
-            </a:pPr>
-            <a:endParaRPr sz="1800" b="0" i="0" u="none" strike="noStrike" cap="none">
-              <a:solidFill>
-                <a:schemeClr val="dk1"/>
-              </a:solidFill>
-              <a:latin typeface="Calibri"/>
-              <a:ea typeface="Calibri"/>
-              <a:cs typeface="Calibri"/>
-              <a:sym typeface="Calibri"/>
-            </a:endParaRPr>
-          </a:p>
-        </p:txBody>
-      </p:sp>
-      <p:sp>
-        <p:nvSpPr>
-          <p:cNvPr id="405" name="Google Shape;405;p30"/>
-          <p:cNvSpPr/>
-          <p:nvPr/>
-        </p:nvSpPr>
-        <p:spPr>
-          <a:xfrm>
-            <a:off x="571500" y="4243833"/>
-            <a:ext cx="11049000" cy="9525"/>
-          </a:xfrm>
-          <a:prstGeom prst="rect">
-            <a:avLst/>
-          </a:prstGeom>
-          <a:solidFill>
-            <a:srgbClr val="757575"/>
-          </a:solidFill>
-          <a:ln>
-            <a:noFill/>
-          </a:ln>
-        </p:spPr>
-        <p:txBody>
-          <a:bodyPr spcFirstLastPara="1" wrap="square" lIns="91425" tIns="45700" rIns="91425" bIns="45700" anchor="ctr" anchorCtr="0">
-            <a:noAutofit/>
-          </a:bodyPr>
-          <a:lstStyle/>
-          <a:p>
-            <a:pPr marL="0" marR="0" lvl="0" indent="0" algn="ctr" rtl="0">
-              <a:spcBef>
-                <a:spcPts val="0"/>
-              </a:spcBef>
-              <a:spcAft>
-                <a:spcPts val="0"/>
-              </a:spcAft>
-              <a:buNone/>
-            </a:pPr>
-            <a:endParaRPr sz="1800" b="0" i="0" u="none" strike="noStrike" cap="none">
-              <a:solidFill>
-                <a:schemeClr val="dk1"/>
-              </a:solidFill>
-              <a:latin typeface="Calibri"/>
-              <a:ea typeface="Calibri"/>
-              <a:cs typeface="Calibri"/>
-              <a:sym typeface="Calibri"/>
-            </a:endParaRPr>
-          </a:p>
-        </p:txBody>
-      </p:sp>
-      <p:sp>
-        <p:nvSpPr>
-          <p:cNvPr id="406" name="Google Shape;406;p30"/>
-          <p:cNvSpPr/>
-          <p:nvPr/>
-        </p:nvSpPr>
-        <p:spPr>
-          <a:xfrm>
-            <a:off x="571500" y="5028604"/>
-            <a:ext cx="11049000" cy="9525"/>
-          </a:xfrm>
-          <a:prstGeom prst="rect">
-            <a:avLst/>
-          </a:prstGeom>
-          <a:solidFill>
-            <a:srgbClr val="757575"/>
-          </a:solidFill>
-          <a:ln>
-            <a:noFill/>
-          </a:ln>
-        </p:spPr>
-        <p:txBody>
-          <a:bodyPr spcFirstLastPara="1" wrap="square" lIns="91425" tIns="45700" rIns="91425" bIns="45700" anchor="ctr" anchorCtr="0">
-            <a:noAutofit/>
-          </a:bodyPr>
-          <a:lstStyle/>
-          <a:p>
-            <a:pPr marL="0" marR="0" lvl="0" indent="0" algn="ctr" rtl="0">
-              <a:spcBef>
-                <a:spcPts val="0"/>
-              </a:spcBef>
-              <a:spcAft>
-                <a:spcPts val="0"/>
-              </a:spcAft>
-              <a:buNone/>
-            </a:pPr>
-            <a:endParaRPr sz="1800" b="0" i="0" u="none" strike="noStrike" cap="none">
-              <a:solidFill>
-                <a:schemeClr val="dk1"/>
-              </a:solidFill>
-              <a:latin typeface="Calibri"/>
-              <a:ea typeface="Calibri"/>
-              <a:cs typeface="Calibri"/>
-              <a:sym typeface="Calibri"/>
-            </a:endParaRPr>
-          </a:p>
-        </p:txBody>
-      </p:sp>
-      <p:sp>
-        <p:nvSpPr>
-          <p:cNvPr id="407" name="Google Shape;407;p30"/>
-          <p:cNvSpPr/>
-          <p:nvPr/>
-        </p:nvSpPr>
-        <p:spPr>
-          <a:xfrm>
-            <a:off x="571500" y="5028604"/>
-            <a:ext cx="11049000" cy="9525"/>
-          </a:xfrm>
-          <a:prstGeom prst="rect">
-            <a:avLst/>
-          </a:prstGeom>
-          <a:solidFill>
-            <a:srgbClr val="757575"/>
-          </a:solidFill>
-          <a:ln>
-            <a:noFill/>
-          </a:ln>
-        </p:spPr>
-        <p:txBody>
-          <a:bodyPr spcFirstLastPara="1" wrap="square" lIns="91425" tIns="45700" rIns="91425" bIns="45700" anchor="ctr" anchorCtr="0">
-            <a:noAutofit/>
-          </a:bodyPr>
-          <a:lstStyle/>
-          <a:p>
-            <a:pPr marL="0" marR="0" lvl="0" indent="0" algn="ctr" rtl="0">
-              <a:spcBef>
-                <a:spcPts val="0"/>
-              </a:spcBef>
-              <a:spcAft>
-                <a:spcPts val="0"/>
-              </a:spcAft>
-              <a:buNone/>
-            </a:pPr>
-            <a:endParaRPr sz="1800" b="0" i="0" u="none" strike="noStrike" cap="none">
-              <a:solidFill>
-                <a:schemeClr val="dk1"/>
-              </a:solidFill>
-              <a:latin typeface="Calibri"/>
-              <a:ea typeface="Calibri"/>
-              <a:cs typeface="Calibri"/>
-              <a:sym typeface="Calibri"/>
-            </a:endParaRPr>
-          </a:p>
-        </p:txBody>
-      </p:sp>
-      <p:pic>
-        <p:nvPicPr>
-          <p:cNvPr id="408" name="Google Shape;408;p30" descr="image.png"/>
-          <p:cNvPicPr preferRelativeResize="0"/>
-          <p:nvPr/>
-        </p:nvPicPr>
-        <p:blipFill rotWithShape="1">
-          <a:blip r:embed="rId2"/>
-          <a:srcRect/>
-          <a:stretch>
-            <a:fillRect/>
-          </a:stretch>
-        </p:blipFill>
-        <p:spPr>
-          <a:xfrm>
-            <a:off x="571500" y="2536180"/>
-            <a:ext cx="857250" cy="476250"/>
-          </a:xfrm>
-          <a:prstGeom prst="rect">
-            <a:avLst/>
-          </a:prstGeom>
-          <a:noFill/>
-          <a:ln>
-            <a:noFill/>
-          </a:ln>
-        </p:spPr>
-      </p:pic>
-      <p:sp>
-        <p:nvSpPr>
-          <p:cNvPr id="409" name="Google Shape;409;p30"/>
-          <p:cNvSpPr txBox="1"/>
-          <p:nvPr/>
-        </p:nvSpPr>
-        <p:spPr>
-          <a:xfrm>
-            <a:off x="1666875" y="2430512"/>
-            <a:ext cx="9953625" cy="396180"/>
-          </a:xfrm>
-          <a:prstGeom prst="rect">
-            <a:avLst/>
-          </a:prstGeom>
-          <a:noFill/>
-          <a:ln>
-            <a:noFill/>
-          </a:ln>
-        </p:spPr>
-        <p:txBody>
-          <a:bodyPr spcFirstLastPara="1" wrap="square" lIns="0" tIns="0" rIns="0" bIns="0" anchor="t" anchorCtr="0">
-            <a:spAutoFit/>
-          </a:bodyPr>
-          <a:lstStyle/>
-          <a:p>
-            <a:pPr marL="0" marR="0" lvl="0" indent="0" algn="l" rtl="0">
-              <a:lnSpc>
-                <a:spcPct val="160000"/>
-              </a:lnSpc>
-              <a:spcBef>
-                <a:spcPts val="0"/>
-              </a:spcBef>
-              <a:spcAft>
-                <a:spcPts val="0"/>
-              </a:spcAft>
-              <a:buNone/>
-            </a:pPr>
-            <a:r>
-              <a:rPr lang="en-US" sz="975" b="0" i="0" u="none" strike="noStrike" cap="none">
-                <a:solidFill>
-                  <a:srgbClr val="CBD5E1"/>
-                </a:solidFill>
-                <a:latin typeface="Inter" panose="02000503000000020004"/>
-                <a:ea typeface="Inter" panose="02000503000000020004"/>
-                <a:cs typeface="Inter" panose="02000503000000020004"/>
-                <a:sym typeface="Inter" panose="02000503000000020004"/>
-              </a:rPr>
-              <a:t>https://static.vecteezy.com/system/resources/previews/000/543/895/non_2x/vector-blue-technology-circle-and-computer-science-abstract-background-with-blue-and-white-line-dot-business-and-connection-concept-futuristic-and-industry-4-0-concept-internet-cyber-and-network-theme.jpg</a:t>
-            </a:r>
-            <a:endParaRPr lang="en-US" sz="975" b="0" i="0" u="none" strike="noStrike" cap="none">
-              <a:solidFill>
-                <a:srgbClr val="CBD5E1"/>
-              </a:solidFill>
-              <a:latin typeface="Inter" panose="02000503000000020004"/>
-              <a:ea typeface="Inter" panose="02000503000000020004"/>
-              <a:cs typeface="Inter" panose="02000503000000020004"/>
-              <a:sym typeface="Inter" panose="02000503000000020004"/>
-            </a:endParaRPr>
-          </a:p>
-        </p:txBody>
-      </p:sp>
-      <p:sp>
-        <p:nvSpPr>
-          <p:cNvPr id="410" name="Google Shape;410;p30"/>
-          <p:cNvSpPr txBox="1"/>
-          <p:nvPr/>
-        </p:nvSpPr>
-        <p:spPr>
-          <a:xfrm>
-            <a:off x="1666875" y="2874317"/>
-            <a:ext cx="9953625" cy="243780"/>
-          </a:xfrm>
-          <a:prstGeom prst="rect">
-            <a:avLst/>
-          </a:prstGeom>
-          <a:noFill/>
-          <a:ln>
-            <a:noFill/>
-          </a:ln>
-        </p:spPr>
-        <p:txBody>
-          <a:bodyPr spcFirstLastPara="1" wrap="square" lIns="0" tIns="0" rIns="0" bIns="0" anchor="t" anchorCtr="0">
-            <a:spAutoFit/>
-          </a:bodyPr>
-          <a:lstStyle/>
-          <a:p>
-            <a:pPr marL="0" marR="0" lvl="0" indent="0" algn="l" rtl="0">
-              <a:lnSpc>
-                <a:spcPct val="160000"/>
-              </a:lnSpc>
-              <a:spcBef>
-                <a:spcPts val="0"/>
-              </a:spcBef>
-              <a:spcAft>
-                <a:spcPts val="0"/>
-              </a:spcAft>
-              <a:buNone/>
-            </a:pPr>
-            <a:r>
-              <a:rPr lang="en-US" sz="1200" b="0" i="0" u="none" strike="noStrike" cap="none">
-                <a:solidFill>
-                  <a:srgbClr val="CBD5E1"/>
-                </a:solidFill>
-                <a:latin typeface="Inter" panose="02000503000000020004"/>
-                <a:ea typeface="Inter" panose="02000503000000020004"/>
-                <a:cs typeface="Inter" panose="02000503000000020004"/>
-                <a:sym typeface="Inter" panose="02000503000000020004"/>
-              </a:rPr>
-              <a:t>Source: </a:t>
-            </a:r>
-            <a:r>
-              <a:rPr lang="en-US" sz="1200" b="0" i="0" u="none" strike="noStrike" cap="none">
-                <a:solidFill>
-                  <a:srgbClr val="4F46E5"/>
-                </a:solidFill>
-                <a:latin typeface="Inter" panose="02000503000000020004"/>
-                <a:ea typeface="Inter" panose="02000503000000020004"/>
-                <a:cs typeface="Inter" panose="02000503000000020004"/>
-                <a:sym typeface="Inter" panose="02000503000000020004"/>
-              </a:rPr>
-              <a:t>www.vecteezy.com</a:t>
-            </a:r>
-            <a:endParaRPr lang="en-US" sz="1200" b="0" i="0" u="none" strike="noStrike" cap="none">
-              <a:solidFill>
-                <a:srgbClr val="4F46E5"/>
-              </a:solidFill>
-              <a:latin typeface="Inter" panose="02000503000000020004"/>
-              <a:ea typeface="Inter" panose="02000503000000020004"/>
-              <a:cs typeface="Inter" panose="02000503000000020004"/>
-              <a:sym typeface="Inter" panose="02000503000000020004"/>
-            </a:endParaRPr>
-          </a:p>
-        </p:txBody>
-      </p:sp>
-      <p:pic>
-        <p:nvPicPr>
-          <p:cNvPr id="411" name="Google Shape;411;p30" descr="image.png"/>
-          <p:cNvPicPr preferRelativeResize="0"/>
-          <p:nvPr/>
-        </p:nvPicPr>
-        <p:blipFill rotWithShape="1">
-          <a:blip r:embed="rId3"/>
-          <a:srcRect/>
-          <a:stretch>
-            <a:fillRect/>
-          </a:stretch>
-        </p:blipFill>
-        <p:spPr>
-          <a:xfrm>
-            <a:off x="571500" y="3519041"/>
-            <a:ext cx="857250" cy="476250"/>
-          </a:xfrm>
-          <a:prstGeom prst="rect">
-            <a:avLst/>
-          </a:prstGeom>
-          <a:noFill/>
-          <a:ln>
-            <a:noFill/>
-          </a:ln>
-        </p:spPr>
-      </p:pic>
-      <p:sp>
-        <p:nvSpPr>
-          <p:cNvPr id="412" name="Google Shape;412;p30"/>
-          <p:cNvSpPr txBox="1"/>
-          <p:nvPr/>
-        </p:nvSpPr>
-        <p:spPr>
-          <a:xfrm>
-            <a:off x="1666875" y="3413373"/>
-            <a:ext cx="9953625" cy="396180"/>
-          </a:xfrm>
-          <a:prstGeom prst="rect">
-            <a:avLst/>
-          </a:prstGeom>
-          <a:noFill/>
-          <a:ln>
-            <a:noFill/>
-          </a:ln>
-        </p:spPr>
-        <p:txBody>
-          <a:bodyPr spcFirstLastPara="1" wrap="square" lIns="0" tIns="0" rIns="0" bIns="0" anchor="t" anchorCtr="0">
-            <a:spAutoFit/>
-          </a:bodyPr>
-          <a:lstStyle/>
-          <a:p>
-            <a:pPr marL="0" marR="0" lvl="0" indent="0" algn="l" rtl="0">
-              <a:lnSpc>
-                <a:spcPct val="160000"/>
-              </a:lnSpc>
-              <a:spcBef>
-                <a:spcPts val="0"/>
-              </a:spcBef>
-              <a:spcAft>
-                <a:spcPts val="0"/>
-              </a:spcAft>
-              <a:buNone/>
-            </a:pPr>
-            <a:r>
-              <a:rPr lang="en-US" sz="975" b="0" i="0" u="none" strike="noStrike" cap="none">
-                <a:solidFill>
-                  <a:srgbClr val="CBD5E1"/>
-                </a:solidFill>
-                <a:latin typeface="Inter" panose="02000503000000020004"/>
-                <a:ea typeface="Inter" panose="02000503000000020004"/>
-                <a:cs typeface="Inter" panose="02000503000000020004"/>
-                <a:sym typeface="Inter" panose="02000503000000020004"/>
-              </a:rPr>
-              <a:t>https://media2.dev.to/dynamic/image/width=1600,height=900,fit=cover,gravity=auto,format=auto/https%3A%2F%2Fdev-to-uploads.s3.amazonaws.com%2Fuploads%2Farticles%2Fwfowzrp8y8lzuxiacft4.png</a:t>
-            </a:r>
-            <a:endParaRPr lang="en-US" sz="975" b="0" i="0" u="none" strike="noStrike" cap="none">
-              <a:solidFill>
-                <a:srgbClr val="CBD5E1"/>
-              </a:solidFill>
-              <a:latin typeface="Inter" panose="02000503000000020004"/>
-              <a:ea typeface="Inter" panose="02000503000000020004"/>
-              <a:cs typeface="Inter" panose="02000503000000020004"/>
-              <a:sym typeface="Inter" panose="02000503000000020004"/>
-            </a:endParaRPr>
-          </a:p>
-        </p:txBody>
-      </p:sp>
-      <p:sp>
-        <p:nvSpPr>
-          <p:cNvPr id="413" name="Google Shape;413;p30"/>
-          <p:cNvSpPr txBox="1"/>
-          <p:nvPr/>
-        </p:nvSpPr>
-        <p:spPr>
-          <a:xfrm>
-            <a:off x="1666875" y="3857178"/>
-            <a:ext cx="9953625" cy="243780"/>
-          </a:xfrm>
-          <a:prstGeom prst="rect">
-            <a:avLst/>
-          </a:prstGeom>
-          <a:noFill/>
-          <a:ln>
-            <a:noFill/>
-          </a:ln>
-        </p:spPr>
-        <p:txBody>
-          <a:bodyPr spcFirstLastPara="1" wrap="square" lIns="0" tIns="0" rIns="0" bIns="0" anchor="t" anchorCtr="0">
-            <a:spAutoFit/>
-          </a:bodyPr>
-          <a:lstStyle/>
-          <a:p>
-            <a:pPr marL="0" marR="0" lvl="0" indent="0" algn="l" rtl="0">
-              <a:lnSpc>
-                <a:spcPct val="160000"/>
-              </a:lnSpc>
-              <a:spcBef>
-                <a:spcPts val="0"/>
-              </a:spcBef>
-              <a:spcAft>
-                <a:spcPts val="0"/>
-              </a:spcAft>
-              <a:buNone/>
-            </a:pPr>
-            <a:r>
-              <a:rPr lang="en-US" sz="1200" b="0" i="0" u="none" strike="noStrike" cap="none">
-                <a:solidFill>
-                  <a:srgbClr val="CBD5E1"/>
-                </a:solidFill>
-                <a:latin typeface="Inter" panose="02000503000000020004"/>
-                <a:ea typeface="Inter" panose="02000503000000020004"/>
-                <a:cs typeface="Inter" panose="02000503000000020004"/>
-                <a:sym typeface="Inter" panose="02000503000000020004"/>
-              </a:rPr>
-              <a:t>Source: </a:t>
-            </a:r>
-            <a:r>
-              <a:rPr lang="en-US" sz="1200" b="0" i="0" u="none" strike="noStrike" cap="none">
-                <a:solidFill>
-                  <a:srgbClr val="4F46E5"/>
-                </a:solidFill>
-                <a:latin typeface="Inter" panose="02000503000000020004"/>
-                <a:ea typeface="Inter" panose="02000503000000020004"/>
-                <a:cs typeface="Inter" panose="02000503000000020004"/>
-                <a:sym typeface="Inter" panose="02000503000000020004"/>
-              </a:rPr>
-              <a:t>dev.to</a:t>
-            </a:r>
-            <a:endParaRPr lang="en-US" sz="1200" b="0" i="0" u="none" strike="noStrike" cap="none">
-              <a:solidFill>
-                <a:srgbClr val="4F46E5"/>
-              </a:solidFill>
-              <a:latin typeface="Inter" panose="02000503000000020004"/>
-              <a:ea typeface="Inter" panose="02000503000000020004"/>
-              <a:cs typeface="Inter" panose="02000503000000020004"/>
-              <a:sym typeface="Inter" panose="02000503000000020004"/>
-            </a:endParaRPr>
-          </a:p>
-        </p:txBody>
-      </p:sp>
-      <p:sp>
-        <p:nvSpPr>
-          <p:cNvPr id="415" name="Google Shape;415;p30"/>
-          <p:cNvSpPr txBox="1"/>
-          <p:nvPr/>
-        </p:nvSpPr>
-        <p:spPr>
-          <a:xfrm>
-            <a:off x="1666875" y="4396233"/>
-            <a:ext cx="9953625" cy="198090"/>
-          </a:xfrm>
-          <a:prstGeom prst="rect">
-            <a:avLst/>
-          </a:prstGeom>
-          <a:noFill/>
-          <a:ln>
-            <a:noFill/>
-          </a:ln>
-        </p:spPr>
-        <p:txBody>
-          <a:bodyPr spcFirstLastPara="1" wrap="square" lIns="0" tIns="0" rIns="0" bIns="0" anchor="t" anchorCtr="0">
-            <a:spAutoFit/>
-          </a:bodyPr>
-          <a:lstStyle/>
-          <a:p>
-            <a:pPr marL="0" marR="0" lvl="0" indent="0" algn="l" rtl="0">
-              <a:lnSpc>
-                <a:spcPct val="160000"/>
-              </a:lnSpc>
-              <a:spcBef>
-                <a:spcPts val="0"/>
-              </a:spcBef>
-              <a:spcAft>
-                <a:spcPts val="0"/>
-              </a:spcAft>
-              <a:buNone/>
-            </a:pPr>
-            <a:r>
-              <a:rPr lang="en-US" sz="975" b="0" i="0" u="none" strike="noStrike" cap="none">
-                <a:solidFill>
-                  <a:srgbClr val="CBD5E1"/>
-                </a:solidFill>
-                <a:latin typeface="Inter" panose="02000503000000020004"/>
-                <a:ea typeface="Inter" panose="02000503000000020004"/>
-                <a:cs typeface="Inter" panose="02000503000000020004"/>
-                <a:sym typeface="Inter" panose="02000503000000020004"/>
-              </a:rPr>
-              <a:t>https://www.supermicro.com/sites/default/files/content_resources/static_resources/glossary/glossary_data-center-architecture-diagram.png</a:t>
-            </a:r>
-            <a:endParaRPr lang="en-US" sz="975" b="0" i="0" u="none" strike="noStrike" cap="none">
-              <a:solidFill>
-                <a:srgbClr val="CBD5E1"/>
-              </a:solidFill>
-              <a:latin typeface="Inter" panose="02000503000000020004"/>
-              <a:ea typeface="Inter" panose="02000503000000020004"/>
-              <a:cs typeface="Inter" panose="02000503000000020004"/>
-              <a:sym typeface="Inter" panose="02000503000000020004"/>
-            </a:endParaRPr>
-          </a:p>
-        </p:txBody>
-      </p:sp>
-      <p:sp>
-        <p:nvSpPr>
-          <p:cNvPr id="416" name="Google Shape;416;p30"/>
-          <p:cNvSpPr txBox="1"/>
-          <p:nvPr/>
-        </p:nvSpPr>
-        <p:spPr>
-          <a:xfrm>
-            <a:off x="1666875" y="4641949"/>
-            <a:ext cx="9953625" cy="243780"/>
-          </a:xfrm>
-          <a:prstGeom prst="rect">
-            <a:avLst/>
-          </a:prstGeom>
-          <a:noFill/>
-          <a:ln>
-            <a:noFill/>
-          </a:ln>
-        </p:spPr>
-        <p:txBody>
-          <a:bodyPr spcFirstLastPara="1" wrap="square" lIns="0" tIns="0" rIns="0" bIns="0" anchor="t" anchorCtr="0">
-            <a:spAutoFit/>
-          </a:bodyPr>
-          <a:lstStyle/>
-          <a:p>
-            <a:pPr marL="0" marR="0" lvl="0" indent="0" algn="l" rtl="0">
-              <a:lnSpc>
-                <a:spcPct val="160000"/>
-              </a:lnSpc>
-              <a:spcBef>
-                <a:spcPts val="0"/>
-              </a:spcBef>
-              <a:spcAft>
-                <a:spcPts val="0"/>
-              </a:spcAft>
-              <a:buNone/>
-            </a:pPr>
-            <a:r>
-              <a:rPr lang="en-US" sz="1200" b="0" i="0" u="none" strike="noStrike" cap="none">
-                <a:solidFill>
-                  <a:srgbClr val="CBD5E1"/>
-                </a:solidFill>
-                <a:latin typeface="Inter" panose="02000503000000020004"/>
-                <a:ea typeface="Inter" panose="02000503000000020004"/>
-                <a:cs typeface="Inter" panose="02000503000000020004"/>
-                <a:sym typeface="Inter" panose="02000503000000020004"/>
-              </a:rPr>
-              <a:t>Source: </a:t>
-            </a:r>
-            <a:r>
-              <a:rPr lang="en-US" sz="1200" b="0" i="0" u="none" strike="noStrike" cap="none">
-                <a:solidFill>
-                  <a:srgbClr val="4F46E5"/>
-                </a:solidFill>
-                <a:latin typeface="Inter" panose="02000503000000020004"/>
-                <a:ea typeface="Inter" panose="02000503000000020004"/>
-                <a:cs typeface="Inter" panose="02000503000000020004"/>
-                <a:sym typeface="Inter" panose="02000503000000020004"/>
-              </a:rPr>
-              <a:t>www.supermicro.com</a:t>
-            </a:r>
-            <a:endParaRPr lang="en-US" sz="1200" b="0" i="0" u="none" strike="noStrike" cap="none">
-              <a:solidFill>
-                <a:srgbClr val="4F46E5"/>
-              </a:solidFill>
-              <a:latin typeface="Inter" panose="02000503000000020004"/>
-              <a:ea typeface="Inter" panose="02000503000000020004"/>
-              <a:cs typeface="Inter" panose="02000503000000020004"/>
-              <a:sym typeface="Inter" panose="02000503000000020004"/>
-            </a:endParaRPr>
-          </a:p>
-        </p:txBody>
-      </p:sp>
-      <p:sp>
-        <p:nvSpPr>
-          <p:cNvPr id="418" name="Google Shape;418;p30"/>
-          <p:cNvSpPr txBox="1"/>
-          <p:nvPr/>
-        </p:nvSpPr>
-        <p:spPr>
-          <a:xfrm>
-            <a:off x="1666875" y="5181004"/>
-            <a:ext cx="9953625" cy="198090"/>
-          </a:xfrm>
-          <a:prstGeom prst="rect">
-            <a:avLst/>
-          </a:prstGeom>
-          <a:noFill/>
-          <a:ln>
-            <a:noFill/>
-          </a:ln>
-        </p:spPr>
-        <p:txBody>
-          <a:bodyPr spcFirstLastPara="1" wrap="square" lIns="0" tIns="0" rIns="0" bIns="0" anchor="t" anchorCtr="0">
-            <a:spAutoFit/>
-          </a:bodyPr>
-          <a:lstStyle/>
-          <a:p>
-            <a:pPr marL="0" marR="0" lvl="0" indent="0" algn="l" rtl="0">
-              <a:lnSpc>
-                <a:spcPct val="160000"/>
-              </a:lnSpc>
-              <a:spcBef>
-                <a:spcPts val="0"/>
-              </a:spcBef>
-              <a:spcAft>
-                <a:spcPts val="0"/>
-              </a:spcAft>
-              <a:buNone/>
-            </a:pPr>
-            <a:r>
-              <a:rPr lang="en-US" sz="975" b="0" i="0" u="none" strike="noStrike" cap="none">
-                <a:solidFill>
-                  <a:srgbClr val="CBD5E1"/>
-                </a:solidFill>
-                <a:latin typeface="Inter" panose="02000503000000020004"/>
-                <a:ea typeface="Inter" panose="02000503000000020004"/>
-                <a:cs typeface="Inter" panose="02000503000000020004"/>
-                <a:sym typeface="Inter" panose="02000503000000020004"/>
-              </a:rPr>
-              <a:t>https://images.stockcake.com/public/0/f/a/0fa4ee75-c692-4435-aeb3-06305b82ad32_large/cosmic-ai-connections-stockcake.jpg</a:t>
-            </a:r>
-            <a:endParaRPr lang="en-US" sz="975" b="0" i="0" u="none" strike="noStrike" cap="none">
-              <a:solidFill>
-                <a:srgbClr val="CBD5E1"/>
-              </a:solidFill>
-              <a:latin typeface="Inter" panose="02000503000000020004"/>
-              <a:ea typeface="Inter" panose="02000503000000020004"/>
-              <a:cs typeface="Inter" panose="02000503000000020004"/>
-              <a:sym typeface="Inter" panose="02000503000000020004"/>
-            </a:endParaRPr>
-          </a:p>
-        </p:txBody>
-      </p:sp>
-      <p:sp>
-        <p:nvSpPr>
-          <p:cNvPr id="419" name="Google Shape;419;p30"/>
-          <p:cNvSpPr txBox="1"/>
-          <p:nvPr/>
-        </p:nvSpPr>
-        <p:spPr>
-          <a:xfrm>
-            <a:off x="1666875" y="5426719"/>
-            <a:ext cx="9953625" cy="243780"/>
-          </a:xfrm>
-          <a:prstGeom prst="rect">
-            <a:avLst/>
-          </a:prstGeom>
-          <a:noFill/>
-          <a:ln>
-            <a:noFill/>
-          </a:ln>
-        </p:spPr>
-        <p:txBody>
-          <a:bodyPr spcFirstLastPara="1" wrap="square" lIns="0" tIns="0" rIns="0" bIns="0" anchor="t" anchorCtr="0">
-            <a:spAutoFit/>
-          </a:bodyPr>
-          <a:lstStyle/>
-          <a:p>
-            <a:pPr marL="0" marR="0" lvl="0" indent="0" algn="l" rtl="0">
-              <a:lnSpc>
-                <a:spcPct val="160000"/>
-              </a:lnSpc>
-              <a:spcBef>
-                <a:spcPts val="0"/>
-              </a:spcBef>
-              <a:spcAft>
-                <a:spcPts val="0"/>
-              </a:spcAft>
-              <a:buNone/>
-            </a:pPr>
-            <a:r>
-              <a:rPr lang="en-US" sz="1200" b="0" i="0" u="none" strike="noStrike" cap="none">
-                <a:solidFill>
-                  <a:srgbClr val="CBD5E1"/>
-                </a:solidFill>
-                <a:latin typeface="Inter" panose="02000503000000020004"/>
-                <a:ea typeface="Inter" panose="02000503000000020004"/>
-                <a:cs typeface="Inter" panose="02000503000000020004"/>
-                <a:sym typeface="Inter" panose="02000503000000020004"/>
-              </a:rPr>
-              <a:t>Source: </a:t>
-            </a:r>
-            <a:r>
-              <a:rPr lang="en-US" sz="1200" b="0" i="0" u="none" strike="noStrike" cap="none">
-                <a:solidFill>
-                  <a:srgbClr val="4F46E5"/>
-                </a:solidFill>
-                <a:latin typeface="Inter" panose="02000503000000020004"/>
-                <a:ea typeface="Inter" panose="02000503000000020004"/>
-                <a:cs typeface="Inter" panose="02000503000000020004"/>
-                <a:sym typeface="Inter" panose="02000503000000020004"/>
-              </a:rPr>
-              <a:t>stockcake.com</a:t>
-            </a:r>
-            <a:endParaRPr lang="en-US" sz="1200" b="0" i="0" u="none" strike="noStrike" cap="none">
-              <a:solidFill>
-                <a:srgbClr val="4F46E5"/>
-              </a:solidFill>
-              <a:latin typeface="Inter" panose="02000503000000020004"/>
-              <a:ea typeface="Inter" panose="02000503000000020004"/>
-              <a:cs typeface="Inter" panose="02000503000000020004"/>
-              <a:sym typeface="Inter" panose="02000503000000020004"/>
-            </a:endParaRPr>
-          </a:p>
-        </p:txBody>
-      </p:sp>
-      <p:sp>
-        <p:nvSpPr>
-          <p:cNvPr id="420" name="Google Shape;420;p30"/>
-          <p:cNvSpPr txBox="1"/>
-          <p:nvPr/>
-        </p:nvSpPr>
-        <p:spPr>
-          <a:xfrm>
-            <a:off x="800100" y="919311"/>
-            <a:ext cx="11361420" cy="514350"/>
-          </a:xfrm>
-          <a:prstGeom prst="rect">
-            <a:avLst/>
-          </a:prstGeom>
-          <a:noFill/>
-          <a:ln>
-            <a:noFill/>
-          </a:ln>
-        </p:spPr>
-        <p:txBody>
-          <a:bodyPr spcFirstLastPara="1" wrap="square" lIns="0" tIns="0" rIns="0" bIns="0" anchor="t" anchorCtr="0">
-            <a:spAutoFit/>
-          </a:bodyPr>
-          <a:lstStyle/>
-          <a:p>
-            <a:pPr marL="0" marR="0" lvl="0" indent="0" algn="l" rtl="0">
-              <a:spcBef>
-                <a:spcPts val="0"/>
-              </a:spcBef>
-              <a:spcAft>
-                <a:spcPts val="0"/>
-              </a:spcAft>
-              <a:buNone/>
-            </a:pPr>
-            <a:r>
-              <a:rPr lang="en-US" sz="3300" b="1" i="0" u="none" strike="noStrike" cap="none">
-                <a:solidFill>
-                  <a:srgbClr val="38BDF8"/>
-                </a:solidFill>
-                <a:latin typeface="Inter" panose="02000503000000020004"/>
-                <a:ea typeface="Inter" panose="02000503000000020004"/>
-                <a:cs typeface="Inter" panose="02000503000000020004"/>
-                <a:sym typeface="Inter" panose="02000503000000020004"/>
-              </a:rPr>
-              <a:t>IMAGE SOURCES</a:t>
-            </a:r>
-            <a:endParaRPr lang="en-US" sz="3300" b="1" i="0" u="none" strike="noStrike" cap="none">
-              <a:solidFill>
-                <a:srgbClr val="38BDF8"/>
-              </a:solidFill>
-              <a:latin typeface="Inter" panose="02000503000000020004"/>
-              <a:ea typeface="Inter" panose="02000503000000020004"/>
-              <a:cs typeface="Inter" panose="02000503000000020004"/>
-              <a:sym typeface="Inter" panose="02000503000000020004"/>
-            </a:endParaRPr>
-          </a:p>
-        </p:txBody>
-      </p:sp>
-      <p:sp>
-        <p:nvSpPr>
-          <p:cNvPr id="421" name="Google Shape;421;p30"/>
-          <p:cNvSpPr/>
-          <p:nvPr/>
-        </p:nvSpPr>
-        <p:spPr>
-          <a:xfrm>
-            <a:off x="571500" y="919311"/>
-            <a:ext cx="76200" cy="514350"/>
+            <a:off x="3374571" y="3777341"/>
+            <a:ext cx="5562600" cy="65316"/>
           </a:xfrm>
           <a:prstGeom prst="rect">
             <a:avLst/>
@@ -38437,60 +36594,6 @@
           <p:nvPr/>
         </p:nvPicPr>
         <p:blipFill rotWithShape="1">
-          <a:blip r:embed="rId1"/>
-          <a:srcRect/>
-          <a:stretch>
-            <a:fillRect/>
-          </a:stretch>
-        </p:blipFill>
-        <p:spPr>
-          <a:xfrm>
-            <a:off x="0" y="0"/>
-            <a:ext cx="12192000" cy="6858000"/>
-          </a:xfrm>
-          <a:prstGeom prst="rect">
-            <a:avLst/>
-          </a:prstGeom>
-          <a:noFill/>
-          <a:ln>
-            <a:noFill/>
-          </a:ln>
-        </p:spPr>
-      </p:pic>
-      <p:pic>
-        <p:nvPicPr>
-          <p:cNvPr id="129" name="Google Shape;129;p16" descr="image.png"/>
-          <p:cNvPicPr preferRelativeResize="0"/>
-          <p:nvPr/>
-        </p:nvPicPr>
-        <p:blipFill rotWithShape="1">
-          <a:blip r:embed="rId2"/>
-          <a:srcRect/>
-          <a:stretch>
-            <a:fillRect/>
-          </a:stretch>
-        </p:blipFill>
-        <p:spPr>
-          <a:xfrm>
-            <a:off x="571500" y="1814661"/>
-            <a:ext cx="5334000" cy="4727971"/>
-          </a:xfrm>
-          <a:prstGeom prst="rect">
-            <a:avLst/>
-          </a:prstGeom>
-          <a:noFill/>
-          <a:ln>
-            <a:noFill/>
-          </a:ln>
-        </p:spPr>
-      </p:pic>
-      <p:pic>
-        <p:nvPicPr>
-          <p:cNvPr id="130" name="Google Shape;130;p16" descr="image.png"/>
-          <p:cNvPicPr preferRelativeResize="0"/>
-          <p:nvPr/>
-        </p:nvPicPr>
-        <p:blipFill rotWithShape="1">
           <a:blip r:embed="rId3"/>
           <a:srcRect/>
           <a:stretch>
@@ -38499,6 +36602,60 @@
         </p:blipFill>
         <p:spPr>
           <a:xfrm>
+            <a:off x="0" y="0"/>
+            <a:ext cx="12192000" cy="6858000"/>
+          </a:xfrm>
+          <a:prstGeom prst="rect">
+            <a:avLst/>
+          </a:prstGeom>
+          <a:noFill/>
+          <a:ln>
+            <a:noFill/>
+          </a:ln>
+        </p:spPr>
+      </p:pic>
+      <p:pic>
+        <p:nvPicPr>
+          <p:cNvPr id="129" name="Google Shape;129;p16" descr="image.png"/>
+          <p:cNvPicPr preferRelativeResize="0"/>
+          <p:nvPr/>
+        </p:nvPicPr>
+        <p:blipFill rotWithShape="1">
+          <a:blip r:embed="rId4"/>
+          <a:srcRect/>
+          <a:stretch>
+            <a:fillRect/>
+          </a:stretch>
+        </p:blipFill>
+        <p:spPr>
+          <a:xfrm>
+            <a:off x="571500" y="1814661"/>
+            <a:ext cx="5334000" cy="4727971"/>
+          </a:xfrm>
+          <a:prstGeom prst="rect">
+            <a:avLst/>
+          </a:prstGeom>
+          <a:noFill/>
+          <a:ln>
+            <a:noFill/>
+          </a:ln>
+        </p:spPr>
+      </p:pic>
+      <p:pic>
+        <p:nvPicPr>
+          <p:cNvPr id="130" name="Google Shape;130;p16" descr="image.png"/>
+          <p:cNvPicPr preferRelativeResize="0"/>
+          <p:nvPr/>
+        </p:nvPicPr>
+        <p:blipFill rotWithShape="1">
+          <a:blip r:embed="rId5"/>
+          <a:srcRect/>
+          <a:stretch>
+            <a:fillRect/>
+          </a:stretch>
+        </p:blipFill>
+        <p:spPr>
+          <a:xfrm>
             <a:off x="6286500" y="1814661"/>
             <a:ext cx="5334000" cy="4727971"/>
           </a:xfrm>
@@ -38518,7 +36675,7 @@
           <p:nvPr/>
         </p:nvPicPr>
         <p:blipFill rotWithShape="1">
-          <a:blip r:embed="rId4"/>
+          <a:blip r:embed="rId6"/>
           <a:srcRect/>
           <a:stretch>
             <a:fillRect/>
@@ -38587,15 +36744,6 @@
               </a:rPr>
               <a:t>"I operate under a very strict rule: 'First In, First Out'. If you want to insert something, you have to do it at my Rear, but if you want to remove something, you must take it from my Front."</a:t>
             </a:r>
-            <a:endParaRPr lang="en-US" sz="2100" b="0" i="1" u="none" strike="noStrike" cap="none">
-              <a:solidFill>
-                <a:srgbClr val="E2E8F0"/>
-              </a:solidFill>
-              <a:latin typeface="JetBrains Mono" panose="02000009000000000000"/>
-              <a:ea typeface="JetBrains Mono" panose="02000009000000000000"/>
-              <a:cs typeface="JetBrains Mono" panose="02000009000000000000"/>
-              <a:sym typeface="JetBrains Mono" panose="02000009000000000000"/>
-            </a:endParaRPr>
           </a:p>
         </p:txBody>
       </p:sp>
@@ -38648,15 +36796,6 @@
               </a:rPr>
               <a:t>Who am I?</a:t>
             </a:r>
-            <a:endParaRPr lang="en-US" sz="1800" b="0" i="0" u="none" strike="noStrike" cap="none">
-              <a:solidFill>
-                <a:srgbClr val="94A3B8"/>
-              </a:solidFill>
-              <a:latin typeface="Inter" panose="02000503000000020004"/>
-              <a:ea typeface="Inter" panose="02000503000000020004"/>
-              <a:cs typeface="Inter" panose="02000503000000020004"/>
-              <a:sym typeface="Inter" panose="02000503000000020004"/>
-            </a:endParaRPr>
           </a:p>
         </p:txBody>
       </p:sp>
@@ -38756,15 +36895,6 @@
               </a:rPr>
               <a:t>IDENTIFY THE STRUCTURE</a:t>
             </a:r>
-            <a:endParaRPr lang="en-US" sz="3300" b="1" i="0" u="none" strike="noStrike" cap="none">
-              <a:solidFill>
-                <a:srgbClr val="38BDF8"/>
-              </a:solidFill>
-              <a:latin typeface="Inter" panose="02000503000000020004"/>
-              <a:ea typeface="Inter" panose="02000503000000020004"/>
-              <a:cs typeface="Inter" panose="02000503000000020004"/>
-              <a:sym typeface="Inter" panose="02000503000000020004"/>
-            </a:endParaRPr>
           </a:p>
         </p:txBody>
       </p:sp>
@@ -38926,60 +37056,6 @@
           <p:nvPr/>
         </p:nvPicPr>
         <p:blipFill rotWithShape="1">
-          <a:blip r:embed="rId1"/>
-          <a:srcRect/>
-          <a:stretch>
-            <a:fillRect/>
-          </a:stretch>
-        </p:blipFill>
-        <p:spPr>
-          <a:xfrm>
-            <a:off x="0" y="0"/>
-            <a:ext cx="12192000" cy="6858000"/>
-          </a:xfrm>
-          <a:prstGeom prst="rect">
-            <a:avLst/>
-          </a:prstGeom>
-          <a:noFill/>
-          <a:ln>
-            <a:noFill/>
-          </a:ln>
-        </p:spPr>
-      </p:pic>
-      <p:pic>
-        <p:nvPicPr>
-          <p:cNvPr id="129" name="Google Shape;129;p16" descr="image.png"/>
-          <p:cNvPicPr preferRelativeResize="0"/>
-          <p:nvPr/>
-        </p:nvPicPr>
-        <p:blipFill rotWithShape="1">
-          <a:blip r:embed="rId2"/>
-          <a:srcRect/>
-          <a:stretch>
-            <a:fillRect/>
-          </a:stretch>
-        </p:blipFill>
-        <p:spPr>
-          <a:xfrm>
-            <a:off x="571500" y="1814661"/>
-            <a:ext cx="5334000" cy="4727971"/>
-          </a:xfrm>
-          <a:prstGeom prst="rect">
-            <a:avLst/>
-          </a:prstGeom>
-          <a:noFill/>
-          <a:ln>
-            <a:noFill/>
-          </a:ln>
-        </p:spPr>
-      </p:pic>
-      <p:pic>
-        <p:nvPicPr>
-          <p:cNvPr id="130" name="Google Shape;130;p16" descr="image.png"/>
-          <p:cNvPicPr preferRelativeResize="0"/>
-          <p:nvPr/>
-        </p:nvPicPr>
-        <p:blipFill rotWithShape="1">
           <a:blip r:embed="rId3"/>
           <a:srcRect/>
           <a:stretch>
@@ -38988,6 +37064,60 @@
         </p:blipFill>
         <p:spPr>
           <a:xfrm>
+            <a:off x="0" y="0"/>
+            <a:ext cx="12192000" cy="6858000"/>
+          </a:xfrm>
+          <a:prstGeom prst="rect">
+            <a:avLst/>
+          </a:prstGeom>
+          <a:noFill/>
+          <a:ln>
+            <a:noFill/>
+          </a:ln>
+        </p:spPr>
+      </p:pic>
+      <p:pic>
+        <p:nvPicPr>
+          <p:cNvPr id="129" name="Google Shape;129;p16" descr="image.png"/>
+          <p:cNvPicPr preferRelativeResize="0"/>
+          <p:nvPr/>
+        </p:nvPicPr>
+        <p:blipFill rotWithShape="1">
+          <a:blip r:embed="rId4"/>
+          <a:srcRect/>
+          <a:stretch>
+            <a:fillRect/>
+          </a:stretch>
+        </p:blipFill>
+        <p:spPr>
+          <a:xfrm>
+            <a:off x="571500" y="1814661"/>
+            <a:ext cx="5334000" cy="4727971"/>
+          </a:xfrm>
+          <a:prstGeom prst="rect">
+            <a:avLst/>
+          </a:prstGeom>
+          <a:noFill/>
+          <a:ln>
+            <a:noFill/>
+          </a:ln>
+        </p:spPr>
+      </p:pic>
+      <p:pic>
+        <p:nvPicPr>
+          <p:cNvPr id="130" name="Google Shape;130;p16" descr="image.png"/>
+          <p:cNvPicPr preferRelativeResize="0"/>
+          <p:nvPr/>
+        </p:nvPicPr>
+        <p:blipFill rotWithShape="1">
+          <a:blip r:embed="rId5"/>
+          <a:srcRect/>
+          <a:stretch>
+            <a:fillRect/>
+          </a:stretch>
+        </p:blipFill>
+        <p:spPr>
+          <a:xfrm>
             <a:off x="6286500" y="1814661"/>
             <a:ext cx="5334000" cy="4727971"/>
           </a:xfrm>
@@ -39007,7 +37137,7 @@
           <p:nvPr/>
         </p:nvPicPr>
         <p:blipFill rotWithShape="1">
-          <a:blip r:embed="rId4"/>
+          <a:blip r:embed="rId6"/>
           <a:srcRect/>
           <a:stretch>
             <a:fillRect/>
@@ -39129,15 +37259,6 @@
               </a:rPr>
               <a:t>Who am I?</a:t>
             </a:r>
-            <a:endParaRPr lang="en-US" sz="1800" b="0" i="0" u="none" strike="noStrike" cap="none">
-              <a:solidFill>
-                <a:srgbClr val="94A3B8"/>
-              </a:solidFill>
-              <a:latin typeface="Inter" panose="02000503000000020004"/>
-              <a:ea typeface="Inter" panose="02000503000000020004"/>
-              <a:cs typeface="Inter" panose="02000503000000020004"/>
-              <a:sym typeface="Inter" panose="02000503000000020004"/>
-            </a:endParaRPr>
           </a:p>
         </p:txBody>
       </p:sp>
@@ -39411,60 +37532,6 @@
           <p:nvPr/>
         </p:nvPicPr>
         <p:blipFill rotWithShape="1">
-          <a:blip r:embed="rId1"/>
-          <a:srcRect/>
-          <a:stretch>
-            <a:fillRect/>
-          </a:stretch>
-        </p:blipFill>
-        <p:spPr>
-          <a:xfrm>
-            <a:off x="0" y="0"/>
-            <a:ext cx="12192000" cy="6858000"/>
-          </a:xfrm>
-          <a:prstGeom prst="rect">
-            <a:avLst/>
-          </a:prstGeom>
-          <a:noFill/>
-          <a:ln>
-            <a:noFill/>
-          </a:ln>
-        </p:spPr>
-      </p:pic>
-      <p:pic>
-        <p:nvPicPr>
-          <p:cNvPr id="129" name="Google Shape;129;p16" descr="image.png"/>
-          <p:cNvPicPr preferRelativeResize="0"/>
-          <p:nvPr/>
-        </p:nvPicPr>
-        <p:blipFill rotWithShape="1">
-          <a:blip r:embed="rId2"/>
-          <a:srcRect/>
-          <a:stretch>
-            <a:fillRect/>
-          </a:stretch>
-        </p:blipFill>
-        <p:spPr>
-          <a:xfrm>
-            <a:off x="571500" y="1814661"/>
-            <a:ext cx="5334000" cy="4727971"/>
-          </a:xfrm>
-          <a:prstGeom prst="rect">
-            <a:avLst/>
-          </a:prstGeom>
-          <a:noFill/>
-          <a:ln>
-            <a:noFill/>
-          </a:ln>
-        </p:spPr>
-      </p:pic>
-      <p:pic>
-        <p:nvPicPr>
-          <p:cNvPr id="130" name="Google Shape;130;p16" descr="image.png"/>
-          <p:cNvPicPr preferRelativeResize="0"/>
-          <p:nvPr/>
-        </p:nvPicPr>
-        <p:blipFill rotWithShape="1">
           <a:blip r:embed="rId3"/>
           <a:srcRect/>
           <a:stretch>
@@ -39473,6 +37540,60 @@
         </p:blipFill>
         <p:spPr>
           <a:xfrm>
+            <a:off x="0" y="0"/>
+            <a:ext cx="12192000" cy="6858000"/>
+          </a:xfrm>
+          <a:prstGeom prst="rect">
+            <a:avLst/>
+          </a:prstGeom>
+          <a:noFill/>
+          <a:ln>
+            <a:noFill/>
+          </a:ln>
+        </p:spPr>
+      </p:pic>
+      <p:pic>
+        <p:nvPicPr>
+          <p:cNvPr id="129" name="Google Shape;129;p16" descr="image.png"/>
+          <p:cNvPicPr preferRelativeResize="0"/>
+          <p:nvPr/>
+        </p:nvPicPr>
+        <p:blipFill rotWithShape="1">
+          <a:blip r:embed="rId4"/>
+          <a:srcRect/>
+          <a:stretch>
+            <a:fillRect/>
+          </a:stretch>
+        </p:blipFill>
+        <p:spPr>
+          <a:xfrm>
+            <a:off x="571500" y="1814661"/>
+            <a:ext cx="5334000" cy="4727971"/>
+          </a:xfrm>
+          <a:prstGeom prst="rect">
+            <a:avLst/>
+          </a:prstGeom>
+          <a:noFill/>
+          <a:ln>
+            <a:noFill/>
+          </a:ln>
+        </p:spPr>
+      </p:pic>
+      <p:pic>
+        <p:nvPicPr>
+          <p:cNvPr id="130" name="Google Shape;130;p16" descr="image.png"/>
+          <p:cNvPicPr preferRelativeResize="0"/>
+          <p:nvPr/>
+        </p:nvPicPr>
+        <p:blipFill rotWithShape="1">
+          <a:blip r:embed="rId5"/>
+          <a:srcRect/>
+          <a:stretch>
+            <a:fillRect/>
+          </a:stretch>
+        </p:blipFill>
+        <p:spPr>
+          <a:xfrm>
             <a:off x="6286500" y="1814661"/>
             <a:ext cx="5334000" cy="4727971"/>
           </a:xfrm>
@@ -39492,7 +37613,7 @@
           <p:nvPr/>
         </p:nvPicPr>
         <p:blipFill rotWithShape="1">
-          <a:blip r:embed="rId4"/>
+          <a:blip r:embed="rId6"/>
           <a:srcRect/>
           <a:stretch>
             <a:fillRect/>
@@ -39614,15 +37735,6 @@
               </a:rPr>
               <a:t>Who am I?</a:t>
             </a:r>
-            <a:endParaRPr lang="en-US" sz="1800" b="0" i="0" u="none" strike="noStrike" cap="none">
-              <a:solidFill>
-                <a:srgbClr val="94A3B8"/>
-              </a:solidFill>
-              <a:latin typeface="Inter" panose="02000503000000020004"/>
-              <a:ea typeface="Inter" panose="02000503000000020004"/>
-              <a:cs typeface="Inter" panose="02000503000000020004"/>
-              <a:sym typeface="Inter" panose="02000503000000020004"/>
-            </a:endParaRPr>
           </a:p>
         </p:txBody>
       </p:sp>
@@ -39904,7 +38016,7 @@
           <p:nvPr/>
         </p:nvPicPr>
         <p:blipFill rotWithShape="1">
-          <a:blip r:embed="rId1"/>
+          <a:blip r:embed="rId3"/>
           <a:srcRect/>
           <a:stretch>
             <a:fillRect/>
@@ -40071,15 +38183,6 @@
               </a:rPr>
               <a:t>Object-Oriented Programming</a:t>
             </a:r>
-            <a:endParaRPr lang="en-US" sz="6000" b="1" i="0" u="none" strike="noStrike" cap="none">
-              <a:solidFill>
-                <a:srgbClr val="F8FAFC"/>
-              </a:solidFill>
-              <a:latin typeface="Inter" panose="02000503000000020004"/>
-              <a:ea typeface="Inter" panose="02000503000000020004"/>
-              <a:cs typeface="Inter" panose="02000503000000020004"/>
-              <a:sym typeface="Inter" panose="02000503000000020004"/>
-            </a:endParaRPr>
           </a:p>
         </p:txBody>
       </p:sp>
@@ -40171,7 +38274,7 @@
           <p:nvPr/>
         </p:nvPicPr>
         <p:blipFill rotWithShape="1">
-          <a:blip r:embed="rId1"/>
+          <a:blip r:embed="rId3"/>
           <a:srcRect/>
           <a:stretch>
             <a:fillRect/>
@@ -40198,7 +38301,7 @@
           <p:nvPr/>
         </p:nvPicPr>
         <p:blipFill rotWithShape="1">
-          <a:blip r:embed="rId2"/>
+          <a:blip r:embed="rId4"/>
           <a:srcRect/>
           <a:stretch>
             <a:fillRect/>
@@ -40267,15 +38370,6 @@
               </a:rPr>
               <a:t>Wrapping data and methods together into a single unit is known as:</a:t>
             </a:r>
-            <a:endParaRPr lang="en-US" sz="1800" b="0" i="0" u="none" strike="noStrike" cap="none">
-              <a:solidFill>
-                <a:srgbClr val="CBD5E1"/>
-              </a:solidFill>
-              <a:latin typeface="Inter" panose="02000503000000020004"/>
-              <a:ea typeface="Inter" panose="02000503000000020004"/>
-              <a:cs typeface="Inter" panose="02000503000000020004"/>
-              <a:sym typeface="Inter" panose="02000503000000020004"/>
-            </a:endParaRPr>
           </a:p>
         </p:txBody>
       </p:sp>
@@ -40325,15 +38419,6 @@
               </a:rPr>
               <a:t>C) Encapsulation</a:t>
             </a:r>
-            <a:endParaRPr lang="en-US" sz="2100" b="0" i="0" u="none" strike="noStrike" cap="none">
-              <a:solidFill>
-                <a:srgbClr val="FEF08A"/>
-              </a:solidFill>
-              <a:latin typeface="Inter Black"/>
-              <a:ea typeface="Inter Black"/>
-              <a:cs typeface="Inter Black"/>
-              <a:sym typeface="Inter Black"/>
-            </a:endParaRPr>
           </a:p>
         </p:txBody>
       </p:sp>
@@ -40442,15 +38527,6 @@
               </a:rPr>
               <a:t>A) Inheritance</a:t>
             </a:r>
-            <a:endParaRPr lang="en-US" sz="1800" b="0" i="0" u="none" strike="noStrike" cap="none">
-              <a:solidFill>
-                <a:srgbClr val="CBD5E1"/>
-              </a:solidFill>
-              <a:latin typeface="Inter" panose="02000503000000020004"/>
-              <a:ea typeface="Inter" panose="02000503000000020004"/>
-              <a:cs typeface="Inter" panose="02000503000000020004"/>
-              <a:sym typeface="Inter" panose="02000503000000020004"/>
-            </a:endParaRPr>
           </a:p>
         </p:txBody>
       </p:sp>
@@ -40559,15 +38635,6 @@
               </a:rPr>
               <a:t>B) Polymorphism</a:t>
             </a:r>
-            <a:endParaRPr lang="en-US" sz="1800" b="0" i="0" u="none" strike="noStrike" cap="none">
-              <a:solidFill>
-                <a:srgbClr val="CBD5E1"/>
-              </a:solidFill>
-              <a:latin typeface="Inter" panose="02000503000000020004"/>
-              <a:ea typeface="Inter" panose="02000503000000020004"/>
-              <a:cs typeface="Inter" panose="02000503000000020004"/>
-              <a:sym typeface="Inter" panose="02000503000000020004"/>
-            </a:endParaRPr>
           </a:p>
         </p:txBody>
       </p:sp>
@@ -40676,15 +38743,6 @@
               </a:rPr>
               <a:t>C) Encapsulation</a:t>
             </a:r>
-            <a:endParaRPr lang="en-US" sz="1800" b="0" i="0" u="none" strike="noStrike" cap="none">
-              <a:solidFill>
-                <a:srgbClr val="CBD5E1"/>
-              </a:solidFill>
-              <a:latin typeface="Inter" panose="02000503000000020004"/>
-              <a:ea typeface="Inter" panose="02000503000000020004"/>
-              <a:cs typeface="Inter" panose="02000503000000020004"/>
-              <a:sym typeface="Inter" panose="02000503000000020004"/>
-            </a:endParaRPr>
           </a:p>
         </p:txBody>
       </p:sp>
@@ -40793,15 +38851,6 @@
               </a:rPr>
               <a:t>D) Abstraction</a:t>
             </a:r>
-            <a:endParaRPr lang="en-US" sz="1800" b="0" i="0" u="none" strike="noStrike" cap="none">
-              <a:solidFill>
-                <a:srgbClr val="CBD5E1"/>
-              </a:solidFill>
-              <a:latin typeface="Inter" panose="02000503000000020004"/>
-              <a:ea typeface="Inter" panose="02000503000000020004"/>
-              <a:cs typeface="Inter" panose="02000503000000020004"/>
-              <a:sym typeface="Inter" panose="02000503000000020004"/>
-            </a:endParaRPr>
           </a:p>
         </p:txBody>
       </p:sp>
@@ -41004,7 +39053,7 @@
           <p:nvPr/>
         </p:nvPicPr>
         <p:blipFill rotWithShape="1">
-          <a:blip r:embed="rId3"/>
+          <a:blip r:embed="rId5"/>
           <a:srcRect/>
           <a:stretch>
             <a:fillRect/>
@@ -41031,7 +39080,7 @@
           <p:nvPr/>
         </p:nvPicPr>
         <p:blipFill rotWithShape="1">
-          <a:blip r:embed="rId3"/>
+          <a:blip r:embed="rId5"/>
           <a:srcRect/>
           <a:stretch>
             <a:fillRect/>
@@ -41058,7 +39107,7 @@
           <p:nvPr/>
         </p:nvPicPr>
         <p:blipFill rotWithShape="1">
-          <a:blip r:embed="rId3"/>
+          <a:blip r:embed="rId5"/>
           <a:srcRect/>
           <a:stretch>
             <a:fillRect/>
@@ -41085,7 +39134,7 @@
           <p:nvPr/>
         </p:nvPicPr>
         <p:blipFill rotWithShape="1">
-          <a:blip r:embed="rId3"/>
+          <a:blip r:embed="rId5"/>
           <a:srcRect/>
           <a:stretch>
             <a:fillRect/>
@@ -41151,15 +39200,6 @@
               </a:rPr>
               <a:t>CORE PRINCIPLES</a:t>
             </a:r>
-            <a:endParaRPr lang="en-US" sz="3300" b="1" i="0" u="none" strike="noStrike" cap="none">
-              <a:solidFill>
-                <a:srgbClr val="38BDF8"/>
-              </a:solidFill>
-              <a:latin typeface="Inter" panose="02000503000000020004"/>
-              <a:ea typeface="Inter" panose="02000503000000020004"/>
-              <a:cs typeface="Inter" panose="02000503000000020004"/>
-              <a:sym typeface="Inter" panose="02000503000000020004"/>
-            </a:endParaRPr>
           </a:p>
         </p:txBody>
       </p:sp>
@@ -41350,7 +39390,7 @@
           <p:nvPr/>
         </p:nvPicPr>
         <p:blipFill rotWithShape="1">
-          <a:blip r:embed="rId1"/>
+          <a:blip r:embed="rId3"/>
           <a:srcRect/>
           <a:stretch>
             <a:fillRect/>
@@ -41377,7 +39417,7 @@
           <p:nvPr/>
         </p:nvPicPr>
         <p:blipFill rotWithShape="1">
-          <a:blip r:embed="rId2"/>
+          <a:blip r:embed="rId4"/>
           <a:srcRect/>
           <a:stretch>
             <a:fillRect/>
@@ -41446,15 +39486,6 @@
               </a:rPr>
               <a:t>Which concept allows a subclass to provide a specific implementation of a method already defined in its superclass?</a:t>
             </a:r>
-            <a:endParaRPr lang="en-US" sz="1800" b="0" i="0" u="none" strike="noStrike" cap="none">
-              <a:solidFill>
-                <a:srgbClr val="CBD5E1"/>
-              </a:solidFill>
-              <a:latin typeface="Inter" panose="02000503000000020004"/>
-              <a:ea typeface="Inter" panose="02000503000000020004"/>
-              <a:cs typeface="Inter" panose="02000503000000020004"/>
-              <a:sym typeface="Inter" panose="02000503000000020004"/>
-            </a:endParaRPr>
           </a:p>
         </p:txBody>
       </p:sp>
@@ -41504,15 +39535,6 @@
               </a:rPr>
               <a:t>B) Method Overriding</a:t>
             </a:r>
-            <a:endParaRPr lang="en-US" sz="2100" b="0" i="0" u="none" strike="noStrike" cap="none">
-              <a:solidFill>
-                <a:srgbClr val="FEF08A"/>
-              </a:solidFill>
-              <a:latin typeface="Inter Black"/>
-              <a:ea typeface="Inter Black"/>
-              <a:cs typeface="Inter Black"/>
-              <a:sym typeface="Inter Black"/>
-            </a:endParaRPr>
           </a:p>
         </p:txBody>
       </p:sp>
@@ -41621,15 +39643,6 @@
               </a:rPr>
               <a:t>A) Method Overloading</a:t>
             </a:r>
-            <a:endParaRPr lang="en-US" sz="1800" b="0" i="0" u="none" strike="noStrike" cap="none">
-              <a:solidFill>
-                <a:srgbClr val="CBD5E1"/>
-              </a:solidFill>
-              <a:latin typeface="Inter" panose="02000503000000020004"/>
-              <a:ea typeface="Inter" panose="02000503000000020004"/>
-              <a:cs typeface="Inter" panose="02000503000000020004"/>
-              <a:sym typeface="Inter" panose="02000503000000020004"/>
-            </a:endParaRPr>
           </a:p>
         </p:txBody>
       </p:sp>
@@ -41738,15 +39751,6 @@
               </a:rPr>
               <a:t>B) Method Overriding</a:t>
             </a:r>
-            <a:endParaRPr lang="en-US" sz="1800" b="0" i="0" u="none" strike="noStrike" cap="none">
-              <a:solidFill>
-                <a:srgbClr val="CBD5E1"/>
-              </a:solidFill>
-              <a:latin typeface="Inter" panose="02000503000000020004"/>
-              <a:ea typeface="Inter" panose="02000503000000020004"/>
-              <a:cs typeface="Inter" panose="02000503000000020004"/>
-              <a:sym typeface="Inter" panose="02000503000000020004"/>
-            </a:endParaRPr>
           </a:p>
         </p:txBody>
       </p:sp>
@@ -41855,15 +39859,6 @@
               </a:rPr>
               <a:t>C) Composition</a:t>
             </a:r>
-            <a:endParaRPr lang="en-US" sz="1800" b="0" i="0" u="none" strike="noStrike" cap="none">
-              <a:solidFill>
-                <a:srgbClr val="CBD5E1"/>
-              </a:solidFill>
-              <a:latin typeface="Inter" panose="02000503000000020004"/>
-              <a:ea typeface="Inter" panose="02000503000000020004"/>
-              <a:cs typeface="Inter" panose="02000503000000020004"/>
-              <a:sym typeface="Inter" panose="02000503000000020004"/>
-            </a:endParaRPr>
           </a:p>
         </p:txBody>
       </p:sp>
@@ -41972,15 +39967,6 @@
               </a:rPr>
               <a:t>D) Encapsulation</a:t>
             </a:r>
-            <a:endParaRPr lang="en-US" sz="1800" b="0" i="0" u="none" strike="noStrike" cap="none">
-              <a:solidFill>
-                <a:srgbClr val="CBD5E1"/>
-              </a:solidFill>
-              <a:latin typeface="Inter" panose="02000503000000020004"/>
-              <a:ea typeface="Inter" panose="02000503000000020004"/>
-              <a:cs typeface="Inter" panose="02000503000000020004"/>
-              <a:sym typeface="Inter" panose="02000503000000020004"/>
-            </a:endParaRPr>
           </a:p>
         </p:txBody>
       </p:sp>
@@ -42183,7 +40169,7 @@
           <p:nvPr/>
         </p:nvPicPr>
         <p:blipFill rotWithShape="1">
-          <a:blip r:embed="rId3"/>
+          <a:blip r:embed="rId5"/>
           <a:srcRect/>
           <a:stretch>
             <a:fillRect/>
@@ -42210,7 +40196,7 @@
           <p:nvPr/>
         </p:nvPicPr>
         <p:blipFill rotWithShape="1">
-          <a:blip r:embed="rId3"/>
+          <a:blip r:embed="rId5"/>
           <a:srcRect/>
           <a:stretch>
             <a:fillRect/>
@@ -42237,7 +40223,7 @@
           <p:nvPr/>
         </p:nvPicPr>
         <p:blipFill rotWithShape="1">
-          <a:blip r:embed="rId3"/>
+          <a:blip r:embed="rId5"/>
           <a:srcRect/>
           <a:stretch>
             <a:fillRect/>
@@ -42264,7 +40250,7 @@
           <p:nvPr/>
         </p:nvPicPr>
         <p:blipFill rotWithShape="1">
-          <a:blip r:embed="rId3"/>
+          <a:blip r:embed="rId5"/>
           <a:srcRect/>
           <a:stretch>
             <a:fillRect/>
@@ -42330,15 +40316,6 @@
               </a:rPr>
               <a:t>METHOD REDEFINITION</a:t>
             </a:r>
-            <a:endParaRPr lang="en-US" sz="3300" b="1" i="0" u="none" strike="noStrike" cap="none">
-              <a:solidFill>
-                <a:srgbClr val="38BDF8"/>
-              </a:solidFill>
-              <a:latin typeface="Inter" panose="02000503000000020004"/>
-              <a:ea typeface="Inter" panose="02000503000000020004"/>
-              <a:cs typeface="Inter" panose="02000503000000020004"/>
-              <a:sym typeface="Inter" panose="02000503000000020004"/>
-            </a:endParaRPr>
           </a:p>
         </p:txBody>
       </p:sp>
@@ -42773,6 +40750,8 @@
       </a:bgFillStyleLst>
     </a:fmtScheme>
   </a:themeElements>
+  <a:objectDefaults/>
+  <a:extraClrSchemeLst/>
   <a:extLst>
     <a:ext uri="{05A4C25C-085E-4340-85A3-A5531E510DB2}">
       <thm15:themeFamily xmlns:thm15="http://schemas.microsoft.com/office/thememl/2012/main" name="Office Theme" id="{62F939B6-93AF-4DB8-9C6B-D6C7DFDC589F}" vid="{4A3C46E8-61CC-4603-A589-7422A47A8E4A}"/>
@@ -43057,6 +41036,8 @@
       </a:bgFillStyleLst>
     </a:fmtScheme>
   </a:themeElements>
+  <a:objectDefaults/>
+  <a:extraClrSchemeLst/>
   <a:extLst>
     <a:ext uri="{05A4C25C-085E-4340-85A3-A5531E510DB2}">
       <thm15:themeFamily xmlns:thm15="http://schemas.microsoft.com/office/thememl/2012/main" name="Office Theme" id="{62F939B6-93AF-4DB8-9C6B-D6C7DFDC589F}" vid="{4A3C46E8-61CC-4603-A589-7422A47A8E4A}"/>
